--- a/docs/Presentation-Suivi-Exploitation.pptx
+++ b/docs/Presentation-Suivi-Exploitation.pptx
@@ -4833,7 +4833,7 @@
                 </a:solidFill>
                 <a:latin typeface="Calibri"/>
               </a:rPr>
-              <a:t>–  Clés suivi : EmailsAdmin, MoteurMail, Template, DossierSquads, DossierLogs, Squads.</a:t>
+              <a:t>–  Clés suivi : EmailsAdmin, MoteurMail, TemplateClasseur, DossierSquads, DossierLogs, Squads.</a:t>
             </a:r>
           </a:p>
           <a:p>

--- a/docs/Presentation-Suivi-Exploitation.pptx
+++ b/docs/Presentation-Suivi-Exploitation.pptx
@@ -16,6 +16,8 @@
     <p:sldId id="264" r:id="rId15"/>
     <p:sldId id="265" r:id="rId16"/>
     <p:sldId id="266" r:id="rId17"/>
+    <p:sldId id="267" r:id="rId18"/>
+    <p:sldId id="268" r:id="rId19"/>
   </p:sldIdLst>
   <p:sldSz cx="12191695" cy="6858000" type="screen4x3"/>
   <p:notesSz cx="6858000" cy="9144000"/>
@@ -3113,7 +3115,7 @@
             <a:avLst/>
           </a:prstGeom>
           <a:solidFill>
-            <a:srgbClr val="005BAA"/>
+            <a:srgbClr val="212B36"/>
           </a:solidFill>
           <a:ln>
             <a:noFill/>
@@ -3150,8 +3152,8 @@
         </p:nvSpPr>
         <p:spPr>
           <a:xfrm>
-            <a:off x="0" y="4206240"/>
-            <a:ext cx="12191695" cy="50800"/>
+            <a:off x="0" y="4480560"/>
+            <a:ext cx="12191695" cy="38100"/>
           </a:xfrm>
           <a:prstGeom prst="rect">
             <a:avLst/>
@@ -3195,7 +3197,7 @@
         <p:spPr>
           <a:xfrm>
             <a:off x="822960" y="2011680"/>
-            <a:ext cx="10515600" cy="2194560"/>
+            <a:ext cx="10515600" cy="1463040"/>
           </a:xfrm>
           <a:prstGeom prst="rect">
             <a:avLst/>
@@ -3203,7 +3205,7 @@
           <a:noFill/>
         </p:spPr>
         <p:txBody>
-          <a:bodyPr wrap="square" anchor="t">
+          <a:bodyPr wrap="square">
             <a:spAutoFit/>
           </a:bodyPr>
           <a:lstStyle/>
@@ -3222,11 +3224,11 @@
             <a:r>
               <a:rPr sz="2000" b="0" i="0">
                 <a:solidFill>
-                  <a:srgbClr val="CFE2F3"/>
-                </a:solidFill>
-                <a:latin typeface="Calibri"/>
-              </a:rPr>
-              <a:t>Désignation hebdomadaire automatique + annonce et rappel par mail</a:t>
+                  <a:srgbClr val="B9E8E8"/>
+                </a:solidFill>
+                <a:latin typeface="Calibri"/>
+              </a:rPr>
+              <a:t>Désignation hebdomadaire automatique, par squad et par rôle — annonce le vendredi, rappel le lundi</a:t>
             </a:r>
           </a:p>
         </p:txBody>
@@ -3239,7 +3241,7 @@
         </p:nvSpPr>
         <p:spPr>
           <a:xfrm>
-            <a:off x="868680" y="4434840"/>
+            <a:off x="822960" y="4754880"/>
             <a:ext cx="10515600" cy="1097280"/>
           </a:xfrm>
           <a:prstGeom prst="rect">
@@ -3248,19 +3250,30 @@
           <a:noFill/>
         </p:spPr>
         <p:txBody>
-          <a:bodyPr wrap="square" anchor="t">
+          <a:bodyPr wrap="square">
             <a:spAutoFit/>
           </a:bodyPr>
           <a:lstStyle/>
           <a:p>
             <a:r>
-              <a:rPr sz="1400" b="0" i="0">
-                <a:solidFill>
-                  <a:srgbClr val="FFFFFF"/>
-                </a:solidFill>
-                <a:latin typeface="Calibri"/>
-              </a:rPr>
-              <a:t>PowerShell 5.1  ·  Excel  ·  Windows Task Scheduler  ·  1 personne par rôle (solo / binôme / trio)</a:t>
+              <a:rPr sz="1500" b="0" i="0">
+                <a:solidFill>
+                  <a:srgbClr val="C9D3DC"/>
+                </a:solidFill>
+                <a:latin typeface="Calibri"/>
+              </a:rPr>
+              <a:t>PowerShell 5.1 + Excel · Task Scheduler · partage réseau Windows</a:t>
+            </a:r>
+          </a:p>
+          <a:p>
+            <a:r>
+              <a:rPr sz="1300" b="0" i="1">
+                <a:solidFill>
+                  <a:srgbClr val="8F9BA8"/>
+                </a:solidFill>
+                <a:latin typeface="Calibri"/>
+              </a:rPr>
+              <a:t>Présentation &amp; revue de code — juillet 2026</a:t>
             </a:r>
           </a:p>
         </p:txBody>
@@ -3292,51 +3305,7 @@
         <p:spPr>
           <a:xfrm>
             <a:off x="0" y="0"/>
-            <a:ext cx="12191695" cy="1051560"/>
-          </a:xfrm>
-          <a:prstGeom prst="rect">
-            <a:avLst/>
-          </a:prstGeom>
-          <a:solidFill>
-            <a:srgbClr val="1F2A37"/>
-          </a:solidFill>
-          <a:ln>
-            <a:noFill/>
-          </a:ln>
-          <a:effectLst/>
-        </p:spPr>
-        <p:style>
-          <a:lnRef idx="1">
-            <a:schemeClr val="accent1"/>
-          </a:lnRef>
-          <a:fillRef idx="3">
-            <a:schemeClr val="accent1"/>
-          </a:fillRef>
-          <a:effectRef idx="2">
-            <a:schemeClr val="accent1"/>
-          </a:effectRef>
-          <a:fontRef idx="minor">
-            <a:schemeClr val="lt1"/>
-          </a:fontRef>
-        </p:style>
-        <p:txBody>
-          <a:bodyPr rtlCol="0" anchor="ctr"/>
-          <a:lstStyle/>
-          <a:p>
-            <a:pPr algn="ctr"/>
-          </a:p>
-        </p:txBody>
-      </p:sp>
-      <p:sp>
-        <p:nvSpPr>
-          <p:cNvPr id="3" name="Rectangle 2"/>
-          <p:cNvSpPr/>
-          <p:nvPr/>
-        </p:nvSpPr>
-        <p:spPr>
-          <a:xfrm>
-            <a:off x="0" y="1051560"/>
-            <a:ext cx="12191695" cy="38100"/>
+            <a:ext cx="201168" cy="6858000"/>
           </a:xfrm>
           <a:prstGeom prst="rect">
             <a:avLst/>
@@ -3373,14 +3342,14 @@
       </p:sp>
       <p:sp>
         <p:nvSpPr>
-          <p:cNvPr id="4" name="TextBox 3"/>
+          <p:cNvPr id="3" name="TextBox 2"/>
           <p:cNvSpPr txBox="1"/>
           <p:nvPr/>
         </p:nvSpPr>
         <p:spPr>
           <a:xfrm>
-            <a:off x="548640" y="109728"/>
-            <a:ext cx="11064240" cy="914400"/>
+            <a:off x="502920" y="256032"/>
+            <a:ext cx="11247120" cy="822960"/>
           </a:xfrm>
           <a:prstGeom prst="rect">
             <a:avLst/>
@@ -3388,44 +3357,33 @@
           <a:noFill/>
         </p:spPr>
         <p:txBody>
-          <a:bodyPr wrap="square" anchor="t">
+          <a:bodyPr wrap="square">
             <a:spAutoFit/>
           </a:bodyPr>
           <a:lstStyle/>
           <a:p>
             <a:r>
-              <a:rPr sz="1200" b="1" i="0">
-                <a:solidFill>
-                  <a:srgbClr val="CFE2F3"/>
-                </a:solidFill>
-                <a:latin typeface="Calibri"/>
-              </a:rPr>
-              <a:t>À GARDER EN TÊTE</a:t>
-            </a:r>
-          </a:p>
-          <a:p>
-            <a:r>
-              <a:rPr sz="2800" b="1" i="0">
-                <a:solidFill>
-                  <a:srgbClr val="FFFFFF"/>
-                </a:solidFill>
-                <a:latin typeface="Calibri"/>
-              </a:rPr>
-              <a:t>Limitations connues</a:t>
-            </a:r>
-          </a:p>
-        </p:txBody>
-      </p:sp>
-      <p:sp>
-        <p:nvSpPr>
-          <p:cNvPr id="5" name="TextBox 4"/>
+              <a:rPr sz="3000" b="1" i="0">
+                <a:solidFill>
+                  <a:srgbClr val="212B36"/>
+                </a:solidFill>
+                <a:latin typeface="Calibri"/>
+              </a:rPr>
+              <a:t>Robustesse &amp; exploitation</a:t>
+            </a:r>
+          </a:p>
+        </p:txBody>
+      </p:sp>
+      <p:sp>
+        <p:nvSpPr>
+          <p:cNvPr id="4" name="TextBox 3"/>
           <p:cNvSpPr txBox="1"/>
           <p:nvPr/>
         </p:nvSpPr>
         <p:spPr>
           <a:xfrm>
-            <a:off x="640080" y="1325880"/>
-            <a:ext cx="10881360" cy="5029200"/>
+            <a:off x="502920" y="868680"/>
+            <a:ext cx="11247120" cy="457200"/>
           </a:xfrm>
           <a:prstGeom prst="rect">
             <a:avLst/>
@@ -3433,89 +3391,64 @@
           <a:noFill/>
         </p:spPr>
         <p:txBody>
-          <a:bodyPr wrap="square" anchor="t">
+          <a:bodyPr wrap="square">
             <a:spAutoFit/>
           </a:bodyPr>
           <a:lstStyle/>
           <a:p>
-            <a:pPr>
-              <a:spcAft>
-                <a:spcPts val="600"/>
-              </a:spcAft>
-            </a:pPr>
-            <a:r>
-              <a:rPr sz="1800" b="1" i="0">
-                <a:solidFill>
-                  <a:srgbClr val="1F2A37"/>
-                </a:solidFill>
-                <a:latin typeface="Calibri"/>
-              </a:rPr>
-              <a:t>▪  Moteur mail requis (pas d'envoi de secours).</a:t>
-            </a:r>
-          </a:p>
-          <a:p>
-            <a:pPr>
-              <a:spcAft>
-                <a:spcPts val="600"/>
-              </a:spcAft>
-            </a:pPr>
-            <a:r>
-              <a:rPr sz="1800" b="1" i="0">
-                <a:solidFill>
-                  <a:srgbClr val="1F2A37"/>
-                </a:solidFill>
-                <a:latin typeface="Calibri"/>
-              </a:rPr>
-              <a:t>▪  SMTP anonyme uniquement.</a:t>
-            </a:r>
-          </a:p>
-          <a:p>
-            <a:pPr>
-              <a:spcAft>
-                <a:spcPts val="600"/>
-              </a:spcAft>
-            </a:pPr>
-            <a:r>
-              <a:rPr sz="1800" b="1" i="0">
-                <a:solidFill>
-                  <a:srgbClr val="1F2A37"/>
-                </a:solidFill>
-                <a:latin typeface="Calibri"/>
-              </a:rPr>
-              <a:t>▪  Congés en journées entières (ni demi-journées ni jours fériés).</a:t>
-            </a:r>
-          </a:p>
-          <a:p>
-            <a:pPr>
-              <a:spcAft>
-                <a:spcPts val="600"/>
-              </a:spcAft>
-            </a:pPr>
-            <a:r>
-              <a:rPr sz="1800" b="1" i="0">
-                <a:solidFill>
-                  <a:srgbClr val="1F2A37"/>
-                </a:solidFill>
-                <a:latin typeface="Calibri"/>
-              </a:rPr>
-              <a:t>▪  Pas de garde anti-doublon d'envoi.</a:t>
-            </a:r>
-          </a:p>
-          <a:p>
-            <a:pPr>
-              <a:spcAft>
-                <a:spcPts val="600"/>
-              </a:spcAft>
-            </a:pPr>
-            <a:r>
-              <a:rPr sz="1800" b="1" i="0">
-                <a:solidFill>
-                  <a:srgbClr val="1F2A37"/>
-                </a:solidFill>
-                <a:latin typeface="Calibri"/>
-              </a:rPr>
-              <a:t>▪  Windows + PowerShell 5.1 + Excel ; fichiers en UTF-8 avec BOM.</a:t>
-            </a:r>
+            <a:r>
+              <a:rPr sz="1500" b="0" i="1">
+                <a:solidFill>
+                  <a:srgbClr val="5A6672"/>
+                </a:solidFill>
+                <a:latin typeface="Calibri"/>
+              </a:rPr>
+              <a:t>Pensé pour tourner sans surveillance sur un partage réseau</a:t>
+            </a:r>
+          </a:p>
+        </p:txBody>
+      </p:sp>
+      <p:sp>
+        <p:nvSpPr>
+          <p:cNvPr id="5" name="Rectangle 4"/>
+          <p:cNvSpPr/>
+          <p:nvPr/>
+        </p:nvSpPr>
+        <p:spPr>
+          <a:xfrm>
+            <a:off x="502920" y="1234440"/>
+            <a:ext cx="11155680" cy="27940"/>
+          </a:xfrm>
+          <a:prstGeom prst="rect">
+            <a:avLst/>
+          </a:prstGeom>
+          <a:solidFill>
+            <a:srgbClr val="00A8A8"/>
+          </a:solidFill>
+          <a:ln>
+            <a:noFill/>
+          </a:ln>
+          <a:effectLst/>
+        </p:spPr>
+        <p:style>
+          <a:lnRef idx="1">
+            <a:schemeClr val="accent1"/>
+          </a:lnRef>
+          <a:fillRef idx="3">
+            <a:schemeClr val="accent1"/>
+          </a:fillRef>
+          <a:effectRef idx="2">
+            <a:schemeClr val="accent1"/>
+          </a:effectRef>
+          <a:fontRef idx="minor">
+            <a:schemeClr val="lt1"/>
+          </a:fontRef>
+        </p:style>
+        <p:txBody>
+          <a:bodyPr rtlCol="0" anchor="ctr"/>
+          <a:lstStyle/>
+          <a:p>
+            <a:pPr algn="ctr"/>
           </a:p>
         </p:txBody>
       </p:sp>
@@ -3527,8 +3460,8 @@
         </p:nvSpPr>
         <p:spPr>
           <a:xfrm>
-            <a:off x="548640" y="6400800"/>
-            <a:ext cx="11064240" cy="365760"/>
+            <a:off x="502920" y="1554480"/>
+            <a:ext cx="11155680" cy="4937760"/>
           </a:xfrm>
           <a:prstGeom prst="rect">
             <a:avLst/>
@@ -3536,19 +3469,197 @@
           <a:noFill/>
         </p:spPr>
         <p:txBody>
-          <a:bodyPr wrap="square" anchor="t">
+          <a:bodyPr wrap="square">
             <a:spAutoFit/>
           </a:bodyPr>
           <a:lstStyle/>
           <a:p>
-            <a:r>
-              <a:rPr sz="900" b="0" i="0">
-                <a:solidFill>
-                  <a:srgbClr val="5B6670"/>
-                </a:solidFill>
-                <a:latin typeface="Calibri"/>
-              </a:rPr>
-              <a:t>Suivi d'Exploitation Multi-Squads</a:t>
+            <a:pPr>
+              <a:spcAft>
+                <a:spcPts val="800"/>
+              </a:spcAft>
+              <a:buFont typeface="Arial"/>
+              <a:buChar char="▪"/>
+            </a:pPr>
+            <a:r>
+              <a:rPr sz="1600" b="1" i="0">
+                <a:solidFill>
+                  <a:srgbClr val="212B36"/>
+                </a:solidFill>
+                <a:latin typeface="Calibri"/>
+              </a:rPr>
+              <a:t>Verrou applicatif</a:t>
+            </a:r>
+            <a:r>
+              <a:rPr sz="1600" b="0" i="0">
+                <a:solidFill>
+                  <a:srgbClr val="212B36"/>
+                </a:solidFill>
+                <a:latin typeface="Calibri"/>
+              </a:rPr>
+              <a:t> &lt;squad&gt;\suivi_exploitation.lock honoré : abandon si un traitement est en cours (verrou &lt; 120 min), verrou orphelin ignoré avec WARN ; seul le créateur du verrou le supprime</a:t>
+            </a:r>
+          </a:p>
+          <a:p>
+            <a:pPr>
+              <a:spcAft>
+                <a:spcPts val="800"/>
+              </a:spcAft>
+              <a:buFont typeface="Arial"/>
+              <a:buChar char="▪"/>
+            </a:pPr>
+            <a:r>
+              <a:rPr sz="1600" b="1" i="0">
+                <a:solidFill>
+                  <a:srgbClr val="212B36"/>
+                </a:solidFill>
+                <a:latin typeface="Calibri"/>
+              </a:rPr>
+              <a:t>Attente du verrou Excel</a:t>
+            </a:r>
+            <a:r>
+              <a:rPr sz="1600" b="0" i="0">
+                <a:solidFill>
+                  <a:srgbClr val="212B36"/>
+                </a:solidFill>
+                <a:latin typeface="Calibri"/>
+              </a:rPr>
+              <a:t> ~$ : jusqu'à 6 × 30 s si un utilisateur a le classeur ouvert</a:t>
+            </a:r>
+          </a:p>
+          <a:p>
+            <a:pPr>
+              <a:spcAft>
+                <a:spcPts val="800"/>
+              </a:spcAft>
+              <a:buFont typeface="Arial"/>
+              <a:buChar char="▪"/>
+            </a:pPr>
+            <a:r>
+              <a:rPr sz="1600" b="1" i="0">
+                <a:solidFill>
+                  <a:srgbClr val="212B36"/>
+                </a:solidFill>
+                <a:latin typeface="Calibri"/>
+              </a:rPr>
+              <a:t>Écriture transactionnelle</a:t>
+            </a:r>
+            <a:r>
+              <a:rPr sz="1600" b="0" i="0">
+                <a:solidFill>
+                  <a:srgbClr val="212B36"/>
+                </a:solidFill>
+                <a:latin typeface="Calibri"/>
+              </a:rPr>
+              <a:t> : calcul dans un .tmp → copie de l'état courant dans historique\ → promotion du .tmp ; aucune fenêtre où le classeur disparaît</a:t>
+            </a:r>
+          </a:p>
+          <a:p>
+            <a:pPr>
+              <a:spcAft>
+                <a:spcPts val="800"/>
+              </a:spcAft>
+              <a:buFont typeface="Arial"/>
+              <a:buChar char="▪"/>
+            </a:pPr>
+            <a:r>
+              <a:rPr sz="1600" b="1" i="0">
+                <a:solidFill>
+                  <a:srgbClr val="212B36"/>
+                </a:solidFill>
+                <a:latin typeface="Calibri"/>
+              </a:rPr>
+              <a:t>Orchestrateur résilient</a:t>
+            </a:r>
+            <a:r>
+              <a:rPr sz="1600" b="0" i="0">
+                <a:solidFill>
+                  <a:srgbClr val="212B36"/>
+                </a:solidFill>
+                <a:latin typeface="Calibri"/>
+              </a:rPr>
+              <a:t> : try/catch par squad — une squad en échec n'arrête pas les autres ; code de sortie ≠ 0 si anomalie</a:t>
+            </a:r>
+          </a:p>
+          <a:p>
+            <a:pPr>
+              <a:spcAft>
+                <a:spcPts val="800"/>
+              </a:spcAft>
+              <a:buFont typeface="Arial"/>
+              <a:buChar char="▪"/>
+            </a:pPr>
+            <a:r>
+              <a:rPr sz="1600" b="1" i="0">
+                <a:solidFill>
+                  <a:srgbClr val="212B36"/>
+                </a:solidFill>
+                <a:latin typeface="Calibri"/>
+              </a:rPr>
+              <a:t>Journalisation triple</a:t>
+            </a:r>
+            <a:r>
+              <a:rPr sz="1600" b="0" i="0">
+                <a:solidFill>
+                  <a:srgbClr val="212B36"/>
+                </a:solidFill>
+                <a:latin typeface="Calibri"/>
+              </a:rPr>
+              <a:t> : console, _logs\ (orchestrateur + journal daté par squad), feuille Log du classeur (1 000 lignes glissantes)</a:t>
+            </a:r>
+          </a:p>
+          <a:p>
+            <a:pPr>
+              <a:spcAft>
+                <a:spcPts val="800"/>
+              </a:spcAft>
+              <a:buFont typeface="Arial"/>
+              <a:buChar char="▪"/>
+            </a:pPr>
+            <a:r>
+              <a:rPr sz="1600" b="1" i="0">
+                <a:solidFill>
+                  <a:srgbClr val="212B36"/>
+                </a:solidFill>
+                <a:latin typeface="Calibri"/>
+              </a:rPr>
+              <a:t>Rétention 28 jours</a:t>
+            </a:r>
+            <a:r>
+              <a:rPr sz="1600" b="0" i="0">
+                <a:solidFill>
+                  <a:srgbClr val="212B36"/>
+                </a:solidFill>
+                <a:latin typeface="Calibri"/>
+              </a:rPr>
+              <a:t> (constante unique) : copies datées, logs, journaux</a:t>
+            </a:r>
+          </a:p>
+          <a:p>
+            <a:pPr>
+              <a:spcAft>
+                <a:spcPts val="800"/>
+              </a:spcAft>
+              <a:buFont typeface="Arial"/>
+              <a:buChar char="▪"/>
+            </a:pPr>
+            <a:r>
+              <a:rPr sz="1600" b="1" i="0">
+                <a:solidFill>
+                  <a:srgbClr val="212B36"/>
+                </a:solidFill>
+                <a:latin typeface="Calibri"/>
+              </a:rPr>
+              <a:t>-Action Test</a:t>
+            </a:r>
+            <a:r>
+              <a:rPr sz="1600" b="0" i="0">
+                <a:solidFill>
+                  <a:srgbClr val="212B36"/>
+                </a:solidFill>
+                <a:latin typeface="Calibri"/>
+              </a:rPr>
+              <a:t> : validation complète par squad (config, clés, SMTP joignable, moteur, template, classeur, ≥ 1 actif par rôle)</a:t>
             </a:r>
           </a:p>
         </p:txBody>
@@ -3580,51 +3691,7 @@
         <p:spPr>
           <a:xfrm>
             <a:off x="0" y="0"/>
-            <a:ext cx="12191695" cy="6858000"/>
-          </a:xfrm>
-          <a:prstGeom prst="rect">
-            <a:avLst/>
-          </a:prstGeom>
-          <a:solidFill>
-            <a:srgbClr val="005BAA"/>
-          </a:solidFill>
-          <a:ln>
-            <a:noFill/>
-          </a:ln>
-          <a:effectLst/>
-        </p:spPr>
-        <p:style>
-          <a:lnRef idx="1">
-            <a:schemeClr val="accent1"/>
-          </a:lnRef>
-          <a:fillRef idx="3">
-            <a:schemeClr val="accent1"/>
-          </a:fillRef>
-          <a:effectRef idx="2">
-            <a:schemeClr val="accent1"/>
-          </a:effectRef>
-          <a:fontRef idx="minor">
-            <a:schemeClr val="lt1"/>
-          </a:fontRef>
-        </p:style>
-        <p:txBody>
-          <a:bodyPr rtlCol="0" anchor="ctr"/>
-          <a:lstStyle/>
-          <a:p>
-            <a:pPr algn="ctr"/>
-          </a:p>
-        </p:txBody>
-      </p:sp>
-      <p:sp>
-        <p:nvSpPr>
-          <p:cNvPr id="3" name="Rectangle 2"/>
-          <p:cNvSpPr/>
-          <p:nvPr/>
-        </p:nvSpPr>
-        <p:spPr>
-          <a:xfrm>
-            <a:off x="0" y="3383280"/>
-            <a:ext cx="12191695" cy="50800"/>
+            <a:ext cx="201168" cy="6858000"/>
           </a:xfrm>
           <a:prstGeom prst="rect">
             <a:avLst/>
@@ -3661,14 +3728,14 @@
       </p:sp>
       <p:sp>
         <p:nvSpPr>
-          <p:cNvPr id="4" name="TextBox 3"/>
+          <p:cNvPr id="3" name="TextBox 2"/>
           <p:cNvSpPr txBox="1"/>
           <p:nvPr/>
         </p:nvSpPr>
         <p:spPr>
           <a:xfrm>
-            <a:off x="822960" y="2286000"/>
-            <a:ext cx="10515600" cy="1463040"/>
+            <a:off x="502920" y="256032"/>
+            <a:ext cx="11247120" cy="822960"/>
           </a:xfrm>
           <a:prstGeom prst="rect">
             <a:avLst/>
@@ -3676,30 +3743,1443 @@
           <a:noFill/>
         </p:spPr>
         <p:txBody>
-          <a:bodyPr wrap="square" anchor="t">
+          <a:bodyPr wrap="square">
             <a:spAutoFit/>
           </a:bodyPr>
           <a:lstStyle/>
           <a:p>
             <a:r>
-              <a:rPr sz="4000" b="1" i="0">
-                <a:solidFill>
-                  <a:srgbClr val="FFFFFF"/>
-                </a:solidFill>
-                <a:latin typeface="Calibri"/>
-              </a:rPr>
-              <a:t>Merci</a:t>
-            </a:r>
-          </a:p>
-          <a:p>
+              <a:rPr sz="3000" b="1" i="0">
+                <a:solidFill>
+                  <a:srgbClr val="212B36"/>
+                </a:solidFill>
+                <a:latin typeface="Calibri"/>
+              </a:rPr>
+              <a:t>Installation &amp; onboarding d'une squad</a:t>
+            </a:r>
+          </a:p>
+        </p:txBody>
+      </p:sp>
+      <p:sp>
+        <p:nvSpPr>
+          <p:cNvPr id="4" name="TextBox 3"/>
+          <p:cNvSpPr txBox="1"/>
+          <p:nvPr/>
+        </p:nvSpPr>
+        <p:spPr>
+          <a:xfrm>
+            <a:off x="502920" y="868680"/>
+            <a:ext cx="11247120" cy="457200"/>
+          </a:xfrm>
+          <a:prstGeom prst="rect">
+            <a:avLst/>
+          </a:prstGeom>
+          <a:noFill/>
+        </p:spPr>
+        <p:txBody>
+          <a:bodyPr wrap="square">
+            <a:spAutoFit/>
+          </a:bodyPr>
+          <a:lstStyle/>
+          <a:p>
+            <a:r>
+              <a:rPr sz="1500" b="0" i="1">
+                <a:solidFill>
+                  <a:srgbClr val="5A6672"/>
+                </a:solidFill>
+                <a:latin typeface="Calibri"/>
+              </a:rPr>
+              <a:t>De zéro à la première annonce</a:t>
+            </a:r>
+          </a:p>
+        </p:txBody>
+      </p:sp>
+      <p:sp>
+        <p:nvSpPr>
+          <p:cNvPr id="5" name="Rectangle 4"/>
+          <p:cNvSpPr/>
+          <p:nvPr/>
+        </p:nvSpPr>
+        <p:spPr>
+          <a:xfrm>
+            <a:off x="502920" y="1234440"/>
+            <a:ext cx="11155680" cy="27940"/>
+          </a:xfrm>
+          <a:prstGeom prst="rect">
+            <a:avLst/>
+          </a:prstGeom>
+          <a:solidFill>
+            <a:srgbClr val="00A8A8"/>
+          </a:solidFill>
+          <a:ln>
+            <a:noFill/>
+          </a:ln>
+          <a:effectLst/>
+        </p:spPr>
+        <p:style>
+          <a:lnRef idx="1">
+            <a:schemeClr val="accent1"/>
+          </a:lnRef>
+          <a:fillRef idx="3">
+            <a:schemeClr val="accent1"/>
+          </a:fillRef>
+          <a:effectRef idx="2">
+            <a:schemeClr val="accent1"/>
+          </a:effectRef>
+          <a:fontRef idx="minor">
+            <a:schemeClr val="lt1"/>
+          </a:fontRef>
+        </p:style>
+        <p:txBody>
+          <a:bodyPr rtlCol="0" anchor="ctr"/>
+          <a:lstStyle/>
+          <a:p>
+            <a:pPr algn="ctr"/>
+          </a:p>
+        </p:txBody>
+      </p:sp>
+      <p:sp>
+        <p:nvSpPr>
+          <p:cNvPr id="6" name="TextBox 5"/>
+          <p:cNvSpPr txBox="1"/>
+          <p:nvPr/>
+        </p:nvSpPr>
+        <p:spPr>
+          <a:xfrm>
+            <a:off x="502920" y="1554480"/>
+            <a:ext cx="11155680" cy="4937760"/>
+          </a:xfrm>
+          <a:prstGeom prst="rect">
+            <a:avLst/>
+          </a:prstGeom>
+          <a:noFill/>
+        </p:spPr>
+        <p:txBody>
+          <a:bodyPr wrap="square">
+            <a:spAutoFit/>
+          </a:bodyPr>
+          <a:lstStyle/>
+          <a:p>
+            <a:pPr>
+              <a:spcAft>
+                <a:spcPts val="800"/>
+              </a:spcAft>
+              <a:buFont typeface="Arial"/>
+              <a:buChar char="▪"/>
+            </a:pPr>
+            <a:r>
+              <a:rPr sz="1600" b="1" i="0">
+                <a:solidFill>
+                  <a:srgbClr val="212B36"/>
+                </a:solidFill>
+                <a:latin typeface="Calibri"/>
+              </a:rPr>
+              <a:t>1 · Déployer</a:t>
+            </a:r>
             <a:r>
               <a:rPr sz="1600" b="0" i="0">
                 <a:solidFill>
-                  <a:srgbClr val="CFE2F3"/>
-                </a:solidFill>
-                <a:latin typeface="Calibri"/>
-              </a:rPr>
-              <a:t>Détails techniques : suiviexploit/README.md  ·  docs/Confluence-Suivi-Exploitation.md</a:t>
+                  <a:srgbClr val="212B36"/>
+                </a:solidFill>
+                <a:latin typeface="Calibri"/>
+              </a:rPr>
+              <a:t> à la racine du partage : script, moteur, template HTML, gabarit de classeur</a:t>
+            </a:r>
+          </a:p>
+          <a:p>
+            <a:pPr>
+              <a:spcAft>
+                <a:spcPts val="800"/>
+              </a:spcAft>
+              <a:buFont typeface="Arial"/>
+              <a:buChar char="▪"/>
+            </a:pPr>
+            <a:r>
+              <a:rPr sz="1600" b="1" i="0">
+                <a:solidFill>
+                  <a:srgbClr val="212B36"/>
+                </a:solidFill>
+                <a:latin typeface="Calibri"/>
+              </a:rPr>
+              <a:t>2 · Créer la squad</a:t>
+            </a:r>
+            <a:r>
+              <a:rPr sz="1600" b="0" i="0">
+                <a:solidFill>
+                  <a:srgbClr val="212B36"/>
+                </a:solidFill>
+                <a:latin typeface="Calibri"/>
+              </a:rPr>
+              <a:t> : .\SuiviExploitation.ps1 </a:t>
+            </a:r>
+            <a:r>
+              <a:rPr sz="1600" b="1" i="0">
+                <a:solidFill>
+                  <a:srgbClr val="212B36"/>
+                </a:solidFill>
+                <a:latin typeface="Calibri"/>
+              </a:rPr>
+              <a:t>-Action NouvelleSquad</a:t>
+            </a:r>
+            <a:r>
+              <a:rPr sz="1600" b="0" i="0">
+                <a:solidFill>
+                  <a:srgbClr val="212B36"/>
+                </a:solidFill>
+                <a:latin typeface="Calibri"/>
+              </a:rPr>
+              <a:t> — demande nom, rôles, SMTP, From, To, Cc, admins ; crée le dossier, copie le classeur (rôles pré-remplis) et écrit un conf-suivi-squad.json complet</a:t>
+            </a:r>
+          </a:p>
+          <a:p>
+            <a:pPr>
+              <a:spcAft>
+                <a:spcPts val="800"/>
+              </a:spcAft>
+              <a:buFont typeface="Arial"/>
+              <a:buChar char="▪"/>
+            </a:pPr>
+            <a:r>
+              <a:rPr sz="1600" b="1" i="0">
+                <a:solidFill>
+                  <a:srgbClr val="212B36"/>
+                </a:solidFill>
+                <a:latin typeface="Calibri"/>
+              </a:rPr>
+              <a:t>3 · Compléter la feuille Membres</a:t>
+            </a:r>
+            <a:r>
+              <a:rPr sz="1600" b="0" i="0">
+                <a:solidFill>
+                  <a:srgbClr val="212B36"/>
+                </a:solidFill>
+                <a:latin typeface="Calibri"/>
+              </a:rPr>
+              <a:t> (Nom, Email, Rôle, Actif = Oui)</a:t>
+            </a:r>
+          </a:p>
+          <a:p>
+            <a:pPr>
+              <a:spcAft>
+                <a:spcPts val="800"/>
+              </a:spcAft>
+              <a:buFont typeface="Arial"/>
+              <a:buChar char="▪"/>
+            </a:pPr>
+            <a:r>
+              <a:rPr sz="1600" b="1" i="0">
+                <a:solidFill>
+                  <a:srgbClr val="212B36"/>
+                </a:solidFill>
+                <a:latin typeface="Calibri"/>
+              </a:rPr>
+              <a:t>4 · Valider</a:t>
+            </a:r>
+            <a:r>
+              <a:rPr sz="1600" b="0" i="0">
+                <a:solidFill>
+                  <a:srgbClr val="212B36"/>
+                </a:solidFill>
+                <a:latin typeface="Calibri"/>
+              </a:rPr>
+              <a:t> : .\SuiviExploitation.ps1 </a:t>
+            </a:r>
+            <a:r>
+              <a:rPr sz="1600" b="1" i="0">
+                <a:solidFill>
+                  <a:srgbClr val="212B36"/>
+                </a:solidFill>
+                <a:latin typeface="Calibri"/>
+              </a:rPr>
+              <a:t>-Action Test</a:t>
+            </a:r>
+            <a:r>
+              <a:rPr sz="1600" b="0" i="0">
+                <a:solidFill>
+                  <a:srgbClr val="212B36"/>
+                </a:solidFill>
+                <a:latin typeface="Calibri"/>
+              </a:rPr>
+              <a:t> → sortie verte, code 0</a:t>
+            </a:r>
+          </a:p>
+          <a:p>
+            <a:pPr>
+              <a:spcAft>
+                <a:spcPts val="800"/>
+              </a:spcAft>
+              <a:buFont typeface="Arial"/>
+              <a:buChar char="▪"/>
+            </a:pPr>
+            <a:r>
+              <a:rPr sz="1600" b="1" i="0">
+                <a:solidFill>
+                  <a:srgbClr val="212B36"/>
+                </a:solidFill>
+                <a:latin typeface="Calibri"/>
+              </a:rPr>
+              <a:t>5 · Planifier</a:t>
+            </a:r>
+            <a:r>
+              <a:rPr sz="1600" b="0" i="0">
+                <a:solidFill>
+                  <a:srgbClr val="212B36"/>
+                </a:solidFill>
+                <a:latin typeface="Calibri"/>
+              </a:rPr>
+              <a:t> les 2 tâches (compte de service) : </a:t>
+            </a:r>
+            <a:r>
+              <a:rPr sz="1600" b="1" i="0">
+                <a:solidFill>
+                  <a:srgbClr val="212B36"/>
+                </a:solidFill>
+                <a:latin typeface="Calibri"/>
+              </a:rPr>
+              <a:t>Annonce vendredi 06:00</a:t>
+            </a:r>
+            <a:r>
+              <a:rPr sz="1600" b="0" i="0">
+                <a:solidFill>
+                  <a:srgbClr val="212B36"/>
+                </a:solidFill>
+                <a:latin typeface="Calibri"/>
+              </a:rPr>
+              <a:t>, </a:t>
+            </a:r>
+            <a:r>
+              <a:rPr sz="1600" b="1" i="0">
+                <a:solidFill>
+                  <a:srgbClr val="212B36"/>
+                </a:solidFill>
+                <a:latin typeface="Calibri"/>
+              </a:rPr>
+              <a:t>Rappel lundi 06:00</a:t>
+            </a:r>
+            <a:r>
+              <a:rPr sz="1600" b="0" i="0">
+                <a:solidFill>
+                  <a:srgbClr val="212B36"/>
+                </a:solidFill>
+                <a:latin typeface="Calibri"/>
+              </a:rPr>
+              <a:t> (-ExecutionPolicy Bypass, script non signé sur partage)</a:t>
+            </a:r>
+          </a:p>
+          <a:p>
+            <a:pPr>
+              <a:spcAft>
+                <a:spcPts val="800"/>
+              </a:spcAft>
+              <a:buFont typeface="Arial"/>
+              <a:buChar char="▪"/>
+            </a:pPr>
+            <a:r>
+              <a:rPr sz="1600" b="1" i="0">
+                <a:solidFill>
+                  <a:srgbClr val="212B36"/>
+                </a:solidFill>
+                <a:latin typeface="Calibri"/>
+              </a:rPr>
+              <a:t>6 · Recette</a:t>
+            </a:r>
+            <a:r>
+              <a:rPr sz="1600" b="0" i="0">
+                <a:solidFill>
+                  <a:srgbClr val="212B36"/>
+                </a:solidFill>
+                <a:latin typeface="Calibri"/>
+              </a:rPr>
+              <a:t> : annonce manuelle sur une squad pilote → vérifier mail, Historique, copie datée, journaux</a:t>
+            </a:r>
+          </a:p>
+          <a:p>
+            <a:pPr>
+              <a:spcAft>
+                <a:spcPts val="800"/>
+              </a:spcAft>
+              <a:buFont typeface="Arial"/>
+              <a:buChar char="▪"/>
+            </a:pPr>
+          </a:p>
+          <a:p>
+            <a:pPr>
+              <a:spcAft>
+                <a:spcPts val="800"/>
+              </a:spcAft>
+              <a:buFont typeface="Arial"/>
+              <a:buChar char="▪"/>
+            </a:pPr>
+            <a:r>
+              <a:rPr sz="1600" b="0" i="0">
+                <a:solidFill>
+                  <a:srgbClr val="212B36"/>
+                </a:solidFill>
+                <a:latin typeface="Calibri"/>
+              </a:rPr>
+              <a:t>Au quotidien (self-service squad) : congés et membres dans le classeur, tolérance congés en zone C/D, config mail dans le JSON</a:t>
+            </a:r>
+          </a:p>
+        </p:txBody>
+      </p:sp>
+    </p:spTree>
+  </p:cSld>
+  <p:clrMapOvr>
+    <a:masterClrMapping/>
+  </p:clrMapOvr>
+</p:sld>
+</file>
+
+<file path=ppt/slides/slide12.xml><?xml version="1.0" encoding="utf-8"?>
+<p:sld xmlns:a="http://schemas.openxmlformats.org/drawingml/2006/main" xmlns:p="http://schemas.openxmlformats.org/presentationml/2006/main" xmlns:r="http://schemas.openxmlformats.org/officeDocument/2006/relationships">
+  <p:cSld>
+    <p:spTree>
+      <p:nvGrpSpPr>
+        <p:cNvPr id="1" name=""/>
+        <p:cNvGrpSpPr/>
+        <p:nvPr/>
+      </p:nvGrpSpPr>
+      <p:grpSpPr/>
+      <p:sp>
+        <p:nvSpPr>
+          <p:cNvPr id="2" name="Rectangle 1"/>
+          <p:cNvSpPr/>
+          <p:nvPr/>
+        </p:nvSpPr>
+        <p:spPr>
+          <a:xfrm>
+            <a:off x="0" y="0"/>
+            <a:ext cx="201168" cy="6858000"/>
+          </a:xfrm>
+          <a:prstGeom prst="rect">
+            <a:avLst/>
+          </a:prstGeom>
+          <a:solidFill>
+            <a:srgbClr val="00A8A8"/>
+          </a:solidFill>
+          <a:ln>
+            <a:noFill/>
+          </a:ln>
+          <a:effectLst/>
+        </p:spPr>
+        <p:style>
+          <a:lnRef idx="1">
+            <a:schemeClr val="accent1"/>
+          </a:lnRef>
+          <a:fillRef idx="3">
+            <a:schemeClr val="accent1"/>
+          </a:fillRef>
+          <a:effectRef idx="2">
+            <a:schemeClr val="accent1"/>
+          </a:effectRef>
+          <a:fontRef idx="minor">
+            <a:schemeClr val="lt1"/>
+          </a:fontRef>
+        </p:style>
+        <p:txBody>
+          <a:bodyPr rtlCol="0" anchor="ctr"/>
+          <a:lstStyle/>
+          <a:p>
+            <a:pPr algn="ctr"/>
+          </a:p>
+        </p:txBody>
+      </p:sp>
+      <p:sp>
+        <p:nvSpPr>
+          <p:cNvPr id="3" name="TextBox 2"/>
+          <p:cNvSpPr txBox="1"/>
+          <p:nvPr/>
+        </p:nvSpPr>
+        <p:spPr>
+          <a:xfrm>
+            <a:off x="502920" y="256032"/>
+            <a:ext cx="11247120" cy="822960"/>
+          </a:xfrm>
+          <a:prstGeom prst="rect">
+            <a:avLst/>
+          </a:prstGeom>
+          <a:noFill/>
+        </p:spPr>
+        <p:txBody>
+          <a:bodyPr wrap="square">
+            <a:spAutoFit/>
+          </a:bodyPr>
+          <a:lstStyle/>
+          <a:p>
+            <a:r>
+              <a:rPr sz="3000" b="1" i="0">
+                <a:solidFill>
+                  <a:srgbClr val="212B36"/>
+                </a:solidFill>
+                <a:latin typeface="Calibri"/>
+              </a:rPr>
+              <a:t>Revue de code — synthèse</a:t>
+            </a:r>
+          </a:p>
+        </p:txBody>
+      </p:sp>
+      <p:sp>
+        <p:nvSpPr>
+          <p:cNvPr id="4" name="TextBox 3"/>
+          <p:cNvSpPr txBox="1"/>
+          <p:nvPr/>
+        </p:nvSpPr>
+        <p:spPr>
+          <a:xfrm>
+            <a:off x="502920" y="868680"/>
+            <a:ext cx="11247120" cy="457200"/>
+          </a:xfrm>
+          <a:prstGeom prst="rect">
+            <a:avLst/>
+          </a:prstGeom>
+          <a:noFill/>
+        </p:spPr>
+        <p:txBody>
+          <a:bodyPr wrap="square">
+            <a:spAutoFit/>
+          </a:bodyPr>
+          <a:lstStyle/>
+          <a:p>
+            <a:r>
+              <a:rPr sz="1500" b="0" i="1">
+                <a:solidFill>
+                  <a:srgbClr val="5A6672"/>
+                </a:solidFill>
+                <a:latin typeface="Calibri"/>
+              </a:rPr>
+              <a:t>Lecture complète du script (1 113 lignes) + vérification code ↔ documentation</a:t>
+            </a:r>
+          </a:p>
+        </p:txBody>
+      </p:sp>
+      <p:sp>
+        <p:nvSpPr>
+          <p:cNvPr id="5" name="Rectangle 4"/>
+          <p:cNvSpPr/>
+          <p:nvPr/>
+        </p:nvSpPr>
+        <p:spPr>
+          <a:xfrm>
+            <a:off x="502920" y="1234440"/>
+            <a:ext cx="11155680" cy="27940"/>
+          </a:xfrm>
+          <a:prstGeom prst="rect">
+            <a:avLst/>
+          </a:prstGeom>
+          <a:solidFill>
+            <a:srgbClr val="00A8A8"/>
+          </a:solidFill>
+          <a:ln>
+            <a:noFill/>
+          </a:ln>
+          <a:effectLst/>
+        </p:spPr>
+        <p:style>
+          <a:lnRef idx="1">
+            <a:schemeClr val="accent1"/>
+          </a:lnRef>
+          <a:fillRef idx="3">
+            <a:schemeClr val="accent1"/>
+          </a:fillRef>
+          <a:effectRef idx="2">
+            <a:schemeClr val="accent1"/>
+          </a:effectRef>
+          <a:fontRef idx="minor">
+            <a:schemeClr val="lt1"/>
+          </a:fontRef>
+        </p:style>
+        <p:txBody>
+          <a:bodyPr rtlCol="0" anchor="ctr"/>
+          <a:lstStyle/>
+          <a:p>
+            <a:pPr algn="ctr"/>
+          </a:p>
+        </p:txBody>
+      </p:sp>
+      <p:sp>
+        <p:nvSpPr>
+          <p:cNvPr id="6" name="Rectangle 5"/>
+          <p:cNvSpPr/>
+          <p:nvPr/>
+        </p:nvSpPr>
+        <p:spPr>
+          <a:xfrm>
+            <a:off x="502920" y="1554480"/>
+            <a:ext cx="5394960" cy="4480560"/>
+          </a:xfrm>
+          <a:prstGeom prst="rect">
+            <a:avLst/>
+          </a:prstGeom>
+          <a:solidFill>
+            <a:srgbClr val="F2F6F8"/>
+          </a:solidFill>
+          <a:ln>
+            <a:noFill/>
+          </a:ln>
+          <a:effectLst/>
+        </p:spPr>
+        <p:style>
+          <a:lnRef idx="1">
+            <a:schemeClr val="accent1"/>
+          </a:lnRef>
+          <a:fillRef idx="3">
+            <a:schemeClr val="accent1"/>
+          </a:fillRef>
+          <a:effectRef idx="2">
+            <a:schemeClr val="accent1"/>
+          </a:effectRef>
+          <a:fontRef idx="minor">
+            <a:schemeClr val="lt1"/>
+          </a:fontRef>
+        </p:style>
+        <p:txBody>
+          <a:bodyPr rtlCol="0" anchor="ctr"/>
+          <a:lstStyle/>
+          <a:p>
+            <a:pPr algn="ctr"/>
+          </a:p>
+        </p:txBody>
+      </p:sp>
+      <p:sp>
+        <p:nvSpPr>
+          <p:cNvPr id="7" name="Rectangle 6"/>
+          <p:cNvSpPr/>
+          <p:nvPr/>
+        </p:nvSpPr>
+        <p:spPr>
+          <a:xfrm>
+            <a:off x="502920" y="1554480"/>
+            <a:ext cx="5394960" cy="38100"/>
+          </a:xfrm>
+          <a:prstGeom prst="rect">
+            <a:avLst/>
+          </a:prstGeom>
+          <a:solidFill>
+            <a:srgbClr val="00A8A8"/>
+          </a:solidFill>
+          <a:ln>
+            <a:noFill/>
+          </a:ln>
+          <a:effectLst/>
+        </p:spPr>
+        <p:style>
+          <a:lnRef idx="1">
+            <a:schemeClr val="accent1"/>
+          </a:lnRef>
+          <a:fillRef idx="3">
+            <a:schemeClr val="accent1"/>
+          </a:fillRef>
+          <a:effectRef idx="2">
+            <a:schemeClr val="accent1"/>
+          </a:effectRef>
+          <a:fontRef idx="minor">
+            <a:schemeClr val="lt1"/>
+          </a:fontRef>
+        </p:style>
+        <p:txBody>
+          <a:bodyPr rtlCol="0" anchor="ctr"/>
+          <a:lstStyle/>
+          <a:p>
+            <a:pPr algn="ctr"/>
+          </a:p>
+        </p:txBody>
+      </p:sp>
+      <p:sp>
+        <p:nvSpPr>
+          <p:cNvPr id="8" name="TextBox 7"/>
+          <p:cNvSpPr txBox="1"/>
+          <p:nvPr/>
+        </p:nvSpPr>
+        <p:spPr>
+          <a:xfrm>
+            <a:off x="640080" y="1645920"/>
+            <a:ext cx="5120640" cy="4297680"/>
+          </a:xfrm>
+          <a:prstGeom prst="rect">
+            <a:avLst/>
+          </a:prstGeom>
+          <a:noFill/>
+        </p:spPr>
+        <p:txBody>
+          <a:bodyPr wrap="square">
+            <a:spAutoFit/>
+          </a:bodyPr>
+          <a:lstStyle/>
+          <a:p>
+            <a:pPr>
+              <a:spcAft>
+                <a:spcPts val="400"/>
+              </a:spcAft>
+            </a:pPr>
+            <a:r>
+              <a:rPr sz="1500" b="1" i="0">
+                <a:solidFill>
+                  <a:srgbClr val="00A8A8"/>
+                </a:solidFill>
+                <a:latin typeface="Calibri"/>
+              </a:rPr>
+              <a:t>Points forts</a:t>
+            </a:r>
+          </a:p>
+          <a:p>
+            <a:pPr>
+              <a:spcAft>
+                <a:spcPts val="300"/>
+              </a:spcAft>
+            </a:pPr>
+            <a:r>
+              <a:rPr sz="1350" b="1" i="0">
+                <a:solidFill>
+                  <a:srgbClr val="212B36"/>
+                </a:solidFill>
+                <a:latin typeface="Calibri"/>
+              </a:rPr>
+              <a:t>0 anomalie critique ou majeure</a:t>
+            </a:r>
+          </a:p>
+          <a:p>
+            <a:pPr>
+              <a:spcAft>
+                <a:spcPts val="300"/>
+              </a:spcAft>
+            </a:pPr>
+            <a:r>
+              <a:rPr sz="1350" b="0" i="0">
+                <a:solidFill>
+                  <a:srgbClr val="212B36"/>
+                </a:solidFill>
+                <a:latin typeface="Calibri"/>
+              </a:rPr>
+              <a:t>Écriture transactionnelle correcte : mail échoué ⇒ rien n'est persisté</a:t>
+            </a:r>
+          </a:p>
+          <a:p>
+            <a:pPr>
+              <a:spcAft>
+                <a:spcPts val="300"/>
+              </a:spcAft>
+            </a:pPr>
+            <a:r>
+              <a:rPr sz="1350" b="0" i="0">
+                <a:solidFill>
+                  <a:srgbClr val="212B36"/>
+                </a:solidFill>
+                <a:latin typeface="Calibri"/>
+              </a:rPr>
+              <a:t>Idempotence désignation + compteur vérifiée sur les cas limites (relances, changement de désigné)</a:t>
+            </a:r>
+          </a:p>
+          <a:p>
+            <a:pPr>
+              <a:spcAft>
+                <a:spcPts val="300"/>
+              </a:spcAft>
+            </a:pPr>
+            <a:r>
+              <a:rPr sz="1350" b="0" i="0">
+                <a:solidFill>
+                  <a:srgbClr val="212B36"/>
+                </a:solidFill>
+                <a:latin typeface="Calibri"/>
+              </a:rPr>
+              <a:t>Verrou avec notion de propriété (pas de vol de verrou)</a:t>
+            </a:r>
+          </a:p>
+          <a:p>
+            <a:pPr>
+              <a:spcAft>
+                <a:spcPts val="300"/>
+              </a:spcAft>
+            </a:pPr>
+            <a:r>
+              <a:rPr sz="1350" b="0" i="0">
+                <a:solidFill>
+                  <a:srgbClr val="212B36"/>
+                </a:solidFill>
+                <a:latin typeface="Calibri"/>
+              </a:rPr>
+              <a:t>Sérialisation JSON maison justifiée (pièges PS 5.1)</a:t>
+            </a:r>
+          </a:p>
+          <a:p>
+            <a:pPr>
+              <a:spcAft>
+                <a:spcPts val="300"/>
+              </a:spcAft>
+            </a:pPr>
+            <a:r>
+              <a:rPr sz="1350" b="0" i="0">
+                <a:solidFill>
+                  <a:srgbClr val="212B36"/>
+                </a:solidFill>
+                <a:latin typeface="Calibri"/>
+              </a:rPr>
+              <a:t>Commentaires ciblés sur les invariants, README exhaustif et à jour</a:t>
+            </a:r>
+          </a:p>
+        </p:txBody>
+      </p:sp>
+      <p:sp>
+        <p:nvSpPr>
+          <p:cNvPr id="9" name="Rectangle 8"/>
+          <p:cNvSpPr/>
+          <p:nvPr/>
+        </p:nvSpPr>
+        <p:spPr>
+          <a:xfrm>
+            <a:off x="6263640" y="1554480"/>
+            <a:ext cx="5394960" cy="4480560"/>
+          </a:xfrm>
+          <a:prstGeom prst="rect">
+            <a:avLst/>
+          </a:prstGeom>
+          <a:solidFill>
+            <a:srgbClr val="F2F6F8"/>
+          </a:solidFill>
+          <a:ln>
+            <a:noFill/>
+          </a:ln>
+          <a:effectLst/>
+        </p:spPr>
+        <p:style>
+          <a:lnRef idx="1">
+            <a:schemeClr val="accent1"/>
+          </a:lnRef>
+          <a:fillRef idx="3">
+            <a:schemeClr val="accent1"/>
+          </a:fillRef>
+          <a:effectRef idx="2">
+            <a:schemeClr val="accent1"/>
+          </a:effectRef>
+          <a:fontRef idx="minor">
+            <a:schemeClr val="lt1"/>
+          </a:fontRef>
+        </p:style>
+        <p:txBody>
+          <a:bodyPr rtlCol="0" anchor="ctr"/>
+          <a:lstStyle/>
+          <a:p>
+            <a:pPr algn="ctr"/>
+          </a:p>
+        </p:txBody>
+      </p:sp>
+      <p:sp>
+        <p:nvSpPr>
+          <p:cNvPr id="10" name="Rectangle 9"/>
+          <p:cNvSpPr/>
+          <p:nvPr/>
+        </p:nvSpPr>
+        <p:spPr>
+          <a:xfrm>
+            <a:off x="6263640" y="1554480"/>
+            <a:ext cx="5394960" cy="38100"/>
+          </a:xfrm>
+          <a:prstGeom prst="rect">
+            <a:avLst/>
+          </a:prstGeom>
+          <a:solidFill>
+            <a:srgbClr val="2E75B6"/>
+          </a:solidFill>
+          <a:ln>
+            <a:noFill/>
+          </a:ln>
+          <a:effectLst/>
+        </p:spPr>
+        <p:style>
+          <a:lnRef idx="1">
+            <a:schemeClr val="accent1"/>
+          </a:lnRef>
+          <a:fillRef idx="3">
+            <a:schemeClr val="accent1"/>
+          </a:fillRef>
+          <a:effectRef idx="2">
+            <a:schemeClr val="accent1"/>
+          </a:effectRef>
+          <a:fontRef idx="minor">
+            <a:schemeClr val="lt1"/>
+          </a:fontRef>
+        </p:style>
+        <p:txBody>
+          <a:bodyPr rtlCol="0" anchor="ctr"/>
+          <a:lstStyle/>
+          <a:p>
+            <a:pPr algn="ctr"/>
+          </a:p>
+        </p:txBody>
+      </p:sp>
+      <p:sp>
+        <p:nvSpPr>
+          <p:cNvPr id="11" name="TextBox 10"/>
+          <p:cNvSpPr txBox="1"/>
+          <p:nvPr/>
+        </p:nvSpPr>
+        <p:spPr>
+          <a:xfrm>
+            <a:off x="6400800" y="1645920"/>
+            <a:ext cx="5120640" cy="4297680"/>
+          </a:xfrm>
+          <a:prstGeom prst="rect">
+            <a:avLst/>
+          </a:prstGeom>
+          <a:noFill/>
+        </p:spPr>
+        <p:txBody>
+          <a:bodyPr wrap="square">
+            <a:spAutoFit/>
+          </a:bodyPr>
+          <a:lstStyle/>
+          <a:p>
+            <a:pPr>
+              <a:spcAft>
+                <a:spcPts val="400"/>
+              </a:spcAft>
+            </a:pPr>
+            <a:r>
+              <a:rPr sz="1500" b="1" i="0">
+                <a:solidFill>
+                  <a:srgbClr val="2E75B6"/>
+                </a:solidFill>
+                <a:latin typeface="Calibri"/>
+              </a:rPr>
+              <a:t>Constats (3 moyens · 4 faibles · 6 infos)</a:t>
+            </a:r>
+          </a:p>
+          <a:p>
+            <a:pPr>
+              <a:spcAft>
+                <a:spcPts val="300"/>
+              </a:spcAft>
+            </a:pPr>
+            <a:r>
+              <a:rPr sz="1350" b="1" i="0">
+                <a:solidFill>
+                  <a:srgbClr val="212B36"/>
+                </a:solidFill>
+                <a:latin typeface="Calibri"/>
+              </a:rPr>
+              <a:t>M1</a:t>
+            </a:r>
+            <a:r>
+              <a:rPr sz="1350" b="0" i="0">
+                <a:solidFill>
+                  <a:srgbClr val="212B36"/>
+                </a:solidFill>
+                <a:latin typeface="Calibri"/>
+              </a:rPr>
+              <a:t> Le filtre -Squad ne matche pas le « Nom » de la config (écart doc/code) et accepte les sous-chaînes</a:t>
+            </a:r>
+          </a:p>
+          <a:p>
+            <a:pPr>
+              <a:spcAft>
+                <a:spcPts val="300"/>
+              </a:spcAft>
+            </a:pPr>
+            <a:r>
+              <a:rPr sz="1350" b="1" i="0">
+                <a:solidFill>
+                  <a:srgbClr val="212B36"/>
+                </a:solidFill>
+                <a:latin typeface="Calibri"/>
+              </a:rPr>
+              <a:t>M2</a:t>
+            </a:r>
+            <a:r>
+              <a:rPr sz="1350" b="0" i="0">
+                <a:solidFill>
+                  <a:srgbClr val="212B36"/>
+                </a:solidFill>
+                <a:latin typeface="Calibri"/>
+              </a:rPr>
+              <a:t> -Action Test ne détecte pas un classeur sans les 5 feuilles (échec différé en prod)</a:t>
+            </a:r>
+          </a:p>
+          <a:p>
+            <a:pPr>
+              <a:spcAft>
+                <a:spcPts val="300"/>
+              </a:spcAft>
+            </a:pPr>
+            <a:r>
+              <a:rPr sz="1350" b="1" i="0">
+                <a:solidFill>
+                  <a:srgbClr val="212B36"/>
+                </a:solidFill>
+                <a:latin typeface="Calibri"/>
+              </a:rPr>
+              <a:t>M3</a:t>
+            </a:r>
+            <a:r>
+              <a:rPr sz="1350" b="0" i="0">
+                <a:solidFill>
+                  <a:srgbClr val="212B36"/>
+                </a:solidFill>
+                <a:latin typeface="Calibri"/>
+              </a:rPr>
+              <a:t> Config validée en présence mais pas en contenu : EmailsAdmin vide ⇒ alerte perdue en silence</a:t>
+            </a:r>
+          </a:p>
+          <a:p>
+            <a:pPr>
+              <a:spcAft>
+                <a:spcPts val="300"/>
+              </a:spcAft>
+            </a:pPr>
+            <a:r>
+              <a:rPr sz="1350" b="1" i="0">
+                <a:solidFill>
+                  <a:srgbClr val="212B36"/>
+                </a:solidFill>
+                <a:latin typeface="Calibri"/>
+              </a:rPr>
+              <a:t>Faibles</a:t>
+            </a:r>
+            <a:r>
+              <a:rPr sz="1350" b="0" i="0">
+                <a:solidFill>
+                  <a:srgbClr val="212B36"/>
+                </a:solidFill>
+                <a:latin typeface="Calibri"/>
+              </a:rPr>
+              <a:t> : pose de verrou non atomique, ligne vide qui masque la suite d'une feuille, membres identifiés par nom…</a:t>
+            </a:r>
+          </a:p>
+          <a:p>
+            <a:pPr>
+              <a:spcAft>
+                <a:spcPts val="300"/>
+              </a:spcAft>
+            </a:pPr>
+            <a:r>
+              <a:rPr sz="1350" b="0" i="0">
+                <a:solidFill>
+                  <a:srgbClr val="212B36"/>
+                </a:solidFill>
+                <a:latin typeface="Calibri"/>
+              </a:rPr>
+              <a:t>Tous corrigeables à faible coût — détail : docs/Revue-de-code-Suivi-Exploitation.md</a:t>
+            </a:r>
+          </a:p>
+        </p:txBody>
+      </p:sp>
+    </p:spTree>
+  </p:cSld>
+  <p:clrMapOvr>
+    <a:masterClrMapping/>
+  </p:clrMapOvr>
+</p:sld>
+</file>
+
+<file path=ppt/slides/slide13.xml><?xml version="1.0" encoding="utf-8"?>
+<p:sld xmlns:a="http://schemas.openxmlformats.org/drawingml/2006/main" xmlns:p="http://schemas.openxmlformats.org/presentationml/2006/main" xmlns:r="http://schemas.openxmlformats.org/officeDocument/2006/relationships">
+  <p:cSld>
+    <p:spTree>
+      <p:nvGrpSpPr>
+        <p:cNvPr id="1" name=""/>
+        <p:cNvGrpSpPr/>
+        <p:nvPr/>
+      </p:nvGrpSpPr>
+      <p:grpSpPr/>
+      <p:sp>
+        <p:nvSpPr>
+          <p:cNvPr id="2" name="Rectangle 1"/>
+          <p:cNvSpPr/>
+          <p:nvPr/>
+        </p:nvSpPr>
+        <p:spPr>
+          <a:xfrm>
+            <a:off x="0" y="0"/>
+            <a:ext cx="201168" cy="6858000"/>
+          </a:xfrm>
+          <a:prstGeom prst="rect">
+            <a:avLst/>
+          </a:prstGeom>
+          <a:solidFill>
+            <a:srgbClr val="00A8A8"/>
+          </a:solidFill>
+          <a:ln>
+            <a:noFill/>
+          </a:ln>
+          <a:effectLst/>
+        </p:spPr>
+        <p:style>
+          <a:lnRef idx="1">
+            <a:schemeClr val="accent1"/>
+          </a:lnRef>
+          <a:fillRef idx="3">
+            <a:schemeClr val="accent1"/>
+          </a:fillRef>
+          <a:effectRef idx="2">
+            <a:schemeClr val="accent1"/>
+          </a:effectRef>
+          <a:fontRef idx="minor">
+            <a:schemeClr val="lt1"/>
+          </a:fontRef>
+        </p:style>
+        <p:txBody>
+          <a:bodyPr rtlCol="0" anchor="ctr"/>
+          <a:lstStyle/>
+          <a:p>
+            <a:pPr algn="ctr"/>
+          </a:p>
+        </p:txBody>
+      </p:sp>
+      <p:sp>
+        <p:nvSpPr>
+          <p:cNvPr id="3" name="TextBox 2"/>
+          <p:cNvSpPr txBox="1"/>
+          <p:nvPr/>
+        </p:nvSpPr>
+        <p:spPr>
+          <a:xfrm>
+            <a:off x="502920" y="256032"/>
+            <a:ext cx="11247120" cy="822960"/>
+          </a:xfrm>
+          <a:prstGeom prst="rect">
+            <a:avLst/>
+          </a:prstGeom>
+          <a:noFill/>
+        </p:spPr>
+        <p:txBody>
+          <a:bodyPr wrap="square">
+            <a:spAutoFit/>
+          </a:bodyPr>
+          <a:lstStyle/>
+          <a:p>
+            <a:r>
+              <a:rPr sz="3000" b="1" i="0">
+                <a:solidFill>
+                  <a:srgbClr val="212B36"/>
+                </a:solidFill>
+                <a:latin typeface="Calibri"/>
+              </a:rPr>
+              <a:t>Limitations connues &amp; pistes</a:t>
+            </a:r>
+          </a:p>
+        </p:txBody>
+      </p:sp>
+      <p:sp>
+        <p:nvSpPr>
+          <p:cNvPr id="4" name="TextBox 3"/>
+          <p:cNvSpPr txBox="1"/>
+          <p:nvPr/>
+        </p:nvSpPr>
+        <p:spPr>
+          <a:xfrm>
+            <a:off x="502920" y="868680"/>
+            <a:ext cx="11247120" cy="457200"/>
+          </a:xfrm>
+          <a:prstGeom prst="rect">
+            <a:avLst/>
+          </a:prstGeom>
+          <a:noFill/>
+        </p:spPr>
+        <p:txBody>
+          <a:bodyPr wrap="square">
+            <a:spAutoFit/>
+          </a:bodyPr>
+          <a:lstStyle/>
+          <a:p>
+            <a:r>
+              <a:rPr sz="1500" b="0" i="1">
+                <a:solidFill>
+                  <a:srgbClr val="5A6672"/>
+                </a:solidFill>
+                <a:latin typeface="Calibri"/>
+              </a:rPr>
+              <a:t>Assumées et documentées dans le README</a:t>
+            </a:r>
+          </a:p>
+        </p:txBody>
+      </p:sp>
+      <p:sp>
+        <p:nvSpPr>
+          <p:cNvPr id="5" name="Rectangle 4"/>
+          <p:cNvSpPr/>
+          <p:nvPr/>
+        </p:nvSpPr>
+        <p:spPr>
+          <a:xfrm>
+            <a:off x="502920" y="1234440"/>
+            <a:ext cx="11155680" cy="27940"/>
+          </a:xfrm>
+          <a:prstGeom prst="rect">
+            <a:avLst/>
+          </a:prstGeom>
+          <a:solidFill>
+            <a:srgbClr val="00A8A8"/>
+          </a:solidFill>
+          <a:ln>
+            <a:noFill/>
+          </a:ln>
+          <a:effectLst/>
+        </p:spPr>
+        <p:style>
+          <a:lnRef idx="1">
+            <a:schemeClr val="accent1"/>
+          </a:lnRef>
+          <a:fillRef idx="3">
+            <a:schemeClr val="accent1"/>
+          </a:fillRef>
+          <a:effectRef idx="2">
+            <a:schemeClr val="accent1"/>
+          </a:effectRef>
+          <a:fontRef idx="minor">
+            <a:schemeClr val="lt1"/>
+          </a:fontRef>
+        </p:style>
+        <p:txBody>
+          <a:bodyPr rtlCol="0" anchor="ctr"/>
+          <a:lstStyle/>
+          <a:p>
+            <a:pPr algn="ctr"/>
+          </a:p>
+        </p:txBody>
+      </p:sp>
+      <p:sp>
+        <p:nvSpPr>
+          <p:cNvPr id="6" name="TextBox 5"/>
+          <p:cNvSpPr txBox="1"/>
+          <p:nvPr/>
+        </p:nvSpPr>
+        <p:spPr>
+          <a:xfrm>
+            <a:off x="502920" y="1554480"/>
+            <a:ext cx="11155680" cy="4937760"/>
+          </a:xfrm>
+          <a:prstGeom prst="rect">
+            <a:avLst/>
+          </a:prstGeom>
+          <a:noFill/>
+        </p:spPr>
+        <p:txBody>
+          <a:bodyPr wrap="square">
+            <a:spAutoFit/>
+          </a:bodyPr>
+          <a:lstStyle/>
+          <a:p>
+            <a:pPr>
+              <a:spcAft>
+                <a:spcPts val="800"/>
+              </a:spcAft>
+              <a:buFont typeface="Arial"/>
+              <a:buChar char="▪"/>
+            </a:pPr>
+            <a:r>
+              <a:rPr sz="1600" b="1" i="0">
+                <a:solidFill>
+                  <a:srgbClr val="212B36"/>
+                </a:solidFill>
+                <a:latin typeface="Calibri"/>
+              </a:rPr>
+              <a:t>Limitations</a:t>
+            </a:r>
+            <a:r>
+              <a:rPr sz="1600" b="0" i="0">
+                <a:solidFill>
+                  <a:srgbClr val="212B36"/>
+                </a:solidFill>
+                <a:latin typeface="Calibri"/>
+              </a:rPr>
+              <a:t> :</a:t>
+            </a:r>
+          </a:p>
+          <a:p>
+            <a:pPr lvl="1">
+              <a:spcAft>
+                <a:spcPts val="800"/>
+              </a:spcAft>
+              <a:buFont typeface="Arial"/>
+              <a:buChar char="–"/>
+            </a:pPr>
+            <a:r>
+              <a:rPr sz="1400" b="0" i="0">
+                <a:solidFill>
+                  <a:srgbClr val="5A6672"/>
+                </a:solidFill>
+                <a:latin typeface="Calibri"/>
+              </a:rPr>
+              <a:t>moteur mail requis (pas d'envoi de secours) ; SMTP anonyme uniquement</a:t>
+            </a:r>
+          </a:p>
+          <a:p>
+            <a:pPr lvl="1">
+              <a:spcAft>
+                <a:spcPts val="800"/>
+              </a:spcAft>
+              <a:buFont typeface="Arial"/>
+              <a:buChar char="–"/>
+            </a:pPr>
+            <a:r>
+              <a:rPr sz="1400" b="0" i="0">
+                <a:solidFill>
+                  <a:srgbClr val="5A6672"/>
+                </a:solidFill>
+                <a:latin typeface="Calibri"/>
+              </a:rPr>
+              <a:t>congés en journées entières — ni demi-journées, ni jours fériés</a:t>
+            </a:r>
+          </a:p>
+          <a:p>
+            <a:pPr lvl="1">
+              <a:spcAft>
+                <a:spcPts val="800"/>
+              </a:spcAft>
+              <a:buFont typeface="Arial"/>
+              <a:buChar char="–"/>
+            </a:pPr>
+            <a:r>
+              <a:rPr sz="1400" b="0" i="0">
+                <a:solidFill>
+                  <a:srgbClr val="5A6672"/>
+                </a:solidFill>
+                <a:latin typeface="Calibri"/>
+              </a:rPr>
+              <a:t>pas de garde anti-doublon d'envoi : relancer = renvoyer un mail</a:t>
+            </a:r>
+          </a:p>
+          <a:p>
+            <a:pPr lvl="1">
+              <a:spcAft>
+                <a:spcPts val="800"/>
+              </a:spcAft>
+              <a:buFont typeface="Arial"/>
+              <a:buChar char="–"/>
+            </a:pPr>
+            <a:r>
+              <a:rPr sz="1400" b="0" i="0">
+                <a:solidFill>
+                  <a:srgbClr val="5A6672"/>
+                </a:solidFill>
+                <a:latin typeface="Calibri"/>
+              </a:rPr>
+              <a:t>Windows + PowerShell 5.1 + Excel requis ; encodages à respecter (UTF-8 BOM)</a:t>
+            </a:r>
+          </a:p>
+          <a:p>
+            <a:pPr lvl="1">
+              <a:spcAft>
+                <a:spcPts val="800"/>
+              </a:spcAft>
+              <a:buFont typeface="Arial"/>
+              <a:buChar char="–"/>
+            </a:pPr>
+            <a:r>
+              <a:rPr sz="1400" b="0" i="0">
+                <a:solidFill>
+                  <a:srgbClr val="5A6672"/>
+                </a:solidFill>
+                <a:latin typeface="Calibri"/>
+              </a:rPr>
+              <a:t>pas de mail récapitulatif global (chaque squad alerte ses EmailsAdmin)</a:t>
+            </a:r>
+          </a:p>
+          <a:p>
+            <a:pPr>
+              <a:spcAft>
+                <a:spcPts val="800"/>
+              </a:spcAft>
+              <a:buFont typeface="Arial"/>
+              <a:buChar char="▪"/>
+            </a:pPr>
+            <a:r>
+              <a:rPr sz="1600" b="1" i="0">
+                <a:solidFill>
+                  <a:srgbClr val="212B36"/>
+                </a:solidFill>
+                <a:latin typeface="Calibri"/>
+              </a:rPr>
+              <a:t>Pistes d'évolution</a:t>
+            </a:r>
+            <a:r>
+              <a:rPr sz="1600" b="0" i="0">
+                <a:solidFill>
+                  <a:srgbClr val="212B36"/>
+                </a:solidFill>
+                <a:latin typeface="Calibri"/>
+              </a:rPr>
+              <a:t> :</a:t>
+            </a:r>
+          </a:p>
+          <a:p>
+            <a:pPr lvl="1">
+              <a:spcAft>
+                <a:spcPts val="800"/>
+              </a:spcAft>
+              <a:buFont typeface="Arial"/>
+              <a:buChar char="–"/>
+            </a:pPr>
+            <a:r>
+              <a:rPr sz="1400" b="0" i="0">
+                <a:solidFill>
+                  <a:srgbClr val="5A6672"/>
+                </a:solidFill>
+                <a:latin typeface="Calibri"/>
+              </a:rPr>
+              <a:t>corriger les 3 constats moyens de la revue (validation de contenu, Test des 5 feuilles, filtre -Squad)</a:t>
+            </a:r>
+          </a:p>
+          <a:p>
+            <a:pPr lvl="1">
+              <a:spcAft>
+                <a:spcPts val="800"/>
+              </a:spcAft>
+              <a:buFont typeface="Arial"/>
+              <a:buChar char="–"/>
+            </a:pPr>
+            <a:r>
+              <a:rPr sz="1400" b="0" i="0">
+                <a:solidFill>
+                  <a:srgbClr val="5A6672"/>
+                </a:solidFill>
+                <a:latin typeface="Calibri"/>
+              </a:rPr>
+              <a:t>jours fériés dans l'exclusion congés (calendrier français)</a:t>
+            </a:r>
+          </a:p>
+          <a:p>
+            <a:pPr lvl="1">
+              <a:spcAft>
+                <a:spcPts val="800"/>
+              </a:spcAft>
+              <a:buFont typeface="Arial"/>
+              <a:buChar char="–"/>
+            </a:pPr>
+            <a:r>
+              <a:rPr sz="1400" b="0" i="0">
+                <a:solidFill>
+                  <a:srgbClr val="5A6672"/>
+                </a:solidFill>
+                <a:latin typeface="Calibri"/>
+              </a:rPr>
+              <a:t>extraction du cœur de désignation en fonctions testables (Pester) sans changer le déploiement mono-fichier</a:t>
+            </a:r>
+          </a:p>
+          <a:p>
+            <a:pPr>
+              <a:spcAft>
+                <a:spcPts val="800"/>
+              </a:spcAft>
+              <a:buFont typeface="Arial"/>
+              <a:buChar char="▪"/>
+            </a:pPr>
+            <a:r>
+              <a:rPr sz="1600" b="1" i="0">
+                <a:solidFill>
+                  <a:srgbClr val="212B36"/>
+                </a:solidFill>
+                <a:latin typeface="Calibri"/>
+              </a:rPr>
+              <a:t>Documentation</a:t>
+            </a:r>
+            <a:r>
+              <a:rPr sz="1600" b="0" i="0">
+                <a:solidFill>
+                  <a:srgbClr val="212B36"/>
+                </a:solidFill>
+                <a:latin typeface="Calibri"/>
+              </a:rPr>
+              <a:t> : page Confluence + README du dépôt (source de vérité) + exemple de config commenté</a:t>
             </a:r>
           </a:p>
         </p:txBody>
@@ -3731,51 +5211,7 @@
         <p:spPr>
           <a:xfrm>
             <a:off x="0" y="0"/>
-            <a:ext cx="12191695" cy="1051560"/>
-          </a:xfrm>
-          <a:prstGeom prst="rect">
-            <a:avLst/>
-          </a:prstGeom>
-          <a:solidFill>
-            <a:srgbClr val="005BAA"/>
-          </a:solidFill>
-          <a:ln>
-            <a:noFill/>
-          </a:ln>
-          <a:effectLst/>
-        </p:spPr>
-        <p:style>
-          <a:lnRef idx="1">
-            <a:schemeClr val="accent1"/>
-          </a:lnRef>
-          <a:fillRef idx="3">
-            <a:schemeClr val="accent1"/>
-          </a:fillRef>
-          <a:effectRef idx="2">
-            <a:schemeClr val="accent1"/>
-          </a:effectRef>
-          <a:fontRef idx="minor">
-            <a:schemeClr val="lt1"/>
-          </a:fontRef>
-        </p:style>
-        <p:txBody>
-          <a:bodyPr rtlCol="0" anchor="ctr"/>
-          <a:lstStyle/>
-          <a:p>
-            <a:pPr algn="ctr"/>
-          </a:p>
-        </p:txBody>
-      </p:sp>
-      <p:sp>
-        <p:nvSpPr>
-          <p:cNvPr id="3" name="Rectangle 2"/>
-          <p:cNvSpPr/>
-          <p:nvPr/>
-        </p:nvSpPr>
-        <p:spPr>
-          <a:xfrm>
-            <a:off x="0" y="1051560"/>
-            <a:ext cx="12191695" cy="38100"/>
+            <a:ext cx="201168" cy="6858000"/>
           </a:xfrm>
           <a:prstGeom prst="rect">
             <a:avLst/>
@@ -3812,14 +5248,14 @@
       </p:sp>
       <p:sp>
         <p:nvSpPr>
-          <p:cNvPr id="4" name="TextBox 3"/>
+          <p:cNvPr id="3" name="TextBox 2"/>
           <p:cNvSpPr txBox="1"/>
           <p:nvPr/>
         </p:nvSpPr>
         <p:spPr>
           <a:xfrm>
-            <a:off x="548640" y="109728"/>
-            <a:ext cx="11064240" cy="914400"/>
+            <a:off x="502920" y="256032"/>
+            <a:ext cx="11247120" cy="822960"/>
           </a:xfrm>
           <a:prstGeom prst="rect">
             <a:avLst/>
@@ -3827,44 +5263,33 @@
           <a:noFill/>
         </p:spPr>
         <p:txBody>
-          <a:bodyPr wrap="square" anchor="t">
+          <a:bodyPr wrap="square">
             <a:spAutoFit/>
           </a:bodyPr>
           <a:lstStyle/>
           <a:p>
             <a:r>
-              <a:rPr sz="1200" b="1" i="0">
-                <a:solidFill>
-                  <a:srgbClr val="CFE2F3"/>
-                </a:solidFill>
-                <a:latin typeface="Calibri"/>
-              </a:rPr>
-              <a:t>POURQUOI CET OUTIL</a:t>
-            </a:r>
-          </a:p>
-          <a:p>
-            <a:r>
-              <a:rPr sz="2800" b="1" i="0">
-                <a:solidFill>
-                  <a:srgbClr val="FFFFFF"/>
-                </a:solidFill>
-                <a:latin typeface="Calibri"/>
-              </a:rPr>
-              <a:t>Objectif</a:t>
-            </a:r>
-          </a:p>
-        </p:txBody>
-      </p:sp>
-      <p:sp>
-        <p:nvSpPr>
-          <p:cNvPr id="5" name="TextBox 4"/>
+              <a:rPr sz="3000" b="1" i="0">
+                <a:solidFill>
+                  <a:srgbClr val="212B36"/>
+                </a:solidFill>
+                <a:latin typeface="Calibri"/>
+              </a:rPr>
+              <a:t>Le besoin</a:t>
+            </a:r>
+          </a:p>
+        </p:txBody>
+      </p:sp>
+      <p:sp>
+        <p:nvSpPr>
+          <p:cNvPr id="4" name="TextBox 3"/>
           <p:cNvSpPr txBox="1"/>
           <p:nvPr/>
         </p:nvSpPr>
         <p:spPr>
           <a:xfrm>
-            <a:off x="640080" y="1325880"/>
-            <a:ext cx="10881360" cy="5029200"/>
+            <a:off x="502920" y="868680"/>
+            <a:ext cx="11247120" cy="457200"/>
           </a:xfrm>
           <a:prstGeom prst="rect">
             <a:avLst/>
@@ -3872,121 +5297,64 @@
           <a:noFill/>
         </p:spPr>
         <p:txBody>
-          <a:bodyPr wrap="square" anchor="t">
+          <a:bodyPr wrap="square">
             <a:spAutoFit/>
           </a:bodyPr>
           <a:lstStyle/>
           <a:p>
-            <a:pPr>
-              <a:spcAft>
-                <a:spcPts val="600"/>
-              </a:spcAft>
-            </a:pPr>
-            <a:r>
-              <a:rPr sz="1800" b="1" i="0">
-                <a:solidFill>
-                  <a:srgbClr val="1F2A37"/>
-                </a:solidFill>
-                <a:latin typeface="Calibri"/>
-              </a:rPr>
-              <a:t>▪  Chaque semaine, pour chaque squad : désigner automatiquement une personne par rôle.</a:t>
-            </a:r>
-          </a:p>
-          <a:p>
-            <a:pPr lvl="1">
-              <a:spcAft>
-                <a:spcPts val="600"/>
-              </a:spcAft>
-            </a:pPr>
-            <a:r>
-              <a:rPr sz="1500" b="0" i="0">
-                <a:solidFill>
-                  <a:srgbClr val="5B6670"/>
-                </a:solidFill>
-                <a:latin typeface="Calibri"/>
-              </a:rPr>
-              <a:t>–  1 rôle = solo · 2 rôles = binôme · 3 rôles = trio…</a:t>
-            </a:r>
-          </a:p>
-          <a:p>
-            <a:pPr>
-              <a:spcAft>
-                <a:spcPts val="600"/>
-              </a:spcAft>
-            </a:pPr>
-            <a:r>
-              <a:rPr sz="1800" b="1" i="0">
-                <a:solidFill>
-                  <a:srgbClr val="1F2A37"/>
-                </a:solidFill>
-                <a:latin typeface="Calibri"/>
-              </a:rPr>
-              <a:t>▪  Deux envois pilotés par le planificateur :</a:t>
-            </a:r>
-          </a:p>
-          <a:p>
-            <a:pPr lvl="1">
-              <a:spcAft>
-                <a:spcPts val="600"/>
-              </a:spcAft>
-            </a:pPr>
-            <a:r>
-              <a:rPr sz="1500" b="0" i="0">
-                <a:solidFill>
-                  <a:srgbClr val="5B6670"/>
-                </a:solidFill>
-                <a:latin typeface="Calibri"/>
-              </a:rPr>
-              <a:t>–  Vendredi → ANNONCE pour la semaine suivante.</a:t>
-            </a:r>
-          </a:p>
-          <a:p>
-            <a:pPr lvl="1">
-              <a:spcAft>
-                <a:spcPts val="600"/>
-              </a:spcAft>
-            </a:pPr>
-            <a:r>
-              <a:rPr sz="1500" b="0" i="0">
-                <a:solidFill>
-                  <a:srgbClr val="5B6670"/>
-                </a:solidFill>
-                <a:latin typeface="Calibri"/>
-              </a:rPr>
-              <a:t>–  Lundi → RAPPEL pour la semaine en cours.</a:t>
-            </a:r>
-          </a:p>
-          <a:p>
-            <a:pPr>
-              <a:spcAft>
-                <a:spcPts val="600"/>
-              </a:spcAft>
-            </a:pPr>
-            <a:r>
-              <a:rPr sz="1800" b="1" i="0">
-                <a:solidFill>
-                  <a:srgbClr val="1F2A37"/>
-                </a:solidFill>
-                <a:latin typeface="Calibri"/>
-              </a:rPr>
-              <a:t>▪  Zéro base de données : les données métier vivent dans un classeur Excel par squad.</a:t>
-            </a:r>
-          </a:p>
-          <a:p>
-            <a:pPr>
-              <a:spcAft>
-                <a:spcPts val="600"/>
-              </a:spcAft>
-            </a:pPr>
-            <a:r>
-              <a:rPr sz="1800" b="1" i="0">
-                <a:solidFill>
-                  <a:srgbClr val="1F2A37"/>
-                </a:solidFill>
-                <a:latin typeface="Calibri"/>
-              </a:rPr>
-              <a:t>▪  Équité intégrée : priorité à qui n'a jamais fait, puis au moins souvent désigné.</a:t>
-            </a:r>
+            <a:r>
+              <a:rPr sz="1500" b="0" i="1">
+                <a:solidFill>
+                  <a:srgbClr val="5A6672"/>
+                </a:solidFill>
+                <a:latin typeface="Calibri"/>
+              </a:rPr>
+              <a:t>Organiser équitablement le suivi d'exploitation de plusieurs squads</a:t>
+            </a:r>
+          </a:p>
+        </p:txBody>
+      </p:sp>
+      <p:sp>
+        <p:nvSpPr>
+          <p:cNvPr id="5" name="Rectangle 4"/>
+          <p:cNvSpPr/>
+          <p:nvPr/>
+        </p:nvSpPr>
+        <p:spPr>
+          <a:xfrm>
+            <a:off x="502920" y="1234440"/>
+            <a:ext cx="11155680" cy="27940"/>
+          </a:xfrm>
+          <a:prstGeom prst="rect">
+            <a:avLst/>
+          </a:prstGeom>
+          <a:solidFill>
+            <a:srgbClr val="00A8A8"/>
+          </a:solidFill>
+          <a:ln>
+            <a:noFill/>
+          </a:ln>
+          <a:effectLst/>
+        </p:spPr>
+        <p:style>
+          <a:lnRef idx="1">
+            <a:schemeClr val="accent1"/>
+          </a:lnRef>
+          <a:fillRef idx="3">
+            <a:schemeClr val="accent1"/>
+          </a:fillRef>
+          <a:effectRef idx="2">
+            <a:schemeClr val="accent1"/>
+          </a:effectRef>
+          <a:fontRef idx="minor">
+            <a:schemeClr val="lt1"/>
+          </a:fontRef>
+        </p:style>
+        <p:txBody>
+          <a:bodyPr rtlCol="0" anchor="ctr"/>
+          <a:lstStyle/>
+          <a:p>
+            <a:pPr algn="ctr"/>
           </a:p>
         </p:txBody>
       </p:sp>
@@ -3998,8 +5366,8 @@
         </p:nvSpPr>
         <p:spPr>
           <a:xfrm>
-            <a:off x="548640" y="6400800"/>
-            <a:ext cx="11064240" cy="365760"/>
+            <a:off x="502920" y="1554480"/>
+            <a:ext cx="11155680" cy="4937760"/>
           </a:xfrm>
           <a:prstGeom prst="rect">
             <a:avLst/>
@@ -4007,19 +5375,287 @@
           <a:noFill/>
         </p:spPr>
         <p:txBody>
-          <a:bodyPr wrap="square" anchor="t">
+          <a:bodyPr wrap="square">
             <a:spAutoFit/>
           </a:bodyPr>
           <a:lstStyle/>
           <a:p>
-            <a:r>
-              <a:rPr sz="900" b="0" i="0">
-                <a:solidFill>
-                  <a:srgbClr val="5B6670"/>
-                </a:solidFill>
-                <a:latin typeface="Calibri"/>
-              </a:rPr>
-              <a:t>Suivi d'Exploitation Multi-Squads</a:t>
+            <a:pPr>
+              <a:spcAft>
+                <a:spcPts val="800"/>
+              </a:spcAft>
+              <a:buFont typeface="Arial"/>
+              <a:buChar char="▪"/>
+            </a:pPr>
+            <a:r>
+              <a:rPr sz="1700" b="0" i="0">
+                <a:solidFill>
+                  <a:srgbClr val="212B36"/>
+                </a:solidFill>
+                <a:latin typeface="Calibri"/>
+              </a:rPr>
+              <a:t>Chaque semaine, chaque squad doit avoir </a:t>
+            </a:r>
+            <a:r>
+              <a:rPr sz="1700" b="1" i="0">
+                <a:solidFill>
+                  <a:srgbClr val="212B36"/>
+                </a:solidFill>
+                <a:latin typeface="Calibri"/>
+              </a:rPr>
+              <a:t>une personne identifiée par rôle</a:t>
+            </a:r>
+            <a:r>
+              <a:rPr sz="1700" b="0" i="0">
+                <a:solidFill>
+                  <a:srgbClr val="212B36"/>
+                </a:solidFill>
+                <a:latin typeface="Calibri"/>
+              </a:rPr>
+              <a:t> pour assurer le suivi d'exploitation (1 rôle = solo, 2 = binôme, 3 = trio…)</a:t>
+            </a:r>
+          </a:p>
+          <a:p>
+            <a:pPr>
+              <a:spcAft>
+                <a:spcPts val="800"/>
+              </a:spcAft>
+              <a:buFont typeface="Arial"/>
+              <a:buChar char="▪"/>
+            </a:pPr>
+            <a:r>
+              <a:rPr sz="1700" b="0" i="0">
+                <a:solidFill>
+                  <a:srgbClr val="212B36"/>
+                </a:solidFill>
+                <a:latin typeface="Calibri"/>
+              </a:rPr>
+              <a:t>Avant : désignation </a:t>
+            </a:r>
+            <a:r>
+              <a:rPr sz="1700" b="1" i="0">
+                <a:solidFill>
+                  <a:srgbClr val="212B36"/>
+                </a:solidFill>
+                <a:latin typeface="Calibri"/>
+              </a:rPr>
+              <a:t>manuelle</a:t>
+            </a:r>
+            <a:r>
+              <a:rPr sz="1700" b="0" i="0">
+                <a:solidFill>
+                  <a:srgbClr val="212B36"/>
+                </a:solidFill>
+                <a:latin typeface="Calibri"/>
+              </a:rPr>
+              <a:t> — oublis, iniquité, charge pour les responsables de squad</a:t>
+            </a:r>
+          </a:p>
+          <a:p>
+            <a:pPr>
+              <a:spcAft>
+                <a:spcPts val="800"/>
+              </a:spcAft>
+              <a:buFont typeface="Arial"/>
+              <a:buChar char="▪"/>
+            </a:pPr>
+            <a:r>
+              <a:rPr sz="1700" b="0" i="0">
+                <a:solidFill>
+                  <a:srgbClr val="212B36"/>
+                </a:solidFill>
+                <a:latin typeface="Calibri"/>
+              </a:rPr>
+              <a:t>Attendus :</a:t>
+            </a:r>
+          </a:p>
+          <a:p>
+            <a:pPr lvl="1">
+              <a:spcAft>
+                <a:spcPts val="800"/>
+              </a:spcAft>
+              <a:buFont typeface="Arial"/>
+              <a:buChar char="–"/>
+            </a:pPr>
+            <a:r>
+              <a:rPr sz="1500" b="0" i="0">
+                <a:solidFill>
+                  <a:srgbClr val="5A6672"/>
+                </a:solidFill>
+                <a:latin typeface="Calibri"/>
+              </a:rPr>
+              <a:t>rotation </a:t>
+            </a:r>
+            <a:r>
+              <a:rPr sz="1500" b="1" i="0">
+                <a:solidFill>
+                  <a:srgbClr val="5A6672"/>
+                </a:solidFill>
+                <a:latin typeface="Calibri"/>
+              </a:rPr>
+              <a:t>équitable</a:t>
+            </a:r>
+            <a:r>
+              <a:rPr sz="1500" b="0" i="0">
+                <a:solidFill>
+                  <a:srgbClr val="5A6672"/>
+                </a:solidFill>
+                <a:latin typeface="Calibri"/>
+              </a:rPr>
+              <a:t> (le moins souvent désigné passe en premier)</a:t>
+            </a:r>
+          </a:p>
+          <a:p>
+            <a:pPr lvl="1">
+              <a:spcAft>
+                <a:spcPts val="800"/>
+              </a:spcAft>
+              <a:buFont typeface="Arial"/>
+              <a:buChar char="–"/>
+            </a:pPr>
+            <a:r>
+              <a:rPr sz="1500" b="0" i="0">
+                <a:solidFill>
+                  <a:srgbClr val="5A6672"/>
+                </a:solidFill>
+                <a:latin typeface="Calibri"/>
+              </a:rPr>
+              <a:t>prise en compte automatique des </a:t>
+            </a:r>
+            <a:r>
+              <a:rPr sz="1500" b="1" i="0">
+                <a:solidFill>
+                  <a:srgbClr val="5A6672"/>
+                </a:solidFill>
+                <a:latin typeface="Calibri"/>
+              </a:rPr>
+              <a:t>congés</a:t>
+            </a:r>
+            <a:r>
+              <a:rPr sz="1500" b="0" i="0">
+                <a:solidFill>
+                  <a:srgbClr val="5A6672"/>
+                </a:solidFill>
+                <a:latin typeface="Calibri"/>
+              </a:rPr>
+              <a:t> (avec tolérance configurable)</a:t>
+            </a:r>
+          </a:p>
+          <a:p>
+            <a:pPr lvl="1">
+              <a:spcAft>
+                <a:spcPts val="800"/>
+              </a:spcAft>
+              <a:buFont typeface="Arial"/>
+              <a:buChar char="–"/>
+            </a:pPr>
+            <a:r>
+              <a:rPr sz="1500" b="1" i="0">
+                <a:solidFill>
+                  <a:srgbClr val="5A6672"/>
+                </a:solidFill>
+                <a:latin typeface="Calibri"/>
+              </a:rPr>
+              <a:t>annonce le vendredi</a:t>
+            </a:r>
+            <a:r>
+              <a:rPr sz="1500" b="0" i="0">
+                <a:solidFill>
+                  <a:srgbClr val="5A6672"/>
+                </a:solidFill>
+                <a:latin typeface="Calibri"/>
+              </a:rPr>
+              <a:t> (semaine suivante) et </a:t>
+            </a:r>
+            <a:r>
+              <a:rPr sz="1500" b="1" i="0">
+                <a:solidFill>
+                  <a:srgbClr val="5A6672"/>
+                </a:solidFill>
+                <a:latin typeface="Calibri"/>
+              </a:rPr>
+              <a:t>rappel le lundi</a:t>
+            </a:r>
+            <a:r>
+              <a:rPr sz="1500" b="0" i="0">
+                <a:solidFill>
+                  <a:srgbClr val="5A6672"/>
+                </a:solidFill>
+                <a:latin typeface="Calibri"/>
+              </a:rPr>
+              <a:t> (semaine en cours)</a:t>
+            </a:r>
+          </a:p>
+          <a:p>
+            <a:pPr lvl="1">
+              <a:spcAft>
+                <a:spcPts val="800"/>
+              </a:spcAft>
+              <a:buFont typeface="Arial"/>
+              <a:buChar char="–"/>
+            </a:pPr>
+            <a:r>
+              <a:rPr sz="1500" b="0" i="0">
+                <a:solidFill>
+                  <a:srgbClr val="5A6672"/>
+                </a:solidFill>
+                <a:latin typeface="Calibri"/>
+              </a:rPr>
+              <a:t>alerte des admins si </a:t>
+            </a:r>
+            <a:r>
+              <a:rPr sz="1500" b="1" i="0">
+                <a:solidFill>
+                  <a:srgbClr val="5A6672"/>
+                </a:solidFill>
+                <a:latin typeface="Calibri"/>
+              </a:rPr>
+              <a:t>aucun candidat</a:t>
+            </a:r>
+            <a:r>
+              <a:rPr sz="1500" b="0" i="0">
+                <a:solidFill>
+                  <a:srgbClr val="5A6672"/>
+                </a:solidFill>
+                <a:latin typeface="Calibri"/>
+              </a:rPr>
+              <a:t> n'est disponible</a:t>
+            </a:r>
+          </a:p>
+          <a:p>
+            <a:pPr>
+              <a:spcAft>
+                <a:spcPts val="800"/>
+              </a:spcAft>
+              <a:buFont typeface="Arial"/>
+              <a:buChar char="▪"/>
+            </a:pPr>
+            <a:r>
+              <a:rPr sz="1700" b="0" i="0">
+                <a:solidFill>
+                  <a:srgbClr val="212B36"/>
+                </a:solidFill>
+                <a:latin typeface="Calibri"/>
+              </a:rPr>
+              <a:t>Contraintes : environnement </a:t>
+            </a:r>
+            <a:r>
+              <a:rPr sz="1700" b="1" i="0">
+                <a:solidFill>
+                  <a:srgbClr val="212B36"/>
+                </a:solidFill>
+                <a:latin typeface="Calibri"/>
+              </a:rPr>
+              <a:t>Windows d'entreprise</a:t>
+            </a:r>
+            <a:r>
+              <a:rPr sz="1700" b="0" i="0">
+                <a:solidFill>
+                  <a:srgbClr val="212B36"/>
+                </a:solidFill>
+                <a:latin typeface="Calibri"/>
+              </a:rPr>
+              <a:t> (PowerShell 5.1, Excel, SMTP anonyme), pas de base de données, self-service pour les squads</a:t>
             </a:r>
           </a:p>
         </p:txBody>
@@ -4051,51 +5687,7 @@
         <p:spPr>
           <a:xfrm>
             <a:off x="0" y="0"/>
-            <a:ext cx="12191695" cy="1051560"/>
-          </a:xfrm>
-          <a:prstGeom prst="rect">
-            <a:avLst/>
-          </a:prstGeom>
-          <a:solidFill>
-            <a:srgbClr val="005BAA"/>
-          </a:solidFill>
-          <a:ln>
-            <a:noFill/>
-          </a:ln>
-          <a:effectLst/>
-        </p:spPr>
-        <p:style>
-          <a:lnRef idx="1">
-            <a:schemeClr val="accent1"/>
-          </a:lnRef>
-          <a:fillRef idx="3">
-            <a:schemeClr val="accent1"/>
-          </a:fillRef>
-          <a:effectRef idx="2">
-            <a:schemeClr val="accent1"/>
-          </a:effectRef>
-          <a:fontRef idx="minor">
-            <a:schemeClr val="lt1"/>
-          </a:fontRef>
-        </p:style>
-        <p:txBody>
-          <a:bodyPr rtlCol="0" anchor="ctr"/>
-          <a:lstStyle/>
-          <a:p>
-            <a:pPr algn="ctr"/>
-          </a:p>
-        </p:txBody>
-      </p:sp>
-      <p:sp>
-        <p:nvSpPr>
-          <p:cNvPr id="3" name="Rectangle 2"/>
-          <p:cNvSpPr/>
-          <p:nvPr/>
-        </p:nvSpPr>
-        <p:spPr>
-          <a:xfrm>
-            <a:off x="0" y="1051560"/>
-            <a:ext cx="12191695" cy="38100"/>
+            <a:ext cx="201168" cy="6858000"/>
           </a:xfrm>
           <a:prstGeom prst="rect">
             <a:avLst/>
@@ -4132,14 +5724,14 @@
       </p:sp>
       <p:sp>
         <p:nvSpPr>
-          <p:cNvPr id="4" name="TextBox 3"/>
+          <p:cNvPr id="3" name="TextBox 2"/>
           <p:cNvSpPr txBox="1"/>
           <p:nvPr/>
         </p:nvSpPr>
         <p:spPr>
           <a:xfrm>
-            <a:off x="548640" y="109728"/>
-            <a:ext cx="11064240" cy="914400"/>
+            <a:off x="502920" y="256032"/>
+            <a:ext cx="11247120" cy="822960"/>
           </a:xfrm>
           <a:prstGeom prst="rect">
             <a:avLst/>
@@ -4147,44 +5739,33 @@
           <a:noFill/>
         </p:spPr>
         <p:txBody>
-          <a:bodyPr wrap="square" anchor="t">
+          <a:bodyPr wrap="square">
             <a:spAutoFit/>
           </a:bodyPr>
           <a:lstStyle/>
           <a:p>
             <a:r>
-              <a:rPr sz="1200" b="1" i="0">
-                <a:solidFill>
-                  <a:srgbClr val="CFE2F3"/>
-                </a:solidFill>
-                <a:latin typeface="Calibri"/>
-              </a:rPr>
-              <a:t>LES BRIQUES</a:t>
-            </a:r>
-          </a:p>
-          <a:p>
-            <a:r>
-              <a:rPr sz="2800" b="1" i="0">
-                <a:solidFill>
-                  <a:srgbClr val="FFFFFF"/>
-                </a:solidFill>
-                <a:latin typeface="Calibri"/>
-              </a:rPr>
-              <a:t>Vue d'ensemble</a:t>
-            </a:r>
-          </a:p>
-        </p:txBody>
-      </p:sp>
-      <p:sp>
-        <p:nvSpPr>
-          <p:cNvPr id="5" name="TextBox 4"/>
+              <a:rPr sz="3000" b="1" i="0">
+                <a:solidFill>
+                  <a:srgbClr val="212B36"/>
+                </a:solidFill>
+                <a:latin typeface="Calibri"/>
+              </a:rPr>
+              <a:t>Fonctionnement hebdomadaire</a:t>
+            </a:r>
+          </a:p>
+        </p:txBody>
+      </p:sp>
+      <p:sp>
+        <p:nvSpPr>
+          <p:cNvPr id="4" name="TextBox 3"/>
           <p:cNvSpPr txBox="1"/>
           <p:nvPr/>
         </p:nvSpPr>
         <p:spPr>
           <a:xfrm>
-            <a:off x="640080" y="1325880"/>
-            <a:ext cx="10881360" cy="5029200"/>
+            <a:off x="502920" y="868680"/>
+            <a:ext cx="11247120" cy="457200"/>
           </a:xfrm>
           <a:prstGeom prst="rect">
             <a:avLst/>
@@ -4192,118 +5773,165 @@
           <a:noFill/>
         </p:spPr>
         <p:txBody>
-          <a:bodyPr wrap="square" anchor="t">
+          <a:bodyPr wrap="square">
             <a:spAutoFit/>
           </a:bodyPr>
           <a:lstStyle/>
           <a:p>
-            <a:pPr>
-              <a:spcAft>
-                <a:spcPts val="600"/>
-              </a:spcAft>
-            </a:pPr>
-            <a:r>
-              <a:rPr sz="1800" b="1" i="0">
-                <a:solidFill>
-                  <a:srgbClr val="1F2A37"/>
-                </a:solidFill>
-                <a:latin typeface="Calibri"/>
-              </a:rPr>
-              <a:t>▪  SuiviExploitation.ps1 — script unique : orchestration, désignation, lecture/écriture Excel.</a:t>
-            </a:r>
-          </a:p>
-          <a:p>
-            <a:pPr>
-              <a:spcAft>
-                <a:spcPts val="600"/>
-              </a:spcAft>
-            </a:pPr>
-            <a:r>
-              <a:rPr sz="1800" b="1" i="0">
-                <a:solidFill>
-                  <a:srgbClr val="1F2A37"/>
-                </a:solidFill>
-                <a:latin typeface="Calibri"/>
-              </a:rPr>
-              <a:t>▪  config-suivi.json — UNE configuration globale, partagée avec le moteur mail.</a:t>
-            </a:r>
-          </a:p>
-          <a:p>
-            <a:pPr>
-              <a:spcAft>
-                <a:spcPts val="600"/>
-              </a:spcAft>
-            </a:pPr>
-            <a:r>
-              <a:rPr sz="1800" b="1" i="0">
-                <a:solidFill>
-                  <a:srgbClr val="1F2A37"/>
-                </a:solidFill>
-                <a:latin typeface="Calibri"/>
-              </a:rPr>
-              <a:t>▪  SendMailNotificationHTML.ps1 — moteur d'envoi HTML (dépendance requise).</a:t>
-            </a:r>
-          </a:p>
-          <a:p>
-            <a:pPr>
-              <a:spcAft>
-                <a:spcPts val="600"/>
-              </a:spcAft>
-            </a:pPr>
-            <a:r>
-              <a:rPr sz="1800" b="1" i="0">
-                <a:solidFill>
-                  <a:srgbClr val="1F2A37"/>
-                </a:solidFill>
-                <a:latin typeface="Calibri"/>
-              </a:rPr>
-              <a:t>▪  template-notification.html — gabarit HTML des mails (charte).</a:t>
-            </a:r>
-          </a:p>
-          <a:p>
-            <a:pPr>
-              <a:spcAft>
-                <a:spcPts val="600"/>
-              </a:spcAft>
-            </a:pPr>
-            <a:r>
-              <a:rPr sz="1800" b="1" i="0">
-                <a:solidFill>
-                  <a:srgbClr val="1F2A37"/>
-                </a:solidFill>
-                <a:latin typeface="Calibri"/>
-              </a:rPr>
-              <a:t>▪  suivi_exploitation.xlsx (par squad) — données métier ET configuration de la squad.</a:t>
-            </a:r>
-          </a:p>
-          <a:p>
-            <a:pPr lvl="1">
-              <a:spcAft>
-                <a:spcPts val="600"/>
-              </a:spcAft>
-            </a:pPr>
-            <a:r>
-              <a:rPr sz="1500" b="0" i="0">
-                <a:solidFill>
-                  <a:srgbClr val="5B6670"/>
-                </a:solidFill>
-                <a:latin typeface="Calibri"/>
-              </a:rPr>
-              <a:t>–  Flux : Task Scheduler → script → (par squad) Excel → désignation → écriture → moteur mail → envoi.</a:t>
-            </a:r>
-          </a:p>
-        </p:txBody>
-      </p:sp>
-      <p:sp>
-        <p:nvSpPr>
-          <p:cNvPr id="6" name="TextBox 5"/>
+            <a:r>
+              <a:rPr sz="1500" b="0" i="1">
+                <a:solidFill>
+                  <a:srgbClr val="5A6672"/>
+                </a:solidFill>
+                <a:latin typeface="Calibri"/>
+              </a:rPr>
+              <a:t>Deux tâches planifiées, un recalcul idempotent</a:t>
+            </a:r>
+          </a:p>
+        </p:txBody>
+      </p:sp>
+      <p:sp>
+        <p:nvSpPr>
+          <p:cNvPr id="5" name="Rectangle 4"/>
+          <p:cNvSpPr/>
+          <p:nvPr/>
+        </p:nvSpPr>
+        <p:spPr>
+          <a:xfrm>
+            <a:off x="502920" y="1234440"/>
+            <a:ext cx="11155680" cy="27940"/>
+          </a:xfrm>
+          <a:prstGeom prst="rect">
+            <a:avLst/>
+          </a:prstGeom>
+          <a:solidFill>
+            <a:srgbClr val="00A8A8"/>
+          </a:solidFill>
+          <a:ln>
+            <a:noFill/>
+          </a:ln>
+          <a:effectLst/>
+        </p:spPr>
+        <p:style>
+          <a:lnRef idx="1">
+            <a:schemeClr val="accent1"/>
+          </a:lnRef>
+          <a:fillRef idx="3">
+            <a:schemeClr val="accent1"/>
+          </a:fillRef>
+          <a:effectRef idx="2">
+            <a:schemeClr val="accent1"/>
+          </a:effectRef>
+          <a:fontRef idx="minor">
+            <a:schemeClr val="lt1"/>
+          </a:fontRef>
+        </p:style>
+        <p:txBody>
+          <a:bodyPr rtlCol="0" anchor="ctr"/>
+          <a:lstStyle/>
+          <a:p>
+            <a:pPr algn="ctr"/>
+          </a:p>
+        </p:txBody>
+      </p:sp>
+      <p:sp>
+        <p:nvSpPr>
+          <p:cNvPr id="6" name="Rectangle 5"/>
+          <p:cNvSpPr/>
+          <p:nvPr/>
+        </p:nvSpPr>
+        <p:spPr>
+          <a:xfrm>
+            <a:off x="502920" y="1737360"/>
+            <a:ext cx="3566160" cy="3017520"/>
+          </a:xfrm>
+          <a:prstGeom prst="rect">
+            <a:avLst/>
+          </a:prstGeom>
+          <a:solidFill>
+            <a:srgbClr val="F2F6F8"/>
+          </a:solidFill>
+          <a:ln>
+            <a:noFill/>
+          </a:ln>
+          <a:effectLst/>
+        </p:spPr>
+        <p:style>
+          <a:lnRef idx="1">
+            <a:schemeClr val="accent1"/>
+          </a:lnRef>
+          <a:fillRef idx="3">
+            <a:schemeClr val="accent1"/>
+          </a:fillRef>
+          <a:effectRef idx="2">
+            <a:schemeClr val="accent1"/>
+          </a:effectRef>
+          <a:fontRef idx="minor">
+            <a:schemeClr val="lt1"/>
+          </a:fontRef>
+        </p:style>
+        <p:txBody>
+          <a:bodyPr rtlCol="0" anchor="ctr"/>
+          <a:lstStyle/>
+          <a:p>
+            <a:pPr algn="ctr"/>
+          </a:p>
+        </p:txBody>
+      </p:sp>
+      <p:sp>
+        <p:nvSpPr>
+          <p:cNvPr id="7" name="Rectangle 6"/>
+          <p:cNvSpPr/>
+          <p:nvPr/>
+        </p:nvSpPr>
+        <p:spPr>
+          <a:xfrm>
+            <a:off x="502920" y="1737360"/>
+            <a:ext cx="3566160" cy="38100"/>
+          </a:xfrm>
+          <a:prstGeom prst="rect">
+            <a:avLst/>
+          </a:prstGeom>
+          <a:solidFill>
+            <a:srgbClr val="00A8A8"/>
+          </a:solidFill>
+          <a:ln>
+            <a:noFill/>
+          </a:ln>
+          <a:effectLst/>
+        </p:spPr>
+        <p:style>
+          <a:lnRef idx="1">
+            <a:schemeClr val="accent1"/>
+          </a:lnRef>
+          <a:fillRef idx="3">
+            <a:schemeClr val="accent1"/>
+          </a:fillRef>
+          <a:effectRef idx="2">
+            <a:schemeClr val="accent1"/>
+          </a:effectRef>
+          <a:fontRef idx="minor">
+            <a:schemeClr val="lt1"/>
+          </a:fontRef>
+        </p:style>
+        <p:txBody>
+          <a:bodyPr rtlCol="0" anchor="ctr"/>
+          <a:lstStyle/>
+          <a:p>
+            <a:pPr algn="ctr"/>
+          </a:p>
+        </p:txBody>
+      </p:sp>
+      <p:sp>
+        <p:nvSpPr>
+          <p:cNvPr id="8" name="TextBox 7"/>
           <p:cNvSpPr txBox="1"/>
           <p:nvPr/>
         </p:nvSpPr>
         <p:spPr>
           <a:xfrm>
-            <a:off x="548640" y="6400800"/>
-            <a:ext cx="11064240" cy="365760"/>
+            <a:off x="640080" y="1828800"/>
+            <a:ext cx="3291840" cy="2834640"/>
           </a:xfrm>
           <a:prstGeom prst="rect">
             <a:avLst/>
@@ -4311,19 +5939,623 @@
           <a:noFill/>
         </p:spPr>
         <p:txBody>
-          <a:bodyPr wrap="square" anchor="t">
+          <a:bodyPr wrap="square">
             <a:spAutoFit/>
           </a:bodyPr>
           <a:lstStyle/>
           <a:p>
-            <a:r>
-              <a:rPr sz="900" b="0" i="0">
-                <a:solidFill>
-                  <a:srgbClr val="5B6670"/>
-                </a:solidFill>
-                <a:latin typeface="Calibri"/>
-              </a:rPr>
-              <a:t>Suivi d'Exploitation Multi-Squads</a:t>
+            <a:pPr>
+              <a:spcAft>
+                <a:spcPts val="400"/>
+              </a:spcAft>
+            </a:pPr>
+            <a:r>
+              <a:rPr sz="1500" b="1" i="0">
+                <a:solidFill>
+                  <a:srgbClr val="00A8A8"/>
+                </a:solidFill>
+                <a:latin typeface="Calibri"/>
+              </a:rPr>
+              <a:t>Vendredi 06:00 — ANNONCE</a:t>
+            </a:r>
+          </a:p>
+          <a:p>
+            <a:pPr>
+              <a:spcAft>
+                <a:spcPts val="300"/>
+              </a:spcAft>
+            </a:pPr>
+            <a:r>
+              <a:rPr sz="1250" b="0" i="0">
+                <a:solidFill>
+                  <a:srgbClr val="212B36"/>
+                </a:solidFill>
+                <a:latin typeface="Calibri"/>
+              </a:rPr>
+              <a:t>Désigne pour la </a:t>
+            </a:r>
+            <a:r>
+              <a:rPr sz="1250" b="1" i="0">
+                <a:solidFill>
+                  <a:srgbClr val="212B36"/>
+                </a:solidFill>
+                <a:latin typeface="Calibri"/>
+              </a:rPr>
+              <a:t>semaine suivante</a:t>
+            </a:r>
+          </a:p>
+          <a:p>
+            <a:pPr>
+              <a:spcAft>
+                <a:spcPts val="300"/>
+              </a:spcAft>
+            </a:pPr>
+            <a:r>
+              <a:rPr sz="1250" b="0" i="0">
+                <a:solidFill>
+                  <a:srgbClr val="212B36"/>
+                </a:solidFill>
+                <a:latin typeface="Calibri"/>
+              </a:rPr>
+              <a:t>Écrit l'</a:t>
+            </a:r>
+            <a:r>
+              <a:rPr sz="1250" b="1" i="0">
+                <a:solidFill>
+                  <a:srgbClr val="212B36"/>
+                </a:solidFill>
+                <a:latin typeface="Calibri"/>
+              </a:rPr>
+              <a:t>Historique</a:t>
+            </a:r>
+            <a:r>
+              <a:rPr sz="1250" b="0" i="0">
+                <a:solidFill>
+                  <a:srgbClr val="212B36"/>
+                </a:solidFill>
+                <a:latin typeface="Calibri"/>
+              </a:rPr>
+              <a:t> (1 ligne/rôle)</a:t>
+            </a:r>
+          </a:p>
+          <a:p>
+            <a:pPr>
+              <a:spcAft>
+                <a:spcPts val="300"/>
+              </a:spcAft>
+            </a:pPr>
+            <a:r>
+              <a:rPr sz="1250" b="0" i="0">
+                <a:solidFill>
+                  <a:srgbClr val="212B36"/>
+                </a:solidFill>
+                <a:latin typeface="Calibri"/>
+              </a:rPr>
+              <a:t>Mail aux </a:t>
+            </a:r>
+            <a:r>
+              <a:rPr sz="1250" b="1" i="0">
+                <a:solidFill>
+                  <a:srgbClr val="212B36"/>
+                </a:solidFill>
+                <a:latin typeface="Calibri"/>
+              </a:rPr>
+              <a:t>désignés</a:t>
+            </a:r>
+            <a:r>
+              <a:rPr sz="1250" b="0" i="0">
+                <a:solidFill>
+                  <a:srgbClr val="212B36"/>
+                </a:solidFill>
+                <a:latin typeface="Calibri"/>
+              </a:rPr>
+              <a:t> + Cc squad</a:t>
+            </a:r>
+          </a:p>
+          <a:p>
+            <a:pPr>
+              <a:spcAft>
+                <a:spcPts val="300"/>
+              </a:spcAft>
+            </a:pPr>
+            <a:r>
+              <a:rPr sz="1250" b="0" i="0">
+                <a:solidFill>
+                  <a:srgbClr val="212B36"/>
+                </a:solidFill>
+                <a:latin typeface="Calibri"/>
+              </a:rPr>
+              <a:t>Compteurs &amp; </a:t>
+            </a:r>
+            <a:r>
+              <a:rPr sz="1250" b="1" i="0">
+                <a:solidFill>
+                  <a:srgbClr val="212B36"/>
+                </a:solidFill>
+                <a:latin typeface="Calibri"/>
+              </a:rPr>
+              <a:t>prévision 3 semaines</a:t>
+            </a:r>
+            <a:r>
+              <a:rPr sz="1250" b="0" i="0">
+                <a:solidFill>
+                  <a:srgbClr val="212B36"/>
+                </a:solidFill>
+                <a:latin typeface="Calibri"/>
+              </a:rPr>
+              <a:t> dans le mail</a:t>
+            </a:r>
+          </a:p>
+          <a:p>
+            <a:pPr>
+              <a:spcAft>
+                <a:spcPts val="300"/>
+              </a:spcAft>
+            </a:pPr>
+            <a:r>
+              <a:rPr sz="1250" b="0" i="0">
+                <a:solidFill>
+                  <a:srgbClr val="212B36"/>
+                </a:solidFill>
+                <a:latin typeface="Calibri"/>
+              </a:rPr>
+              <a:t>Désignation </a:t>
+            </a:r>
+            <a:r>
+              <a:rPr sz="1250" b="1" i="0">
+                <a:solidFill>
+                  <a:srgbClr val="212B36"/>
+                </a:solidFill>
+                <a:latin typeface="Calibri"/>
+              </a:rPr>
+              <a:t>prévisionnelle</a:t>
+            </a:r>
+            <a:r>
+              <a:rPr sz="1250" b="0" i="0">
+                <a:solidFill>
+                  <a:srgbClr val="212B36"/>
+                </a:solidFill>
+                <a:latin typeface="Calibri"/>
+              </a:rPr>
+              <a:t> : le compteur n'est pas touché</a:t>
+            </a:r>
+          </a:p>
+        </p:txBody>
+      </p:sp>
+      <p:sp>
+        <p:nvSpPr>
+          <p:cNvPr id="9" name="Rectangle 8"/>
+          <p:cNvSpPr/>
+          <p:nvPr/>
+        </p:nvSpPr>
+        <p:spPr>
+          <a:xfrm>
+            <a:off x="4343400" y="1737360"/>
+            <a:ext cx="3566160" cy="3017520"/>
+          </a:xfrm>
+          <a:prstGeom prst="rect">
+            <a:avLst/>
+          </a:prstGeom>
+          <a:solidFill>
+            <a:srgbClr val="F2F6F8"/>
+          </a:solidFill>
+          <a:ln>
+            <a:noFill/>
+          </a:ln>
+          <a:effectLst/>
+        </p:spPr>
+        <p:style>
+          <a:lnRef idx="1">
+            <a:schemeClr val="accent1"/>
+          </a:lnRef>
+          <a:fillRef idx="3">
+            <a:schemeClr val="accent1"/>
+          </a:fillRef>
+          <a:effectRef idx="2">
+            <a:schemeClr val="accent1"/>
+          </a:effectRef>
+          <a:fontRef idx="minor">
+            <a:schemeClr val="lt1"/>
+          </a:fontRef>
+        </p:style>
+        <p:txBody>
+          <a:bodyPr rtlCol="0" anchor="ctr"/>
+          <a:lstStyle/>
+          <a:p>
+            <a:pPr algn="ctr"/>
+          </a:p>
+        </p:txBody>
+      </p:sp>
+      <p:sp>
+        <p:nvSpPr>
+          <p:cNvPr id="10" name="Rectangle 9"/>
+          <p:cNvSpPr/>
+          <p:nvPr/>
+        </p:nvSpPr>
+        <p:spPr>
+          <a:xfrm>
+            <a:off x="4343400" y="1737360"/>
+            <a:ext cx="3566160" cy="38100"/>
+          </a:xfrm>
+          <a:prstGeom prst="rect">
+            <a:avLst/>
+          </a:prstGeom>
+          <a:solidFill>
+            <a:srgbClr val="5A6672"/>
+          </a:solidFill>
+          <a:ln>
+            <a:noFill/>
+          </a:ln>
+          <a:effectLst/>
+        </p:spPr>
+        <p:style>
+          <a:lnRef idx="1">
+            <a:schemeClr val="accent1"/>
+          </a:lnRef>
+          <a:fillRef idx="3">
+            <a:schemeClr val="accent1"/>
+          </a:fillRef>
+          <a:effectRef idx="2">
+            <a:schemeClr val="accent1"/>
+          </a:effectRef>
+          <a:fontRef idx="minor">
+            <a:schemeClr val="lt1"/>
+          </a:fontRef>
+        </p:style>
+        <p:txBody>
+          <a:bodyPr rtlCol="0" anchor="ctr"/>
+          <a:lstStyle/>
+          <a:p>
+            <a:pPr algn="ctr"/>
+          </a:p>
+        </p:txBody>
+      </p:sp>
+      <p:sp>
+        <p:nvSpPr>
+          <p:cNvPr id="11" name="TextBox 10"/>
+          <p:cNvSpPr txBox="1"/>
+          <p:nvPr/>
+        </p:nvSpPr>
+        <p:spPr>
+          <a:xfrm>
+            <a:off x="4480560" y="1828800"/>
+            <a:ext cx="3291840" cy="2834640"/>
+          </a:xfrm>
+          <a:prstGeom prst="rect">
+            <a:avLst/>
+          </a:prstGeom>
+          <a:noFill/>
+        </p:spPr>
+        <p:txBody>
+          <a:bodyPr wrap="square">
+            <a:spAutoFit/>
+          </a:bodyPr>
+          <a:lstStyle/>
+          <a:p>
+            <a:pPr>
+              <a:spcAft>
+                <a:spcPts val="400"/>
+              </a:spcAft>
+            </a:pPr>
+            <a:r>
+              <a:rPr sz="1500" b="1" i="0">
+                <a:solidFill>
+                  <a:srgbClr val="5A6672"/>
+                </a:solidFill>
+                <a:latin typeface="Calibri"/>
+              </a:rPr>
+              <a:t>Week-end</a:t>
+            </a:r>
+          </a:p>
+          <a:p>
+            <a:pPr>
+              <a:spcAft>
+                <a:spcPts val="300"/>
+              </a:spcAft>
+            </a:pPr>
+            <a:r>
+              <a:rPr sz="1250" b="0" i="0">
+                <a:solidFill>
+                  <a:srgbClr val="212B36"/>
+                </a:solidFill>
+                <a:latin typeface="Calibri"/>
+              </a:rPr>
+              <a:t>Congés ajoutés, changements d'équipe possibles</a:t>
+            </a:r>
+          </a:p>
+          <a:p>
+            <a:pPr>
+              <a:spcAft>
+                <a:spcPts val="300"/>
+              </a:spcAft>
+            </a:pPr>
+            <a:r>
+              <a:rPr sz="1250" b="0" i="0">
+                <a:solidFill>
+                  <a:srgbClr val="212B36"/>
+                </a:solidFill>
+                <a:latin typeface="Calibri"/>
+              </a:rPr>
+              <a:t>Le classeur reste </a:t>
+            </a:r>
+            <a:r>
+              <a:rPr sz="1250" b="1" i="0">
+                <a:solidFill>
+                  <a:srgbClr val="212B36"/>
+                </a:solidFill>
+                <a:latin typeface="Calibri"/>
+              </a:rPr>
+              <a:t>éditable</a:t>
+            </a:r>
+            <a:r>
+              <a:rPr sz="1250" b="0" i="0">
+                <a:solidFill>
+                  <a:srgbClr val="212B36"/>
+                </a:solidFill>
+                <a:latin typeface="Calibri"/>
+              </a:rPr>
+              <a:t> par la squad (feuilles Membres / Congés)</a:t>
+            </a:r>
+          </a:p>
+        </p:txBody>
+      </p:sp>
+      <p:sp>
+        <p:nvSpPr>
+          <p:cNvPr id="12" name="Rectangle 11"/>
+          <p:cNvSpPr/>
+          <p:nvPr/>
+        </p:nvSpPr>
+        <p:spPr>
+          <a:xfrm>
+            <a:off x="8183879" y="1737360"/>
+            <a:ext cx="3566160" cy="3017520"/>
+          </a:xfrm>
+          <a:prstGeom prst="rect">
+            <a:avLst/>
+          </a:prstGeom>
+          <a:solidFill>
+            <a:srgbClr val="F2F6F8"/>
+          </a:solidFill>
+          <a:ln>
+            <a:noFill/>
+          </a:ln>
+          <a:effectLst/>
+        </p:spPr>
+        <p:style>
+          <a:lnRef idx="1">
+            <a:schemeClr val="accent1"/>
+          </a:lnRef>
+          <a:fillRef idx="3">
+            <a:schemeClr val="accent1"/>
+          </a:fillRef>
+          <a:effectRef idx="2">
+            <a:schemeClr val="accent1"/>
+          </a:effectRef>
+          <a:fontRef idx="minor">
+            <a:schemeClr val="lt1"/>
+          </a:fontRef>
+        </p:style>
+        <p:txBody>
+          <a:bodyPr rtlCol="0" anchor="ctr"/>
+          <a:lstStyle/>
+          <a:p>
+            <a:pPr algn="ctr"/>
+          </a:p>
+        </p:txBody>
+      </p:sp>
+      <p:sp>
+        <p:nvSpPr>
+          <p:cNvPr id="13" name="Rectangle 12"/>
+          <p:cNvSpPr/>
+          <p:nvPr/>
+        </p:nvSpPr>
+        <p:spPr>
+          <a:xfrm>
+            <a:off x="8183879" y="1737360"/>
+            <a:ext cx="3566160" cy="38100"/>
+          </a:xfrm>
+          <a:prstGeom prst="rect">
+            <a:avLst/>
+          </a:prstGeom>
+          <a:solidFill>
+            <a:srgbClr val="2E75B6"/>
+          </a:solidFill>
+          <a:ln>
+            <a:noFill/>
+          </a:ln>
+          <a:effectLst/>
+        </p:spPr>
+        <p:style>
+          <a:lnRef idx="1">
+            <a:schemeClr val="accent1"/>
+          </a:lnRef>
+          <a:fillRef idx="3">
+            <a:schemeClr val="accent1"/>
+          </a:fillRef>
+          <a:effectRef idx="2">
+            <a:schemeClr val="accent1"/>
+          </a:effectRef>
+          <a:fontRef idx="minor">
+            <a:schemeClr val="lt1"/>
+          </a:fontRef>
+        </p:style>
+        <p:txBody>
+          <a:bodyPr rtlCol="0" anchor="ctr"/>
+          <a:lstStyle/>
+          <a:p>
+            <a:pPr algn="ctr"/>
+          </a:p>
+        </p:txBody>
+      </p:sp>
+      <p:sp>
+        <p:nvSpPr>
+          <p:cNvPr id="14" name="TextBox 13"/>
+          <p:cNvSpPr txBox="1"/>
+          <p:nvPr/>
+        </p:nvSpPr>
+        <p:spPr>
+          <a:xfrm>
+            <a:off x="8321039" y="1828800"/>
+            <a:ext cx="3291840" cy="2834640"/>
+          </a:xfrm>
+          <a:prstGeom prst="rect">
+            <a:avLst/>
+          </a:prstGeom>
+          <a:noFill/>
+        </p:spPr>
+        <p:txBody>
+          <a:bodyPr wrap="square">
+            <a:spAutoFit/>
+          </a:bodyPr>
+          <a:lstStyle/>
+          <a:p>
+            <a:pPr>
+              <a:spcAft>
+                <a:spcPts val="400"/>
+              </a:spcAft>
+            </a:pPr>
+            <a:r>
+              <a:rPr sz="1500" b="1" i="0">
+                <a:solidFill>
+                  <a:srgbClr val="2E75B6"/>
+                </a:solidFill>
+                <a:latin typeface="Calibri"/>
+              </a:rPr>
+              <a:t>Lundi 06:00 — RAPPEL</a:t>
+            </a:r>
+          </a:p>
+          <a:p>
+            <a:pPr>
+              <a:spcAft>
+                <a:spcPts val="300"/>
+              </a:spcAft>
+            </a:pPr>
+            <a:r>
+              <a:rPr sz="1250" b="1" i="0">
+                <a:solidFill>
+                  <a:srgbClr val="212B36"/>
+                </a:solidFill>
+                <a:latin typeface="Calibri"/>
+              </a:rPr>
+              <a:t>Recalcule</a:t>
+            </a:r>
+            <a:r>
+              <a:rPr sz="1250" b="0" i="0">
+                <a:solidFill>
+                  <a:srgbClr val="212B36"/>
+                </a:solidFill>
+                <a:latin typeface="Calibri"/>
+              </a:rPr>
+              <a:t> la semaine en cours : reprend les congés du week-end</a:t>
+            </a:r>
+          </a:p>
+          <a:p>
+            <a:pPr>
+              <a:spcAft>
+                <a:spcPts val="300"/>
+              </a:spcAft>
+            </a:pPr>
+            <a:r>
+              <a:rPr sz="1250" b="0" i="0">
+                <a:solidFill>
+                  <a:srgbClr val="212B36"/>
+                </a:solidFill>
+                <a:latin typeface="Calibri"/>
+              </a:rPr>
+              <a:t>Si la personne annoncée est indisponible → </a:t>
+            </a:r>
+            <a:r>
+              <a:rPr sz="1250" b="1" i="0">
+                <a:solidFill>
+                  <a:srgbClr val="212B36"/>
+                </a:solidFill>
+                <a:latin typeface="Calibri"/>
+              </a:rPr>
+              <a:t>une autre est désignée</a:t>
+            </a:r>
+          </a:p>
+          <a:p>
+            <a:pPr>
+              <a:spcAft>
+                <a:spcPts val="300"/>
+              </a:spcAft>
+            </a:pPr>
+            <a:r>
+              <a:rPr sz="1250" b="0" i="0">
+                <a:solidFill>
+                  <a:srgbClr val="212B36"/>
+                </a:solidFill>
+                <a:latin typeface="Calibri"/>
+              </a:rPr>
+              <a:t>Mail de rappel aux désignés</a:t>
+            </a:r>
+          </a:p>
+          <a:p>
+            <a:pPr>
+              <a:spcAft>
+                <a:spcPts val="300"/>
+              </a:spcAft>
+            </a:pPr>
+            <a:r>
+              <a:rPr sz="1250" b="1" i="0">
+                <a:solidFill>
+                  <a:srgbClr val="212B36"/>
+                </a:solidFill>
+                <a:latin typeface="Calibri"/>
+              </a:rPr>
+              <a:t>Confirme</a:t>
+            </a:r>
+            <a:r>
+              <a:rPr sz="1250" b="0" i="0">
+                <a:solidFill>
+                  <a:srgbClr val="212B36"/>
+                </a:solidFill>
+                <a:latin typeface="Calibri"/>
+              </a:rPr>
+              <a:t> : Compteur +1 (cumul vivant, écrit dans Membres)</a:t>
+            </a:r>
+          </a:p>
+        </p:txBody>
+      </p:sp>
+      <p:sp>
+        <p:nvSpPr>
+          <p:cNvPr id="15" name="TextBox 14"/>
+          <p:cNvSpPr txBox="1"/>
+          <p:nvPr/>
+        </p:nvSpPr>
+        <p:spPr>
+          <a:xfrm>
+            <a:off x="502920" y="5029200"/>
+            <a:ext cx="11155680" cy="1280160"/>
+          </a:xfrm>
+          <a:prstGeom prst="rect">
+            <a:avLst/>
+          </a:prstGeom>
+          <a:noFill/>
+        </p:spPr>
+        <p:txBody>
+          <a:bodyPr wrap="square">
+            <a:spAutoFit/>
+          </a:bodyPr>
+          <a:lstStyle/>
+          <a:p>
+            <a:r>
+              <a:rPr sz="1500" b="1" i="0">
+                <a:solidFill>
+                  <a:srgbClr val="212B36"/>
+                </a:solidFill>
+                <a:latin typeface="Calibri"/>
+              </a:rPr>
+              <a:t>Recalcul idempotent : </a:t>
+            </a:r>
+            <a:r>
+              <a:rPr sz="1500" b="0" i="0">
+                <a:solidFill>
+                  <a:srgbClr val="5A6672"/>
+                </a:solidFill>
+                <a:latin typeface="Calibri"/>
+              </a:rPr>
+              <a:t>relancer une action redonne le même résultat tant que les données ne changent pas (les lignes de la semaine cible sont supprimées puis recalculées ; l'incrément d'un rappel précédent est annulé avant ré-incrément → pas de double comptage). Attention : chaque exécution renvoie un mail (pas de garde anti-doublon d'envoi).</a:t>
             </a:r>
           </a:p>
         </p:txBody>
@@ -4355,51 +6587,7 @@
         <p:spPr>
           <a:xfrm>
             <a:off x="0" y="0"/>
-            <a:ext cx="12191695" cy="1051560"/>
-          </a:xfrm>
-          <a:prstGeom prst="rect">
-            <a:avLst/>
-          </a:prstGeom>
-          <a:solidFill>
-            <a:srgbClr val="005BAA"/>
-          </a:solidFill>
-          <a:ln>
-            <a:noFill/>
-          </a:ln>
-          <a:effectLst/>
-        </p:spPr>
-        <p:style>
-          <a:lnRef idx="1">
-            <a:schemeClr val="accent1"/>
-          </a:lnRef>
-          <a:fillRef idx="3">
-            <a:schemeClr val="accent1"/>
-          </a:fillRef>
-          <a:effectRef idx="2">
-            <a:schemeClr val="accent1"/>
-          </a:effectRef>
-          <a:fontRef idx="minor">
-            <a:schemeClr val="lt1"/>
-          </a:fontRef>
-        </p:style>
-        <p:txBody>
-          <a:bodyPr rtlCol="0" anchor="ctr"/>
-          <a:lstStyle/>
-          <a:p>
-            <a:pPr algn="ctr"/>
-          </a:p>
-        </p:txBody>
-      </p:sp>
-      <p:sp>
-        <p:nvSpPr>
-          <p:cNvPr id="3" name="Rectangle 2"/>
-          <p:cNvSpPr/>
-          <p:nvPr/>
-        </p:nvSpPr>
-        <p:spPr>
-          <a:xfrm>
-            <a:off x="0" y="1051560"/>
-            <a:ext cx="12191695" cy="38100"/>
+            <a:ext cx="201168" cy="6858000"/>
           </a:xfrm>
           <a:prstGeom prst="rect">
             <a:avLst/>
@@ -4436,14 +6624,14 @@
       </p:sp>
       <p:sp>
         <p:nvSpPr>
-          <p:cNvPr id="4" name="TextBox 3"/>
+          <p:cNvPr id="3" name="TextBox 2"/>
           <p:cNvSpPr txBox="1"/>
           <p:nvPr/>
         </p:nvSpPr>
         <p:spPr>
           <a:xfrm>
-            <a:off x="548640" y="109728"/>
-            <a:ext cx="11064240" cy="914400"/>
+            <a:off x="502920" y="256032"/>
+            <a:ext cx="11247120" cy="822960"/>
           </a:xfrm>
           <a:prstGeom prst="rect">
             <a:avLst/>
@@ -4451,44 +6639,33 @@
           <a:noFill/>
         </p:spPr>
         <p:txBody>
-          <a:bodyPr wrap="square" anchor="t">
+          <a:bodyPr wrap="square">
             <a:spAutoFit/>
           </a:bodyPr>
           <a:lstStyle/>
           <a:p>
             <a:r>
-              <a:rPr sz="1200" b="1" i="0">
-                <a:solidFill>
-                  <a:srgbClr val="CFE2F3"/>
-                </a:solidFill>
-                <a:latin typeface="Calibri"/>
-              </a:rPr>
-              <a:t>INTERFACE EN LIGNE DE COMMANDE</a:t>
-            </a:r>
-          </a:p>
-          <a:p>
-            <a:r>
-              <a:rPr sz="2800" b="1" i="0">
-                <a:solidFill>
-                  <a:srgbClr val="FFFFFF"/>
-                </a:solidFill>
-                <a:latin typeface="Calibri"/>
-              </a:rPr>
-              <a:t>Les 4 actions</a:t>
-            </a:r>
-          </a:p>
-        </p:txBody>
-      </p:sp>
-      <p:sp>
-        <p:nvSpPr>
-          <p:cNvPr id="5" name="TextBox 4"/>
+              <a:rPr sz="3000" b="1" i="0">
+                <a:solidFill>
+                  <a:srgbClr val="212B36"/>
+                </a:solidFill>
+                <a:latin typeface="Calibri"/>
+              </a:rPr>
+              <a:t>Architecture</a:t>
+            </a:r>
+          </a:p>
+        </p:txBody>
+      </p:sp>
+      <p:sp>
+        <p:nvSpPr>
+          <p:cNvPr id="4" name="TextBox 3"/>
           <p:cNvSpPr txBox="1"/>
           <p:nvPr/>
         </p:nvSpPr>
         <p:spPr>
           <a:xfrm>
-            <a:off x="640080" y="1325880"/>
-            <a:ext cx="10881360" cy="5029200"/>
+            <a:off x="502920" y="868680"/>
+            <a:ext cx="11247120" cy="457200"/>
           </a:xfrm>
           <a:prstGeom prst="rect">
             <a:avLst/>
@@ -4496,89 +6673,64 @@
           <a:noFill/>
         </p:spPr>
         <p:txBody>
-          <a:bodyPr wrap="square" anchor="t">
+          <a:bodyPr wrap="square">
             <a:spAutoFit/>
           </a:bodyPr>
           <a:lstStyle/>
           <a:p>
-            <a:pPr>
-              <a:spcAft>
-                <a:spcPts val="600"/>
-              </a:spcAft>
-            </a:pPr>
-            <a:r>
-              <a:rPr sz="1800" b="1" i="0">
-                <a:solidFill>
-                  <a:srgbClr val="1F2A37"/>
-                </a:solidFill>
-                <a:latin typeface="Calibri"/>
-              </a:rPr>
-              <a:t>▪  Annonce — désigne la semaine suivante, écrit l'historique, envoie l'annonce.</a:t>
-            </a:r>
-          </a:p>
-          <a:p>
-            <a:pPr>
-              <a:spcAft>
-                <a:spcPts val="600"/>
-              </a:spcAft>
-            </a:pPr>
-            <a:r>
-              <a:rPr sz="1800" b="1" i="0">
-                <a:solidFill>
-                  <a:srgbClr val="1F2A37"/>
-                </a:solidFill>
-                <a:latin typeface="Calibri"/>
-              </a:rPr>
-              <a:t>▪  Rappel — recalcule la semaine en cours (reprend les congés ajoutés) puis envoie le rappel.</a:t>
-            </a:r>
-          </a:p>
-          <a:p>
-            <a:pPr>
-              <a:spcAft>
-                <a:spcPts val="600"/>
-              </a:spcAft>
-            </a:pPr>
-            <a:r>
-              <a:rPr sz="1800" b="1" i="0">
-                <a:solidFill>
-                  <a:srgbClr val="1F2A37"/>
-                </a:solidFill>
-                <a:latin typeface="Calibri"/>
-              </a:rPr>
-              <a:t>▪  Test — valide configuration + classeurs sans rien envoyer (code 0/1).</a:t>
-            </a:r>
-          </a:p>
-          <a:p>
-            <a:pPr>
-              <a:spcAft>
-                <a:spcPts val="600"/>
-              </a:spcAft>
-            </a:pPr>
-            <a:r>
-              <a:rPr sz="1800" b="1" i="0">
-                <a:solidFill>
-                  <a:srgbClr val="1F2A37"/>
-                </a:solidFill>
-                <a:latin typeface="Calibri"/>
-              </a:rPr>
-              <a:t>▪  NouvelleSquad — crée le dossier + classeur d'une squad et l'ajoute à la config.</a:t>
-            </a:r>
-          </a:p>
-          <a:p>
-            <a:pPr lvl="1">
-              <a:spcAft>
-                <a:spcPts val="600"/>
-              </a:spcAft>
-            </a:pPr>
-            <a:r>
-              <a:rPr sz="1500" b="0" i="0">
-                <a:solidFill>
-                  <a:srgbClr val="5B6670"/>
-                </a:solidFill>
-                <a:latin typeface="Calibri"/>
-              </a:rPr>
-              <a:t>–  Paramètres : -DossierRacine, -Config, -Squad.</a:t>
-            </a:r>
+            <a:r>
+              <a:rPr sz="1500" b="0" i="1">
+                <a:solidFill>
+                  <a:srgbClr val="5A6672"/>
+                </a:solidFill>
+                <a:latin typeface="Calibri"/>
+              </a:rPr>
+              <a:t>Un script global — une config complète par squad — un classeur par squad</a:t>
+            </a:r>
+          </a:p>
+        </p:txBody>
+      </p:sp>
+      <p:sp>
+        <p:nvSpPr>
+          <p:cNvPr id="5" name="Rectangle 4"/>
+          <p:cNvSpPr/>
+          <p:nvPr/>
+        </p:nvSpPr>
+        <p:spPr>
+          <a:xfrm>
+            <a:off x="502920" y="1234440"/>
+            <a:ext cx="11155680" cy="27940"/>
+          </a:xfrm>
+          <a:prstGeom prst="rect">
+            <a:avLst/>
+          </a:prstGeom>
+          <a:solidFill>
+            <a:srgbClr val="00A8A8"/>
+          </a:solidFill>
+          <a:ln>
+            <a:noFill/>
+          </a:ln>
+          <a:effectLst/>
+        </p:spPr>
+        <p:style>
+          <a:lnRef idx="1">
+            <a:schemeClr val="accent1"/>
+          </a:lnRef>
+          <a:fillRef idx="3">
+            <a:schemeClr val="accent1"/>
+          </a:fillRef>
+          <a:effectRef idx="2">
+            <a:schemeClr val="accent1"/>
+          </a:effectRef>
+          <a:fontRef idx="minor">
+            <a:schemeClr val="lt1"/>
+          </a:fontRef>
+        </p:style>
+        <p:txBody>
+          <a:bodyPr rtlCol="0" anchor="ctr"/>
+          <a:lstStyle/>
+          <a:p>
+            <a:pPr algn="ctr"/>
           </a:p>
         </p:txBody>
       </p:sp>
@@ -4590,8 +6742,8 @@
         </p:nvSpPr>
         <p:spPr>
           <a:xfrm>
-            <a:off x="548640" y="6400800"/>
-            <a:ext cx="11064240" cy="365760"/>
+            <a:off x="502920" y="1508760"/>
+            <a:ext cx="6035040" cy="4846320"/>
           </a:xfrm>
           <a:prstGeom prst="rect">
             <a:avLst/>
@@ -4599,19 +6751,324 @@
           <a:noFill/>
         </p:spPr>
         <p:txBody>
-          <a:bodyPr wrap="square" anchor="t">
+          <a:bodyPr wrap="square">
             <a:spAutoFit/>
           </a:bodyPr>
           <a:lstStyle/>
           <a:p>
-            <a:r>
-              <a:rPr sz="900" b="0" i="0">
-                <a:solidFill>
-                  <a:srgbClr val="5B6670"/>
-                </a:solidFill>
-                <a:latin typeface="Calibri"/>
-              </a:rPr>
-              <a:t>Suivi d'Exploitation Multi-Squads</a:t>
+            <a:pPr>
+              <a:spcAft>
+                <a:spcPts val="300"/>
+              </a:spcAft>
+            </a:pPr>
+            <a:r>
+              <a:rPr sz="1300" b="1">
+                <a:solidFill>
+                  <a:srgbClr val="00A8A8"/>
+                </a:solidFill>
+                <a:latin typeface="Consolas"/>
+              </a:rPr>
+              <a:t>\\srv-fichiers\suivi-exploitation\</a:t>
+            </a:r>
+          </a:p>
+          <a:p>
+            <a:pPr>
+              <a:spcAft>
+                <a:spcPts val="300"/>
+              </a:spcAft>
+            </a:pPr>
+            <a:r>
+              <a:rPr sz="1300" b="0">
+                <a:solidFill>
+                  <a:srgbClr val="212B36"/>
+                </a:solidFill>
+                <a:latin typeface="Consolas"/>
+              </a:rPr>
+              <a:t>├─ SuiviExploitation.ps1              (script unique)</a:t>
+            </a:r>
+          </a:p>
+          <a:p>
+            <a:pPr>
+              <a:spcAft>
+                <a:spcPts val="300"/>
+              </a:spcAft>
+            </a:pPr>
+            <a:r>
+              <a:rPr sz="1300" b="0">
+                <a:solidFill>
+                  <a:srgbClr val="212B36"/>
+                </a:solidFill>
+                <a:latin typeface="Consolas"/>
+              </a:rPr>
+              <a:t>├─ SendMailNotificationHTML.ps1  (moteur mail, non modifié)</a:t>
+            </a:r>
+          </a:p>
+          <a:p>
+            <a:pPr>
+              <a:spcAft>
+                <a:spcPts val="300"/>
+              </a:spcAft>
+            </a:pPr>
+            <a:r>
+              <a:rPr sz="1300" b="0">
+                <a:solidFill>
+                  <a:srgbClr val="212B36"/>
+                </a:solidFill>
+                <a:latin typeface="Consolas"/>
+              </a:rPr>
+              <a:t>├─ template-notification.html        (charte HTML)</a:t>
+            </a:r>
+          </a:p>
+          <a:p>
+            <a:pPr>
+              <a:spcAft>
+                <a:spcPts val="300"/>
+              </a:spcAft>
+            </a:pPr>
+            <a:r>
+              <a:rPr sz="1300" b="0">
+                <a:solidFill>
+                  <a:srgbClr val="212B36"/>
+                </a:solidFill>
+                <a:latin typeface="Consolas"/>
+              </a:rPr>
+              <a:t>├─ suivi_exploitation_template.xlsx</a:t>
+            </a:r>
+          </a:p>
+          <a:p>
+            <a:pPr>
+              <a:spcAft>
+                <a:spcPts val="300"/>
+              </a:spcAft>
+            </a:pPr>
+            <a:r>
+              <a:rPr sz="1300" b="0">
+                <a:solidFill>
+                  <a:srgbClr val="212B36"/>
+                </a:solidFill>
+                <a:latin typeface="Consolas"/>
+              </a:rPr>
+              <a:t>├─ _logs\                                     (orchestrateur + journaux)</a:t>
+            </a:r>
+          </a:p>
+          <a:p>
+            <a:pPr>
+              <a:spcAft>
+                <a:spcPts val="300"/>
+              </a:spcAft>
+            </a:pPr>
+            <a:r>
+              <a:rPr sz="1300" b="1">
+                <a:solidFill>
+                  <a:srgbClr val="00A8A8"/>
+                </a:solidFill>
+                <a:latin typeface="Consolas"/>
+              </a:rPr>
+              <a:t>├─ paiement\                              ← une squad</a:t>
+            </a:r>
+          </a:p>
+          <a:p>
+            <a:pPr>
+              <a:spcAft>
+                <a:spcPts val="300"/>
+              </a:spcAft>
+            </a:pPr>
+            <a:r>
+              <a:rPr sz="1300" b="0">
+                <a:solidFill>
+                  <a:srgbClr val="212B36"/>
+                </a:solidFill>
+                <a:latin typeface="Consolas"/>
+              </a:rPr>
+              <a:t>│   ├─ conf-suivi-squad.json         (config COMPLÈTE)</a:t>
+            </a:r>
+          </a:p>
+          <a:p>
+            <a:pPr>
+              <a:spcAft>
+                <a:spcPts val="300"/>
+              </a:spcAft>
+            </a:pPr>
+            <a:r>
+              <a:rPr sz="1300" b="0">
+                <a:solidFill>
+                  <a:srgbClr val="212B36"/>
+                </a:solidFill>
+                <a:latin typeface="Consolas"/>
+              </a:rPr>
+              <a:t>│   ├─ suivi_exploitation.xlsx        (données métier)</a:t>
+            </a:r>
+          </a:p>
+          <a:p>
+            <a:pPr>
+              <a:spcAft>
+                <a:spcPts val="300"/>
+              </a:spcAft>
+            </a:pPr>
+            <a:r>
+              <a:rPr sz="1300" b="0">
+                <a:solidFill>
+                  <a:srgbClr val="212B36"/>
+                </a:solidFill>
+                <a:latin typeface="Consolas"/>
+              </a:rPr>
+              <a:t>│   └─ historique\                        (copies datées, 28 j)</a:t>
+            </a:r>
+          </a:p>
+          <a:p>
+            <a:pPr>
+              <a:spcAft>
+                <a:spcPts val="300"/>
+              </a:spcAft>
+            </a:pPr>
+            <a:r>
+              <a:rPr sz="1300" b="1">
+                <a:solidFill>
+                  <a:srgbClr val="00A8A8"/>
+                </a:solidFill>
+                <a:latin typeface="Consolas"/>
+              </a:rPr>
+              <a:t>└─ catalogue\                             ← une autre squad</a:t>
+            </a:r>
+          </a:p>
+        </p:txBody>
+      </p:sp>
+      <p:sp>
+        <p:nvSpPr>
+          <p:cNvPr id="7" name="TextBox 6"/>
+          <p:cNvSpPr txBox="1"/>
+          <p:nvPr/>
+        </p:nvSpPr>
+        <p:spPr>
+          <a:xfrm>
+            <a:off x="6766560" y="1600200"/>
+            <a:ext cx="4937760" cy="4937760"/>
+          </a:xfrm>
+          <a:prstGeom prst="rect">
+            <a:avLst/>
+          </a:prstGeom>
+          <a:noFill/>
+        </p:spPr>
+        <p:txBody>
+          <a:bodyPr wrap="square">
+            <a:spAutoFit/>
+          </a:bodyPr>
+          <a:lstStyle/>
+          <a:p>
+            <a:pPr>
+              <a:spcAft>
+                <a:spcPts val="800"/>
+              </a:spcAft>
+              <a:buFont typeface="Arial"/>
+              <a:buChar char="▪"/>
+            </a:pPr>
+            <a:r>
+              <a:rPr sz="1500" b="1" i="0">
+                <a:solidFill>
+                  <a:srgbClr val="212B36"/>
+                </a:solidFill>
+                <a:latin typeface="Calibri"/>
+              </a:rPr>
+              <a:t>Pas de config globale</a:t>
+            </a:r>
+            <a:r>
+              <a:rPr sz="1500" b="0" i="0">
+                <a:solidFill>
+                  <a:srgbClr val="212B36"/>
+                </a:solidFill>
+                <a:latin typeface="Calibri"/>
+              </a:rPr>
+              <a:t> : les squads sont </a:t>
+            </a:r>
+            <a:r>
+              <a:rPr sz="1500" b="1" i="0">
+                <a:solidFill>
+                  <a:srgbClr val="212B36"/>
+                </a:solidFill>
+                <a:latin typeface="Calibri"/>
+              </a:rPr>
+              <a:t>découvertes</a:t>
+            </a:r>
+            <a:r>
+              <a:rPr sz="1500" b="0" i="0">
+                <a:solidFill>
+                  <a:srgbClr val="212B36"/>
+                </a:solidFill>
+                <a:latin typeface="Calibri"/>
+              </a:rPr>
+              <a:t> en scannant les sous-dossiers (un dossier avec conf-suivi-squad.json = une squad ; dossiers « _… » ignorés)</a:t>
+            </a:r>
+          </a:p>
+          <a:p>
+            <a:pPr>
+              <a:spcAft>
+                <a:spcPts val="800"/>
+              </a:spcAft>
+              <a:buFont typeface="Arial"/>
+              <a:buChar char="▪"/>
+            </a:pPr>
+            <a:r>
+              <a:rPr sz="1500" b="1" i="0">
+                <a:solidFill>
+                  <a:srgbClr val="212B36"/>
+                </a:solidFill>
+                <a:latin typeface="Calibri"/>
+              </a:rPr>
+              <a:t>Autonomie</a:t>
+            </a:r>
+            <a:r>
+              <a:rPr sz="1500" b="0" i="0">
+                <a:solidFill>
+                  <a:srgbClr val="212B36"/>
+                </a:solidFill>
+                <a:latin typeface="Calibri"/>
+              </a:rPr>
+              <a:t> : chaque squad porte son SMTP, son expéditeur, ses destinataires, son sujet, ses messages</a:t>
+            </a:r>
+          </a:p>
+          <a:p>
+            <a:pPr>
+              <a:spcAft>
+                <a:spcPts val="800"/>
+              </a:spcAft>
+              <a:buFont typeface="Arial"/>
+              <a:buChar char="▪"/>
+            </a:pPr>
+            <a:r>
+              <a:rPr sz="1500" b="1" i="0">
+                <a:solidFill>
+                  <a:srgbClr val="212B36"/>
+                </a:solidFill>
+                <a:latin typeface="Calibri"/>
+              </a:rPr>
+              <a:t>Moteur mail commun jamais modifié</a:t>
+            </a:r>
+            <a:r>
+              <a:rPr sz="1500" b="0" i="0">
+                <a:solidFill>
+                  <a:srgbClr val="212B36"/>
+                </a:solidFill>
+                <a:latin typeface="Calibri"/>
+              </a:rPr>
+              <a:t> : il reçoit la config de la squad sérialisée dans un fichier temporaire</a:t>
+            </a:r>
+          </a:p>
+          <a:p>
+            <a:pPr>
+              <a:spcAft>
+                <a:spcPts val="800"/>
+              </a:spcAft>
+              <a:buFont typeface="Arial"/>
+              <a:buChar char="▪"/>
+            </a:pPr>
+            <a:r>
+              <a:rPr sz="1500" b="0" i="0">
+                <a:solidFill>
+                  <a:srgbClr val="212B36"/>
+                </a:solidFill>
+                <a:latin typeface="Calibri"/>
+              </a:rPr>
+              <a:t>Ajouter une squad = créer un dossier · retirer une squad = supprimer le dossier</a:t>
             </a:r>
           </a:p>
         </p:txBody>
@@ -4643,51 +7100,7 @@
         <p:spPr>
           <a:xfrm>
             <a:off x="0" y="0"/>
-            <a:ext cx="12191695" cy="1051560"/>
-          </a:xfrm>
-          <a:prstGeom prst="rect">
-            <a:avLst/>
-          </a:prstGeom>
-          <a:solidFill>
-            <a:srgbClr val="005BAA"/>
-          </a:solidFill>
-          <a:ln>
-            <a:noFill/>
-          </a:ln>
-          <a:effectLst/>
-        </p:spPr>
-        <p:style>
-          <a:lnRef idx="1">
-            <a:schemeClr val="accent1"/>
-          </a:lnRef>
-          <a:fillRef idx="3">
-            <a:schemeClr val="accent1"/>
-          </a:fillRef>
-          <a:effectRef idx="2">
-            <a:schemeClr val="accent1"/>
-          </a:effectRef>
-          <a:fontRef idx="minor">
-            <a:schemeClr val="lt1"/>
-          </a:fontRef>
-        </p:style>
-        <p:txBody>
-          <a:bodyPr rtlCol="0" anchor="ctr"/>
-          <a:lstStyle/>
-          <a:p>
-            <a:pPr algn="ctr"/>
-          </a:p>
-        </p:txBody>
-      </p:sp>
-      <p:sp>
-        <p:nvSpPr>
-          <p:cNvPr id="3" name="Rectangle 2"/>
-          <p:cNvSpPr/>
-          <p:nvPr/>
-        </p:nvSpPr>
-        <p:spPr>
-          <a:xfrm>
-            <a:off x="0" y="1051560"/>
-            <a:ext cx="12191695" cy="38100"/>
+            <a:ext cx="201168" cy="6858000"/>
           </a:xfrm>
           <a:prstGeom prst="rect">
             <a:avLst/>
@@ -4724,14 +7137,14 @@
       </p:sp>
       <p:sp>
         <p:nvSpPr>
-          <p:cNvPr id="4" name="TextBox 3"/>
+          <p:cNvPr id="3" name="TextBox 2"/>
           <p:cNvSpPr txBox="1"/>
           <p:nvPr/>
         </p:nvSpPr>
         <p:spPr>
           <a:xfrm>
-            <a:off x="548640" y="109728"/>
-            <a:ext cx="11064240" cy="914400"/>
+            <a:off x="502920" y="256032"/>
+            <a:ext cx="11247120" cy="822960"/>
           </a:xfrm>
           <a:prstGeom prst="rect">
             <a:avLst/>
@@ -4739,44 +7152,33 @@
           <a:noFill/>
         </p:spPr>
         <p:txBody>
-          <a:bodyPr wrap="square" anchor="t">
+          <a:bodyPr wrap="square">
             <a:spAutoFit/>
           </a:bodyPr>
           <a:lstStyle/>
           <a:p>
             <a:r>
-              <a:rPr sz="1200" b="1" i="0">
-                <a:solidFill>
-                  <a:srgbClr val="CFE2F3"/>
-                </a:solidFill>
-                <a:latin typeface="Calibri"/>
-              </a:rPr>
-              <a:t>CONFIG-SUIVI.JSON</a:t>
-            </a:r>
-          </a:p>
-          <a:p>
-            <a:r>
-              <a:rPr sz="2800" b="1" i="0">
-                <a:solidFill>
-                  <a:srgbClr val="FFFFFF"/>
-                </a:solidFill>
-                <a:latin typeface="Calibri"/>
-              </a:rPr>
-              <a:t>Configuration globale</a:t>
-            </a:r>
-          </a:p>
-        </p:txBody>
-      </p:sp>
-      <p:sp>
-        <p:nvSpPr>
-          <p:cNvPr id="5" name="TextBox 4"/>
+              <a:rPr sz="3000" b="1" i="0">
+                <a:solidFill>
+                  <a:srgbClr val="212B36"/>
+                </a:solidFill>
+                <a:latin typeface="Calibri"/>
+              </a:rPr>
+              <a:t>Configuration d'une squad</a:t>
+            </a:r>
+          </a:p>
+        </p:txBody>
+      </p:sp>
+      <p:sp>
+        <p:nvSpPr>
+          <p:cNvPr id="4" name="TextBox 3"/>
           <p:cNvSpPr txBox="1"/>
           <p:nvPr/>
         </p:nvSpPr>
         <p:spPr>
           <a:xfrm>
-            <a:off x="640080" y="1325880"/>
-            <a:ext cx="10881360" cy="5029200"/>
+            <a:off x="502920" y="868680"/>
+            <a:ext cx="11247120" cy="457200"/>
           </a:xfrm>
           <a:prstGeom prst="rect">
             <a:avLst/>
@@ -4784,105 +7186,64 @@
           <a:noFill/>
         </p:spPr>
         <p:txBody>
-          <a:bodyPr wrap="square" anchor="t">
+          <a:bodyPr wrap="square">
             <a:spAutoFit/>
           </a:bodyPr>
           <a:lstStyle/>
           <a:p>
-            <a:pPr>
-              <a:spcAft>
-                <a:spcPts val="600"/>
-              </a:spcAft>
-            </a:pPr>
-            <a:r>
-              <a:rPr sz="1800" b="1" i="0">
-                <a:solidFill>
-                  <a:srgbClr val="1F2A37"/>
-                </a:solidFill>
-                <a:latin typeface="Calibri"/>
-              </a:rPr>
-              <a:t>▪  Un SEUL fichier, lu par le suivi ET transmis tel quel au moteur mail.</a:t>
-            </a:r>
-          </a:p>
-          <a:p>
-            <a:pPr lvl="1">
-              <a:spcAft>
-                <a:spcPts val="600"/>
-              </a:spcAft>
-            </a:pPr>
-            <a:r>
-              <a:rPr sz="1500" b="0" i="0">
-                <a:solidFill>
-                  <a:srgbClr val="5B6670"/>
-                </a:solidFill>
-                <a:latin typeface="Calibri"/>
-              </a:rPr>
-              <a:t>–  Clés moteur : SmtpServer, Port, From, To, TemplatePath, Subject, Statuses…</a:t>
-            </a:r>
-          </a:p>
-          <a:p>
-            <a:pPr lvl="1">
-              <a:spcAft>
-                <a:spcPts val="600"/>
-              </a:spcAft>
-            </a:pPr>
-            <a:r>
-              <a:rPr sz="1500" b="0" i="0">
-                <a:solidFill>
-                  <a:srgbClr val="5B6670"/>
-                </a:solidFill>
-                <a:latin typeface="Calibri"/>
-              </a:rPr>
-              <a:t>–  Clés suivi : EmailsAdmin, MoteurMail, TemplateClasseur, DossierSquads, DossierLogs, Squads.</a:t>
-            </a:r>
-          </a:p>
-          <a:p>
-            <a:pPr>
-              <a:spcAft>
-                <a:spcPts val="600"/>
-              </a:spcAft>
-            </a:pPr>
-            <a:r>
-              <a:rPr sz="1800" b="1" i="0">
-                <a:solidFill>
-                  <a:srgbClr val="1F2A37"/>
-                </a:solidFill>
-                <a:latin typeface="Calibri"/>
-              </a:rPr>
-              <a:t>▪  Une squad = Nom + Classeur. C'est tout — le reste est dans son Excel.</a:t>
-            </a:r>
-          </a:p>
-          <a:p>
-            <a:pPr lvl="1">
-              <a:spcAft>
-                <a:spcPts val="600"/>
-              </a:spcAft>
-            </a:pPr>
-            <a:r>
-              <a:rPr sz="1500" b="0" i="0">
-                <a:solidFill>
-                  <a:srgbClr val="5B6670"/>
-                </a:solidFill>
-                <a:latin typeface="Calibri"/>
-              </a:rPr>
-              <a:t>–  Classeur relatif, absolu ou UNC : chaque squad peut vivre sur un autre partage.</a:t>
-            </a:r>
-          </a:p>
-          <a:p>
-            <a:pPr>
-              <a:spcAft>
-                <a:spcPts val="600"/>
-              </a:spcAft>
-            </a:pPr>
-            <a:r>
-              <a:rPr sz="1800" b="1" i="0">
-                <a:solidFill>
-                  <a:srgbClr val="5B6670"/>
-                </a:solidFill>
-                <a:latin typeface="Calibri"/>
-              </a:rPr>
-              <a:t>▪  JSON strict, UTF-8 avec BOM ; backslashes doublés pour les chemins Windows/UNC.</a:t>
-            </a:r>
+            <a:r>
+              <a:rPr sz="1500" b="0" i="1">
+                <a:solidFill>
+                  <a:srgbClr val="5A6672"/>
+                </a:solidFill>
+                <a:latin typeface="Calibri"/>
+              </a:rPr>
+              <a:t>conf-suivi-squad.json — complet, autonome, self-service</a:t>
+            </a:r>
+          </a:p>
+        </p:txBody>
+      </p:sp>
+      <p:sp>
+        <p:nvSpPr>
+          <p:cNvPr id="5" name="Rectangle 4"/>
+          <p:cNvSpPr/>
+          <p:nvPr/>
+        </p:nvSpPr>
+        <p:spPr>
+          <a:xfrm>
+            <a:off x="502920" y="1234440"/>
+            <a:ext cx="11155680" cy="27940"/>
+          </a:xfrm>
+          <a:prstGeom prst="rect">
+            <a:avLst/>
+          </a:prstGeom>
+          <a:solidFill>
+            <a:srgbClr val="00A8A8"/>
+          </a:solidFill>
+          <a:ln>
+            <a:noFill/>
+          </a:ln>
+          <a:effectLst/>
+        </p:spPr>
+        <p:style>
+          <a:lnRef idx="1">
+            <a:schemeClr val="accent1"/>
+          </a:lnRef>
+          <a:fillRef idx="3">
+            <a:schemeClr val="accent1"/>
+          </a:fillRef>
+          <a:effectRef idx="2">
+            <a:schemeClr val="accent1"/>
+          </a:effectRef>
+          <a:fontRef idx="minor">
+            <a:schemeClr val="lt1"/>
+          </a:fontRef>
+        </p:style>
+        <p:txBody>
+          <a:bodyPr rtlCol="0" anchor="ctr"/>
+          <a:lstStyle/>
+          <a:p>
+            <a:pPr algn="ctr"/>
           </a:p>
         </p:txBody>
       </p:sp>
@@ -4894,8 +7255,8 @@
         </p:nvSpPr>
         <p:spPr>
           <a:xfrm>
-            <a:off x="548640" y="6400800"/>
-            <a:ext cx="11064240" cy="365760"/>
+            <a:off x="502920" y="1554480"/>
+            <a:ext cx="11155680" cy="4937760"/>
           </a:xfrm>
           <a:prstGeom prst="rect">
             <a:avLst/>
@@ -4903,19 +7264,260 @@
           <a:noFill/>
         </p:spPr>
         <p:txBody>
-          <a:bodyPr wrap="square" anchor="t">
+          <a:bodyPr wrap="square">
             <a:spAutoFit/>
           </a:bodyPr>
           <a:lstStyle/>
           <a:p>
-            <a:r>
-              <a:rPr sz="900" b="0" i="0">
-                <a:solidFill>
-                  <a:srgbClr val="5B6670"/>
-                </a:solidFill>
-                <a:latin typeface="Calibri"/>
-              </a:rPr>
-              <a:t>Suivi d'Exploitation Multi-Squads</a:t>
+            <a:pPr>
+              <a:spcAft>
+                <a:spcPts val="800"/>
+              </a:spcAft>
+              <a:buFont typeface="Arial"/>
+              <a:buChar char="▪"/>
+            </a:pPr>
+            <a:r>
+              <a:rPr sz="1600" b="1" i="0">
+                <a:solidFill>
+                  <a:srgbClr val="212B36"/>
+                </a:solidFill>
+                <a:latin typeface="Calibri"/>
+              </a:rPr>
+              <a:t>Obligatoires</a:t>
+            </a:r>
+            <a:r>
+              <a:rPr sz="1600" b="0" i="0">
+                <a:solidFill>
+                  <a:srgbClr val="212B36"/>
+                </a:solidFill>
+                <a:latin typeface="Calibri"/>
+              </a:rPr>
+              <a:t> (validés par -Action Test) : SmtpServer, From, To, TemplatePath, EmailsAdmin</a:t>
+            </a:r>
+          </a:p>
+          <a:p>
+            <a:pPr>
+              <a:spcAft>
+                <a:spcPts val="800"/>
+              </a:spcAft>
+              <a:buFont typeface="Arial"/>
+              <a:buChar char="▪"/>
+            </a:pPr>
+            <a:r>
+              <a:rPr sz="1600" b="1" i="0">
+                <a:solidFill>
+                  <a:srgbClr val="212B36"/>
+                </a:solidFill>
+                <a:latin typeface="Calibri"/>
+              </a:rPr>
+              <a:t>To = repli uniquement</a:t>
+            </a:r>
+            <a:r>
+              <a:rPr sz="1600" b="0" i="0">
+                <a:solidFill>
+                  <a:srgbClr val="212B36"/>
+                </a:solidFill>
+                <a:latin typeface="Calibri"/>
+              </a:rPr>
+              <a:t> : les mails partent aux personnes désignées (emails lus dans l'Excel)</a:t>
+            </a:r>
+          </a:p>
+          <a:p>
+            <a:pPr>
+              <a:spcAft>
+                <a:spcPts val="800"/>
+              </a:spcAft>
+              <a:buFont typeface="Arial"/>
+              <a:buChar char="▪"/>
+            </a:pPr>
+            <a:r>
+              <a:rPr sz="1600" b="1" i="0">
+                <a:solidFill>
+                  <a:srgbClr val="212B36"/>
+                </a:solidFill>
+                <a:latin typeface="Calibri"/>
+              </a:rPr>
+              <a:t>Cc</a:t>
+            </a:r>
+            <a:r>
+              <a:rPr sz="1600" b="0" i="0">
+                <a:solidFill>
+                  <a:srgbClr val="212B36"/>
+                </a:solidFill>
+                <a:latin typeface="Calibri"/>
+              </a:rPr>
+              <a:t> vide ⇒ tous les membres actifs de la squad en copie</a:t>
+            </a:r>
+          </a:p>
+          <a:p>
+            <a:pPr>
+              <a:spcAft>
+                <a:spcPts val="800"/>
+              </a:spcAft>
+              <a:buFont typeface="Arial"/>
+              <a:buChar char="▪"/>
+            </a:pPr>
+            <a:r>
+              <a:rPr sz="1600" b="1" i="0">
+                <a:solidFill>
+                  <a:srgbClr val="212B36"/>
+                </a:solidFill>
+                <a:latin typeface="Calibri"/>
+              </a:rPr>
+              <a:t>EmailsAdmin</a:t>
+            </a:r>
+            <a:r>
+              <a:rPr sz="1600" b="0" i="0">
+                <a:solidFill>
+                  <a:srgbClr val="212B36"/>
+                </a:solidFill>
+                <a:latin typeface="Calibri"/>
+              </a:rPr>
+              <a:t> : destinataires des alertes de la squad (rôle sans candidat)</a:t>
+            </a:r>
+          </a:p>
+          <a:p>
+            <a:pPr>
+              <a:spcAft>
+                <a:spcPts val="800"/>
+              </a:spcAft>
+              <a:buFont typeface="Arial"/>
+              <a:buChar char="▪"/>
+            </a:pPr>
+            <a:r>
+              <a:rPr sz="1600" b="1" i="0">
+                <a:solidFill>
+                  <a:srgbClr val="212B36"/>
+                </a:solidFill>
+                <a:latin typeface="Calibri"/>
+              </a:rPr>
+              <a:t>Subject / Statuses / MessageLibre</a:t>
+            </a:r>
+            <a:r>
+              <a:rPr sz="1600" b="0" i="0">
+                <a:solidFill>
+                  <a:srgbClr val="212B36"/>
+                </a:solidFill>
+                <a:latin typeface="Calibri"/>
+              </a:rPr>
+              <a:t> : personnalisables, avec placeholders —</a:t>
+            </a:r>
+          </a:p>
+          <a:p>
+            <a:pPr lvl="1">
+              <a:spcAft>
+                <a:spcPts val="800"/>
+              </a:spcAft>
+              <a:buFont typeface="Arial"/>
+              <a:buChar char="–"/>
+            </a:pPr>
+            <a:r>
+              <a:rPr sz="1400" b="0" i="0">
+                <a:solidFill>
+                  <a:srgbClr val="5A6672"/>
+                </a:solidFill>
+                <a:latin typeface="Calibri"/>
+              </a:rPr>
+              <a:t>{{JOB_NAME}}, {{STATUS_LABEL}}, {{DATE}}, {{ENVIRONNEMENT}}</a:t>
+            </a:r>
+          </a:p>
+          <a:p>
+            <a:pPr lvl="1">
+              <a:spcAft>
+                <a:spcPts val="800"/>
+              </a:spcAft>
+              <a:buFont typeface="Arial"/>
+              <a:buChar char="–"/>
+            </a:pPr>
+            <a:r>
+              <a:rPr sz="1400" b="0" i="0">
+                <a:solidFill>
+                  <a:srgbClr val="5A6672"/>
+                </a:solidFill>
+                <a:latin typeface="Calibri"/>
+              </a:rPr>
+              <a:t>semaine cible : {{SEMAINE}} (lundi), {{SEMAINE_NUM}} (n° ISO, ex. S27), {{PERIODE}}</a:t>
+            </a:r>
+          </a:p>
+          <a:p>
+            <a:pPr>
+              <a:spcAft>
+                <a:spcPts val="800"/>
+              </a:spcAft>
+              <a:buFont typeface="Arial"/>
+              <a:buChar char="▪"/>
+            </a:pPr>
+            <a:r>
+              <a:rPr sz="1600" b="1" i="0">
+                <a:solidFill>
+                  <a:srgbClr val="212B36"/>
+                </a:solidFill>
+                <a:latin typeface="Calibri"/>
+              </a:rPr>
+              <a:t>ToleranceCongesJours</a:t>
+            </a:r>
+            <a:r>
+              <a:rPr sz="1600" b="0" i="0">
+                <a:solidFill>
+                  <a:srgbClr val="212B36"/>
+                </a:solidFill>
+                <a:latin typeface="Calibri"/>
+              </a:rPr>
+              <a:t> : réglable aussi (et en priorité) dans le classeur, zone C/D de Parametres</a:t>
+            </a:r>
+          </a:p>
+          <a:p>
+            <a:pPr>
+              <a:spcAft>
+                <a:spcPts val="800"/>
+              </a:spcAft>
+              <a:buFont typeface="Arial"/>
+              <a:buChar char="▪"/>
+            </a:pPr>
+            <a:r>
+              <a:rPr sz="1600" b="0" i="0">
+                <a:solidFill>
+                  <a:srgbClr val="212B36"/>
+                </a:solidFill>
+                <a:latin typeface="Calibri"/>
+              </a:rPr>
+              <a:t>JSON strict, </a:t>
+            </a:r>
+            <a:r>
+              <a:rPr sz="1600" b="1" i="0">
+                <a:solidFill>
+                  <a:srgbClr val="212B36"/>
+                </a:solidFill>
+                <a:latin typeface="Calibri"/>
+              </a:rPr>
+              <a:t>UTF-8 (BOM recommandé)</a:t>
+            </a:r>
+            <a:r>
+              <a:rPr sz="1600" b="0" i="0">
+                <a:solidFill>
+                  <a:srgbClr val="212B36"/>
+                </a:solidFill>
+                <a:latin typeface="Calibri"/>
+              </a:rPr>
+              <a:t> ; clés « _commentaire » tolérées (documentation, non transmises au moteur)</a:t>
+            </a:r>
+          </a:p>
+          <a:p>
+            <a:pPr>
+              <a:spcAft>
+                <a:spcPts val="800"/>
+              </a:spcAft>
+              <a:buFont typeface="Arial"/>
+              <a:buChar char="▪"/>
+            </a:pPr>
+            <a:r>
+              <a:rPr sz="1600" b="0" i="0">
+                <a:solidFill>
+                  <a:srgbClr val="212B36"/>
+                </a:solidFill>
+                <a:latin typeface="Calibri"/>
+              </a:rPr>
+              <a:t>Chemins relatifs (résolus depuis la racine) ou absolus/UNC — backslashes doublés dans le JSON</a:t>
             </a:r>
           </a:p>
         </p:txBody>
@@ -4947,51 +7549,7 @@
         <p:spPr>
           <a:xfrm>
             <a:off x="0" y="0"/>
-            <a:ext cx="12191695" cy="1051560"/>
-          </a:xfrm>
-          <a:prstGeom prst="rect">
-            <a:avLst/>
-          </a:prstGeom>
-          <a:solidFill>
-            <a:srgbClr val="005BAA"/>
-          </a:solidFill>
-          <a:ln>
-            <a:noFill/>
-          </a:ln>
-          <a:effectLst/>
-        </p:spPr>
-        <p:style>
-          <a:lnRef idx="1">
-            <a:schemeClr val="accent1"/>
-          </a:lnRef>
-          <a:fillRef idx="3">
-            <a:schemeClr val="accent1"/>
-          </a:fillRef>
-          <a:effectRef idx="2">
-            <a:schemeClr val="accent1"/>
-          </a:effectRef>
-          <a:fontRef idx="minor">
-            <a:schemeClr val="lt1"/>
-          </a:fontRef>
-        </p:style>
-        <p:txBody>
-          <a:bodyPr rtlCol="0" anchor="ctr"/>
-          <a:lstStyle/>
-          <a:p>
-            <a:pPr algn="ctr"/>
-          </a:p>
-        </p:txBody>
-      </p:sp>
-      <p:sp>
-        <p:nvSpPr>
-          <p:cNvPr id="3" name="Rectangle 2"/>
-          <p:cNvSpPr/>
-          <p:nvPr/>
-        </p:nvSpPr>
-        <p:spPr>
-          <a:xfrm>
-            <a:off x="0" y="1051560"/>
-            <a:ext cx="12191695" cy="38100"/>
+            <a:ext cx="201168" cy="6858000"/>
           </a:xfrm>
           <a:prstGeom prst="rect">
             <a:avLst/>
@@ -5028,14 +7586,14 @@
       </p:sp>
       <p:sp>
         <p:nvSpPr>
-          <p:cNvPr id="4" name="TextBox 3"/>
+          <p:cNvPr id="3" name="TextBox 2"/>
           <p:cNvSpPr txBox="1"/>
           <p:nvPr/>
         </p:nvSpPr>
         <p:spPr>
           <a:xfrm>
-            <a:off x="548640" y="109728"/>
-            <a:ext cx="11064240" cy="914400"/>
+            <a:off x="502920" y="256032"/>
+            <a:ext cx="11247120" cy="822960"/>
           </a:xfrm>
           <a:prstGeom prst="rect">
             <a:avLst/>
@@ -5043,44 +7601,33 @@
           <a:noFill/>
         </p:spPr>
         <p:txBody>
-          <a:bodyPr wrap="square" anchor="t">
+          <a:bodyPr wrap="square">
             <a:spAutoFit/>
           </a:bodyPr>
           <a:lstStyle/>
           <a:p>
             <a:r>
-              <a:rPr sz="1200" b="1" i="0">
-                <a:solidFill>
-                  <a:srgbClr val="CFE2F3"/>
-                </a:solidFill>
-                <a:latin typeface="Calibri"/>
-              </a:rPr>
-              <a:t>5 FEUILLES EXCEL</a:t>
-            </a:r>
-          </a:p>
-          <a:p>
-            <a:r>
-              <a:rPr sz="2800" b="1" i="0">
-                <a:solidFill>
-                  <a:srgbClr val="FFFFFF"/>
-                </a:solidFill>
-                <a:latin typeface="Calibri"/>
-              </a:rPr>
-              <a:t>Le classeur d'une squad</a:t>
-            </a:r>
-          </a:p>
-        </p:txBody>
-      </p:sp>
-      <p:sp>
-        <p:nvSpPr>
-          <p:cNvPr id="5" name="TextBox 4"/>
+              <a:rPr sz="3000" b="1" i="0">
+                <a:solidFill>
+                  <a:srgbClr val="212B36"/>
+                </a:solidFill>
+                <a:latin typeface="Calibri"/>
+              </a:rPr>
+              <a:t>Le classeur Excel d'une squad</a:t>
+            </a:r>
+          </a:p>
+        </p:txBody>
+      </p:sp>
+      <p:sp>
+        <p:nvSpPr>
+          <p:cNvPr id="4" name="TextBox 3"/>
           <p:cNvSpPr txBox="1"/>
           <p:nvPr/>
         </p:nvSpPr>
         <p:spPr>
           <a:xfrm>
-            <a:off x="640080" y="1325880"/>
-            <a:ext cx="10881360" cy="5029200"/>
+            <a:off x="502920" y="868680"/>
+            <a:ext cx="11247120" cy="457200"/>
           </a:xfrm>
           <a:prstGeom prst="rect">
             <a:avLst/>
@@ -5088,118 +7635,494 @@
           <a:noFill/>
         </p:spPr>
         <p:txBody>
-          <a:bodyPr wrap="square" anchor="t">
+          <a:bodyPr wrap="square">
             <a:spAutoFit/>
           </a:bodyPr>
           <a:lstStyle/>
           <a:p>
-            <a:pPr>
-              <a:spcAft>
-                <a:spcPts val="600"/>
-              </a:spcAft>
-            </a:pPr>
-            <a:r>
-              <a:rPr sz="1800" b="1" i="0">
-                <a:solidFill>
-                  <a:srgbClr val="1F2A37"/>
-                </a:solidFill>
-                <a:latin typeface="Calibri"/>
-              </a:rPr>
-              <a:t>▪  Parametres — A : rôles à désigner ; C/D : paramètres (EmailsCopieSquad, Note &lt;Rôle&gt;).</a:t>
-            </a:r>
-          </a:p>
-          <a:p>
-            <a:pPr>
-              <a:spcAft>
-                <a:spcPts val="600"/>
-              </a:spcAft>
-            </a:pPr>
-            <a:r>
-              <a:rPr sz="1800" b="1" i="0">
-                <a:solidFill>
-                  <a:srgbClr val="1F2A37"/>
-                </a:solidFill>
-                <a:latin typeface="Calibri"/>
-              </a:rPr>
-              <a:t>▪  Membres — Nom, Email, Rôle, Compteur (graine), Actif.</a:t>
-            </a:r>
-          </a:p>
-          <a:p>
-            <a:pPr>
-              <a:spcAft>
-                <a:spcPts val="600"/>
-              </a:spcAft>
-            </a:pPr>
-            <a:r>
-              <a:rPr sz="1800" b="1" i="0">
-                <a:solidFill>
-                  <a:srgbClr val="1F2A37"/>
-                </a:solidFill>
-                <a:latin typeface="Calibri"/>
-              </a:rPr>
-              <a:t>▪  Congés — Membre, Début, Fin (journées entières).</a:t>
-            </a:r>
-          </a:p>
-          <a:p>
-            <a:pPr>
-              <a:spcAft>
-                <a:spcPts val="600"/>
-              </a:spcAft>
-            </a:pPr>
-            <a:r>
-              <a:rPr sz="1800" b="1" i="0">
-                <a:solidFill>
-                  <a:srgbClr val="1F2A37"/>
-                </a:solidFill>
-                <a:latin typeface="Calibri"/>
-              </a:rPr>
-              <a:t>▪  Historique — format long : 1 ligne par rôle désigné (écrit par le script).</a:t>
-            </a:r>
-          </a:p>
-          <a:p>
-            <a:pPr>
-              <a:spcAft>
-                <a:spcPts val="600"/>
-              </a:spcAft>
-            </a:pPr>
-            <a:r>
-              <a:rPr sz="1800" b="1" i="0">
-                <a:solidFill>
-                  <a:srgbClr val="1F2A37"/>
-                </a:solidFill>
-                <a:latin typeface="Calibri"/>
-              </a:rPr>
-              <a:t>▪  Log — fenêtre glissante des 1000 dernières lignes.</a:t>
-            </a:r>
-          </a:p>
-          <a:p>
-            <a:pPr lvl="1">
-              <a:spcAft>
-                <a:spcPts val="600"/>
-              </a:spcAft>
-            </a:pPr>
-            <a:r>
-              <a:rPr sz="1500" b="0" i="0">
-                <a:solidFill>
-                  <a:srgbClr val="5B6670"/>
-                </a:solidFill>
-                <a:latin typeface="Calibri"/>
-              </a:rPr>
-              <a:t>–  Listes déroulantes anti-faute : Rôle, Actif (Oui/Non), Membre des congés.</a:t>
-            </a:r>
-          </a:p>
-        </p:txBody>
-      </p:sp>
-      <p:sp>
-        <p:nvSpPr>
-          <p:cNvPr id="6" name="TextBox 5"/>
+            <a:r>
+              <a:rPr sz="1500" b="0" i="1">
+                <a:solidFill>
+                  <a:srgbClr val="5A6672"/>
+                </a:solidFill>
+                <a:latin typeface="Calibri"/>
+              </a:rPr>
+              <a:t>5 feuilles — données métier uniquement, pas de VBA</a:t>
+            </a:r>
+          </a:p>
+        </p:txBody>
+      </p:sp>
+      <p:sp>
+        <p:nvSpPr>
+          <p:cNvPr id="5" name="Rectangle 4"/>
+          <p:cNvSpPr/>
+          <p:nvPr/>
+        </p:nvSpPr>
+        <p:spPr>
+          <a:xfrm>
+            <a:off x="502920" y="1234440"/>
+            <a:ext cx="11155680" cy="27940"/>
+          </a:xfrm>
+          <a:prstGeom prst="rect">
+            <a:avLst/>
+          </a:prstGeom>
+          <a:solidFill>
+            <a:srgbClr val="00A8A8"/>
+          </a:solidFill>
+          <a:ln>
+            <a:noFill/>
+          </a:ln>
+          <a:effectLst/>
+        </p:spPr>
+        <p:style>
+          <a:lnRef idx="1">
+            <a:schemeClr val="accent1"/>
+          </a:lnRef>
+          <a:fillRef idx="3">
+            <a:schemeClr val="accent1"/>
+          </a:fillRef>
+          <a:effectRef idx="2">
+            <a:schemeClr val="accent1"/>
+          </a:effectRef>
+          <a:fontRef idx="minor">
+            <a:schemeClr val="lt1"/>
+          </a:fontRef>
+        </p:style>
+        <p:txBody>
+          <a:bodyPr rtlCol="0" anchor="ctr"/>
+          <a:lstStyle/>
+          <a:p>
+            <a:pPr algn="ctr"/>
+          </a:p>
+        </p:txBody>
+      </p:sp>
+      <p:graphicFrame>
+        <p:nvGraphicFramePr>
+          <p:cNvPr id="6" name="Table 5"/>
+          <p:cNvGraphicFramePr>
+            <a:graphicFrameLocks noGrp="1"/>
+          </p:cNvGraphicFramePr>
+          <p:nvPr/>
+        </p:nvGraphicFramePr>
+        <p:xfrm>
+          <a:off x="502920" y="1554480"/>
+          <a:ext cx="11155680" cy="3291840"/>
+        </p:xfrm>
+        <a:graphic>
+          <a:graphicData uri="http://schemas.openxmlformats.org/drawingml/2006/table">
+            <a:tbl>
+              <a:tblPr firstRow="1" bandRow="1">
+                <a:tableStyleId>{5C22544A-7EE6-4342-B048-85BDC9FD1C3A}</a:tableStyleId>
+              </a:tblPr>
+              <a:tblGrid>
+                <a:gridCol w="1737360"/>
+                <a:gridCol w="7223760"/>
+                <a:gridCol w="2194560"/>
+              </a:tblGrid>
+              <a:tr h="548640">
+                <a:tc>
+                  <a:txBody>
+                    <a:bodyPr/>
+                    <a:lstStyle/>
+                    <a:p>
+                      <a:r>
+                        <a:rPr sz="1400" b="1">
+                          <a:solidFill>
+                            <a:srgbClr val="FFFFFF"/>
+                          </a:solidFill>
+                        </a:rPr>
+                        <a:t>Feuille</a:t>
+                      </a:r>
+                    </a:p>
+                  </a:txBody>
+                  <a:tcPr>
+                    <a:solidFill>
+                      <a:srgbClr val="00A8A8"/>
+                    </a:solidFill>
+                  </a:tcPr>
+                </a:tc>
+                <a:tc>
+                  <a:txBody>
+                    <a:bodyPr/>
+                    <a:lstStyle/>
+                    <a:p>
+                      <a:r>
+                        <a:rPr sz="1400" b="1">
+                          <a:solidFill>
+                            <a:srgbClr val="FFFFFF"/>
+                          </a:solidFill>
+                        </a:rPr>
+                        <a:t>Contenu</a:t>
+                      </a:r>
+                    </a:p>
+                  </a:txBody>
+                  <a:tcPr>
+                    <a:solidFill>
+                      <a:srgbClr val="00A8A8"/>
+                    </a:solidFill>
+                  </a:tcPr>
+                </a:tc>
+                <a:tc>
+                  <a:txBody>
+                    <a:bodyPr/>
+                    <a:lstStyle/>
+                    <a:p>
+                      <a:r>
+                        <a:rPr sz="1400" b="1">
+                          <a:solidFill>
+                            <a:srgbClr val="FFFFFF"/>
+                          </a:solidFill>
+                        </a:rPr>
+                        <a:t>Qui écrit ?</a:t>
+                      </a:r>
+                    </a:p>
+                  </a:txBody>
+                  <a:tcPr>
+                    <a:solidFill>
+                      <a:srgbClr val="00A8A8"/>
+                    </a:solidFill>
+                  </a:tcPr>
+                </a:tc>
+              </a:tr>
+              <a:tr h="548640">
+                <a:tc>
+                  <a:txBody>
+                    <a:bodyPr/>
+                    <a:lstStyle/>
+                    <a:p>
+                      <a:r>
+                        <a:rPr sz="1300" b="1">
+                          <a:solidFill>
+                            <a:srgbClr val="212B36"/>
+                          </a:solidFill>
+                        </a:rPr>
+                        <a:t>Parametres</a:t>
+                      </a:r>
+                    </a:p>
+                  </a:txBody>
+                  <a:tcPr>
+                    <a:solidFill>
+                      <a:srgbClr val="F2F6F8"/>
+                    </a:solidFill>
+                  </a:tcPr>
+                </a:tc>
+                <a:tc>
+                  <a:txBody>
+                    <a:bodyPr/>
+                    <a:lstStyle/>
+                    <a:p>
+                      <a:r>
+                        <a:rPr sz="1300" b="0">
+                          <a:solidFill>
+                            <a:srgbClr val="212B36"/>
+                          </a:solidFill>
+                        </a:rPr>
+                        <a:t>A : rôles à désigner (ordonnés — 1=solo, 2=binôme…) · C/D : clés self-service (Note &lt;Rôle&gt;, ToleranceCongesJours)</a:t>
+                      </a:r>
+                    </a:p>
+                  </a:txBody>
+                  <a:tcPr>
+                    <a:solidFill>
+                      <a:srgbClr val="F2F6F8"/>
+                    </a:solidFill>
+                  </a:tcPr>
+                </a:tc>
+                <a:tc>
+                  <a:txBody>
+                    <a:bodyPr/>
+                    <a:lstStyle/>
+                    <a:p>
+                      <a:r>
+                        <a:rPr sz="1300" b="0">
+                          <a:solidFill>
+                            <a:srgbClr val="212B36"/>
+                          </a:solidFill>
+                        </a:rPr>
+                        <a:t>Squad</a:t>
+                      </a:r>
+                    </a:p>
+                  </a:txBody>
+                  <a:tcPr>
+                    <a:solidFill>
+                      <a:srgbClr val="F2F6F8"/>
+                    </a:solidFill>
+                  </a:tcPr>
+                </a:tc>
+              </a:tr>
+              <a:tr h="548640">
+                <a:tc>
+                  <a:txBody>
+                    <a:bodyPr/>
+                    <a:lstStyle/>
+                    <a:p>
+                      <a:r>
+                        <a:rPr sz="1300" b="1">
+                          <a:solidFill>
+                            <a:srgbClr val="212B36"/>
+                          </a:solidFill>
+                        </a:rPr>
+                        <a:t>Membres</a:t>
+                      </a:r>
+                    </a:p>
+                  </a:txBody>
+                  <a:tcPr>
+                    <a:solidFill>
+                      <a:srgbClr val="FFFFFF"/>
+                    </a:solidFill>
+                  </a:tcPr>
+                </a:tc>
+                <a:tc>
+                  <a:txBody>
+                    <a:bodyPr/>
+                    <a:lstStyle/>
+                    <a:p>
+                      <a:r>
+                        <a:rPr sz="1300" b="0">
+                          <a:solidFill>
+                            <a:srgbClr val="212B36"/>
+                          </a:solidFill>
+                        </a:rPr>
+                        <a:t>Nom, Email, Rôle, DateDernierSuivi (graine), Compteur (cumul vivant), Actif</a:t>
+                      </a:r>
+                    </a:p>
+                  </a:txBody>
+                  <a:tcPr>
+                    <a:solidFill>
+                      <a:srgbClr val="FFFFFF"/>
+                    </a:solidFill>
+                  </a:tcPr>
+                </a:tc>
+                <a:tc>
+                  <a:txBody>
+                    <a:bodyPr/>
+                    <a:lstStyle/>
+                    <a:p>
+                      <a:r>
+                        <a:rPr sz="1300" b="0">
+                          <a:solidFill>
+                            <a:srgbClr val="212B36"/>
+                          </a:solidFill>
+                        </a:rPr>
+                        <a:t>Squad + script (Compteur seul)</a:t>
+                      </a:r>
+                    </a:p>
+                  </a:txBody>
+                  <a:tcPr>
+                    <a:solidFill>
+                      <a:srgbClr val="FFFFFF"/>
+                    </a:solidFill>
+                  </a:tcPr>
+                </a:tc>
+              </a:tr>
+              <a:tr h="548640">
+                <a:tc>
+                  <a:txBody>
+                    <a:bodyPr/>
+                    <a:lstStyle/>
+                    <a:p>
+                      <a:r>
+                        <a:rPr sz="1300" b="1">
+                          <a:solidFill>
+                            <a:srgbClr val="212B36"/>
+                          </a:solidFill>
+                        </a:rPr>
+                        <a:t>Congés</a:t>
+                      </a:r>
+                    </a:p>
+                  </a:txBody>
+                  <a:tcPr>
+                    <a:solidFill>
+                      <a:srgbClr val="F2F6F8"/>
+                    </a:solidFill>
+                  </a:tcPr>
+                </a:tc>
+                <a:tc>
+                  <a:txBody>
+                    <a:bodyPr/>
+                    <a:lstStyle/>
+                    <a:p>
+                      <a:r>
+                        <a:rPr sz="1300" b="0">
+                          <a:solidFill>
+                            <a:srgbClr val="212B36"/>
+                          </a:solidFill>
+                        </a:rPr>
+                        <a:t>Membre, Début, Fin — 1 jour = jour entier</a:t>
+                      </a:r>
+                    </a:p>
+                  </a:txBody>
+                  <a:tcPr>
+                    <a:solidFill>
+                      <a:srgbClr val="F2F6F8"/>
+                    </a:solidFill>
+                  </a:tcPr>
+                </a:tc>
+                <a:tc>
+                  <a:txBody>
+                    <a:bodyPr/>
+                    <a:lstStyle/>
+                    <a:p>
+                      <a:r>
+                        <a:rPr sz="1300" b="0">
+                          <a:solidFill>
+                            <a:srgbClr val="212B36"/>
+                          </a:solidFill>
+                        </a:rPr>
+                        <a:t>Squad</a:t>
+                      </a:r>
+                    </a:p>
+                  </a:txBody>
+                  <a:tcPr>
+                    <a:solidFill>
+                      <a:srgbClr val="F2F6F8"/>
+                    </a:solidFill>
+                  </a:tcPr>
+                </a:tc>
+              </a:tr>
+              <a:tr h="548640">
+                <a:tc>
+                  <a:txBody>
+                    <a:bodyPr/>
+                    <a:lstStyle/>
+                    <a:p>
+                      <a:r>
+                        <a:rPr sz="1300" b="1">
+                          <a:solidFill>
+                            <a:srgbClr val="212B36"/>
+                          </a:solidFill>
+                        </a:rPr>
+                        <a:t>Historique</a:t>
+                      </a:r>
+                    </a:p>
+                  </a:txBody>
+                  <a:tcPr>
+                    <a:solidFill>
+                      <a:srgbClr val="FFFFFF"/>
+                    </a:solidFill>
+                  </a:tcPr>
+                </a:tc>
+                <a:tc>
+                  <a:txBody>
+                    <a:bodyPr/>
+                    <a:lstStyle/>
+                    <a:p>
+                      <a:r>
+                        <a:rPr sz="1300" b="0">
+                          <a:solidFill>
+                            <a:srgbClr val="212B36"/>
+                          </a:solidFill>
+                        </a:rPr>
+                        <a:t>Format long : 1 ligne par rôle désigné (SemaineLundi, Role, Nom, DateAnnonce, DateRappel, Statut…)</a:t>
+                      </a:r>
+                    </a:p>
+                  </a:txBody>
+                  <a:tcPr>
+                    <a:solidFill>
+                      <a:srgbClr val="FFFFFF"/>
+                    </a:solidFill>
+                  </a:tcPr>
+                </a:tc>
+                <a:tc>
+                  <a:txBody>
+                    <a:bodyPr/>
+                    <a:lstStyle/>
+                    <a:p>
+                      <a:r>
+                        <a:rPr sz="1300" b="0">
+                          <a:solidFill>
+                            <a:srgbClr val="212B36"/>
+                          </a:solidFill>
+                        </a:rPr>
+                        <a:t>Script</a:t>
+                      </a:r>
+                    </a:p>
+                  </a:txBody>
+                  <a:tcPr>
+                    <a:solidFill>
+                      <a:srgbClr val="FFFFFF"/>
+                    </a:solidFill>
+                  </a:tcPr>
+                </a:tc>
+              </a:tr>
+              <a:tr h="548640">
+                <a:tc>
+                  <a:txBody>
+                    <a:bodyPr/>
+                    <a:lstStyle/>
+                    <a:p>
+                      <a:r>
+                        <a:rPr sz="1300" b="1">
+                          <a:solidFill>
+                            <a:srgbClr val="212B36"/>
+                          </a:solidFill>
+                        </a:rPr>
+                        <a:t>Log</a:t>
+                      </a:r>
+                    </a:p>
+                  </a:txBody>
+                  <a:tcPr>
+                    <a:solidFill>
+                      <a:srgbClr val="F2F6F8"/>
+                    </a:solidFill>
+                  </a:tcPr>
+                </a:tc>
+                <a:tc>
+                  <a:txBody>
+                    <a:bodyPr/>
+                    <a:lstStyle/>
+                    <a:p>
+                      <a:r>
+                        <a:rPr sz="1300" b="0">
+                          <a:solidFill>
+                            <a:srgbClr val="212B36"/>
+                          </a:solidFill>
+                        </a:rPr>
+                        <a:t>Fenêtre glissante des 1 000 dernières lignes</a:t>
+                      </a:r>
+                    </a:p>
+                  </a:txBody>
+                  <a:tcPr>
+                    <a:solidFill>
+                      <a:srgbClr val="F2F6F8"/>
+                    </a:solidFill>
+                  </a:tcPr>
+                </a:tc>
+                <a:tc>
+                  <a:txBody>
+                    <a:bodyPr/>
+                    <a:lstStyle/>
+                    <a:p>
+                      <a:r>
+                        <a:rPr sz="1300" b="0">
+                          <a:solidFill>
+                            <a:srgbClr val="212B36"/>
+                          </a:solidFill>
+                        </a:rPr>
+                        <a:t>Script</a:t>
+                      </a:r>
+                    </a:p>
+                  </a:txBody>
+                  <a:tcPr>
+                    <a:solidFill>
+                      <a:srgbClr val="F2F6F8"/>
+                    </a:solidFill>
+                  </a:tcPr>
+                </a:tc>
+              </a:tr>
+            </a:tbl>
+          </a:graphicData>
+        </a:graphic>
+      </p:graphicFrame>
+      <p:sp>
+        <p:nvSpPr>
+          <p:cNvPr id="7" name="TextBox 6"/>
           <p:cNvSpPr txBox="1"/>
           <p:nvPr/>
         </p:nvSpPr>
         <p:spPr>
           <a:xfrm>
-            <a:off x="548640" y="6400800"/>
-            <a:ext cx="11064240" cy="365760"/>
+            <a:off x="502920" y="5120640"/>
+            <a:ext cx="11155680" cy="4937760"/>
           </a:xfrm>
           <a:prstGeom prst="rect">
             <a:avLst/>
@@ -5207,19 +8130,80 @@
           <a:noFill/>
         </p:spPr>
         <p:txBody>
-          <a:bodyPr wrap="square" anchor="t">
+          <a:bodyPr wrap="square">
             <a:spAutoFit/>
           </a:bodyPr>
           <a:lstStyle/>
           <a:p>
-            <a:r>
-              <a:rPr sz="900" b="0" i="0">
-                <a:solidFill>
-                  <a:srgbClr val="5B6670"/>
-                </a:solidFill>
-                <a:latin typeface="Calibri"/>
-              </a:rPr>
-              <a:t>Suivi d'Exploitation Multi-Squads</a:t>
+            <a:pPr>
+              <a:spcAft>
+                <a:spcPts val="800"/>
+              </a:spcAft>
+              <a:buFont typeface="Arial"/>
+              <a:buChar char="▪"/>
+            </a:pPr>
+            <a:r>
+              <a:rPr sz="1500" b="1" i="0">
+                <a:solidFill>
+                  <a:srgbClr val="212B36"/>
+                </a:solidFill>
+                <a:latin typeface="Calibri"/>
+              </a:rPr>
+              <a:t>Listes déroulantes anti-faute</a:t>
+            </a:r>
+            <a:r>
+              <a:rPr sz="1500" b="0" i="0">
+                <a:solidFill>
+                  <a:srgbClr val="212B36"/>
+                </a:solidFill>
+                <a:latin typeface="Calibri"/>
+              </a:rPr>
+              <a:t> : Rôle (depuis Parametres), Actif = Oui/Non, Congés!Membre (depuis Membres)</a:t>
+            </a:r>
+          </a:p>
+          <a:p>
+            <a:pPr>
+              <a:spcAft>
+                <a:spcPts val="800"/>
+              </a:spcAft>
+              <a:buFont typeface="Arial"/>
+              <a:buChar char="▪"/>
+            </a:pPr>
+            <a:r>
+              <a:rPr sz="1500" b="1" i="0">
+                <a:solidFill>
+                  <a:srgbClr val="212B36"/>
+                </a:solidFill>
+                <a:latin typeface="Calibri"/>
+              </a:rPr>
+              <a:t>La config mail n'est PAS dans le classeur</a:t>
+            </a:r>
+            <a:r>
+              <a:rPr sz="1500" b="0" i="0">
+                <a:solidFill>
+                  <a:srgbClr val="212B36"/>
+                </a:solidFill>
+                <a:latin typeface="Calibri"/>
+              </a:rPr>
+              <a:t> (elle est dans conf-suivi-squad.json) — des commentaires de cellule le rappellent</a:t>
+            </a:r>
+          </a:p>
+          <a:p>
+            <a:pPr>
+              <a:spcAft>
+                <a:spcPts val="800"/>
+              </a:spcAft>
+              <a:buFont typeface="Arial"/>
+              <a:buChar char="▪"/>
+            </a:pPr>
+            <a:r>
+              <a:rPr sz="1500" b="0" i="0">
+                <a:solidFill>
+                  <a:srgbClr val="212B36"/>
+                </a:solidFill>
+                <a:latin typeface="Calibri"/>
+              </a:rPr>
+              <a:t>Lecture tolérante : dates multi-formats, valeurs invalides journalisées en WARN</a:t>
             </a:r>
           </a:p>
         </p:txBody>
@@ -5251,51 +8235,7 @@
         <p:spPr>
           <a:xfrm>
             <a:off x="0" y="0"/>
-            <a:ext cx="12191695" cy="1051560"/>
-          </a:xfrm>
-          <a:prstGeom prst="rect">
-            <a:avLst/>
-          </a:prstGeom>
-          <a:solidFill>
-            <a:srgbClr val="005BAA"/>
-          </a:solidFill>
-          <a:ln>
-            <a:noFill/>
-          </a:ln>
-          <a:effectLst/>
-        </p:spPr>
-        <p:style>
-          <a:lnRef idx="1">
-            <a:schemeClr val="accent1"/>
-          </a:lnRef>
-          <a:fillRef idx="3">
-            <a:schemeClr val="accent1"/>
-          </a:fillRef>
-          <a:effectRef idx="2">
-            <a:schemeClr val="accent1"/>
-          </a:effectRef>
-          <a:fontRef idx="minor">
-            <a:schemeClr val="lt1"/>
-          </a:fontRef>
-        </p:style>
-        <p:txBody>
-          <a:bodyPr rtlCol="0" anchor="ctr"/>
-          <a:lstStyle/>
-          <a:p>
-            <a:pPr algn="ctr"/>
-          </a:p>
-        </p:txBody>
-      </p:sp>
-      <p:sp>
-        <p:nvSpPr>
-          <p:cNvPr id="3" name="Rectangle 2"/>
-          <p:cNvSpPr/>
-          <p:nvPr/>
-        </p:nvSpPr>
-        <p:spPr>
-          <a:xfrm>
-            <a:off x="0" y="1051560"/>
-            <a:ext cx="12191695" cy="38100"/>
+            <a:ext cx="201168" cy="6858000"/>
           </a:xfrm>
           <a:prstGeom prst="rect">
             <a:avLst/>
@@ -5332,14 +8272,14 @@
       </p:sp>
       <p:sp>
         <p:nvSpPr>
-          <p:cNvPr id="4" name="TextBox 3"/>
+          <p:cNvPr id="3" name="TextBox 2"/>
           <p:cNvSpPr txBox="1"/>
           <p:nvPr/>
         </p:nvSpPr>
         <p:spPr>
           <a:xfrm>
-            <a:off x="548640" y="109728"/>
-            <a:ext cx="11064240" cy="914400"/>
+            <a:off x="502920" y="256032"/>
+            <a:ext cx="11247120" cy="822960"/>
           </a:xfrm>
           <a:prstGeom prst="rect">
             <a:avLst/>
@@ -5347,44 +8287,33 @@
           <a:noFill/>
         </p:spPr>
         <p:txBody>
-          <a:bodyPr wrap="square" anchor="t">
+          <a:bodyPr wrap="square">
             <a:spAutoFit/>
           </a:bodyPr>
           <a:lstStyle/>
           <a:p>
             <a:r>
-              <a:rPr sz="1200" b="1" i="0">
-                <a:solidFill>
-                  <a:srgbClr val="CFE2F3"/>
-                </a:solidFill>
-                <a:latin typeface="Calibri"/>
-              </a:rPr>
-              <a:t>PAR RÔLE, UNE PERSONNE</a:t>
-            </a:r>
-          </a:p>
-          <a:p>
-            <a:r>
-              <a:rPr sz="2800" b="1" i="0">
-                <a:solidFill>
-                  <a:srgbClr val="FFFFFF"/>
-                </a:solidFill>
-                <a:latin typeface="Calibri"/>
-              </a:rPr>
-              <a:t>Règle de désignation</a:t>
-            </a:r>
-          </a:p>
-        </p:txBody>
-      </p:sp>
-      <p:sp>
-        <p:nvSpPr>
-          <p:cNvPr id="5" name="TextBox 4"/>
+              <a:rPr sz="3000" b="1" i="0">
+                <a:solidFill>
+                  <a:srgbClr val="212B36"/>
+                </a:solidFill>
+                <a:latin typeface="Calibri"/>
+              </a:rPr>
+              <a:t>La règle de désignation</a:t>
+            </a:r>
+          </a:p>
+        </p:txBody>
+      </p:sp>
+      <p:sp>
+        <p:nvSpPr>
+          <p:cNvPr id="4" name="TextBox 3"/>
           <p:cNvSpPr txBox="1"/>
           <p:nvPr/>
         </p:nvSpPr>
         <p:spPr>
           <a:xfrm>
-            <a:off x="640080" y="1325880"/>
-            <a:ext cx="10881360" cy="5029200"/>
+            <a:off x="502920" y="868680"/>
+            <a:ext cx="11247120" cy="457200"/>
           </a:xfrm>
           <a:prstGeom prst="rect">
             <a:avLst/>
@@ -5392,150 +8321,165 @@
           <a:noFill/>
         </p:spPr>
         <p:txBody>
-          <a:bodyPr wrap="square" anchor="t">
+          <a:bodyPr wrap="square">
             <a:spAutoFit/>
           </a:bodyPr>
           <a:lstStyle/>
           <a:p>
-            <a:pPr>
-              <a:spcAft>
-                <a:spcPts val="600"/>
-              </a:spcAft>
-            </a:pPr>
-            <a:r>
-              <a:rPr sz="1800" b="1" i="0">
-                <a:solidFill>
-                  <a:srgbClr val="1F2A37"/>
-                </a:solidFill>
-                <a:latin typeface="Calibri"/>
-              </a:rPr>
-              <a:t>▪  Candidats = membres actifs du rôle.</a:t>
-            </a:r>
-          </a:p>
-          <a:p>
-            <a:pPr>
-              <a:spcAft>
-                <a:spcPts val="600"/>
-              </a:spcAft>
-            </a:pPr>
-            <a:r>
-              <a:rPr sz="1800" b="1" i="0">
-                <a:solidFill>
-                  <a:srgbClr val="1F2A37"/>
-                </a:solidFill>
-                <a:latin typeface="Calibri"/>
-              </a:rPr>
-              <a:t>▪  Exclusions : congés (semaine cible ou vendredi précédent) ; désigné de la semaine passée.</a:t>
-            </a:r>
-          </a:p>
-          <a:p>
-            <a:pPr>
-              <a:spcAft>
-                <a:spcPts val="600"/>
-              </a:spcAft>
-            </a:pPr>
-            <a:r>
-              <a:rPr sz="1800" b="1" i="0">
-                <a:solidFill>
-                  <a:srgbClr val="1F2A37"/>
-                </a:solidFill>
-                <a:latin typeface="Calibri"/>
-              </a:rPr>
-              <a:t>▪  Tri, on retient le premier :</a:t>
-            </a:r>
-          </a:p>
-          <a:p>
-            <a:pPr lvl="1">
-              <a:spcAft>
-                <a:spcPts val="600"/>
-              </a:spcAft>
-            </a:pPr>
-            <a:r>
-              <a:rPr sz="1500" b="0" i="0">
-                <a:solidFill>
-                  <a:srgbClr val="5B6670"/>
-                </a:solidFill>
-                <a:latin typeface="Calibri"/>
-              </a:rPr>
-              <a:t>–  1) dernière désignation la plus ancienne (jamais fait = priorité absolue) ;</a:t>
-            </a:r>
-          </a:p>
-          <a:p>
-            <a:pPr lvl="1">
-              <a:spcAft>
-                <a:spcPts val="600"/>
-              </a:spcAft>
-            </a:pPr>
-            <a:r>
-              <a:rPr sz="1500" b="0" i="0">
-                <a:solidFill>
-                  <a:srgbClr val="5B6670"/>
-                </a:solidFill>
-                <a:latin typeface="Calibri"/>
-              </a:rPr>
-              <a:t>–  2) NB_FOIS minimal (graine Compteur + désignations de l'historique) ;</a:t>
-            </a:r>
-          </a:p>
-          <a:p>
-            <a:pPr lvl="1">
-              <a:spcAft>
-                <a:spcPts val="600"/>
-              </a:spcAft>
-            </a:pPr>
-            <a:r>
-              <a:rPr sz="1500" b="0" i="0">
-                <a:solidFill>
-                  <a:srgbClr val="5B6670"/>
-                </a:solidFill>
-                <a:latin typeface="Calibri"/>
-              </a:rPr>
-              <a:t>–  3) par nom.</a:t>
-            </a:r>
-          </a:p>
-          <a:p>
-            <a:pPr>
-              <a:spcAft>
-                <a:spcPts val="600"/>
-              </a:spcAft>
-            </a:pPr>
-            <a:r>
-              <a:rPr sz="1800" b="1" i="0">
-                <a:solidFill>
-                  <a:srgbClr val="00A8A8"/>
-                </a:solidFill>
-                <a:latin typeface="Calibri"/>
-              </a:rPr>
-              <a:t>▪  Recalcul idempotent — dérivé de l'historique ; n'écrit jamais dans Membres.</a:t>
-            </a:r>
-          </a:p>
-          <a:p>
-            <a:pPr>
-              <a:spcAft>
-                <a:spcPts val="600"/>
-              </a:spcAft>
-            </a:pPr>
-            <a:r>
-              <a:rPr sz="1800" b="1" i="0">
-                <a:solidFill>
-                  <a:srgbClr val="C0392B"/>
-                </a:solidFill>
-                <a:latin typeface="Calibri"/>
-              </a:rPr>
-              <a:t>▪  Alerte atomique si aucun candidat ; mail aux EmailsAdmin.</a:t>
-            </a:r>
-          </a:p>
-        </p:txBody>
-      </p:sp>
-      <p:sp>
-        <p:nvSpPr>
-          <p:cNvPr id="6" name="TextBox 5"/>
+            <a:r>
+              <a:rPr sz="1500" b="0" i="1">
+                <a:solidFill>
+                  <a:srgbClr val="5A6672"/>
+                </a:solidFill>
+                <a:latin typeface="Calibri"/>
+              </a:rPr>
+              <a:t>Pour chaque rôle : filtres d'éligibilité puis tri d'équité</a:t>
+            </a:r>
+          </a:p>
+        </p:txBody>
+      </p:sp>
+      <p:sp>
+        <p:nvSpPr>
+          <p:cNvPr id="5" name="Rectangle 4"/>
+          <p:cNvSpPr/>
+          <p:nvPr/>
+        </p:nvSpPr>
+        <p:spPr>
+          <a:xfrm>
+            <a:off x="502920" y="1234440"/>
+            <a:ext cx="11155680" cy="27940"/>
+          </a:xfrm>
+          <a:prstGeom prst="rect">
+            <a:avLst/>
+          </a:prstGeom>
+          <a:solidFill>
+            <a:srgbClr val="00A8A8"/>
+          </a:solidFill>
+          <a:ln>
+            <a:noFill/>
+          </a:ln>
+          <a:effectLst/>
+        </p:spPr>
+        <p:style>
+          <a:lnRef idx="1">
+            <a:schemeClr val="accent1"/>
+          </a:lnRef>
+          <a:fillRef idx="3">
+            <a:schemeClr val="accent1"/>
+          </a:fillRef>
+          <a:effectRef idx="2">
+            <a:schemeClr val="accent1"/>
+          </a:effectRef>
+          <a:fontRef idx="minor">
+            <a:schemeClr val="lt1"/>
+          </a:fontRef>
+        </p:style>
+        <p:txBody>
+          <a:bodyPr rtlCol="0" anchor="ctr"/>
+          <a:lstStyle/>
+          <a:p>
+            <a:pPr algn="ctr"/>
+          </a:p>
+        </p:txBody>
+      </p:sp>
+      <p:sp>
+        <p:nvSpPr>
+          <p:cNvPr id="6" name="Rectangle 5"/>
+          <p:cNvSpPr/>
+          <p:nvPr/>
+        </p:nvSpPr>
+        <p:spPr>
+          <a:xfrm>
+            <a:off x="502920" y="1600200"/>
+            <a:ext cx="5394960" cy="4206240"/>
+          </a:xfrm>
+          <a:prstGeom prst="rect">
+            <a:avLst/>
+          </a:prstGeom>
+          <a:solidFill>
+            <a:srgbClr val="F2F6F8"/>
+          </a:solidFill>
+          <a:ln>
+            <a:noFill/>
+          </a:ln>
+          <a:effectLst/>
+        </p:spPr>
+        <p:style>
+          <a:lnRef idx="1">
+            <a:schemeClr val="accent1"/>
+          </a:lnRef>
+          <a:fillRef idx="3">
+            <a:schemeClr val="accent1"/>
+          </a:fillRef>
+          <a:effectRef idx="2">
+            <a:schemeClr val="accent1"/>
+          </a:effectRef>
+          <a:fontRef idx="minor">
+            <a:schemeClr val="lt1"/>
+          </a:fontRef>
+        </p:style>
+        <p:txBody>
+          <a:bodyPr rtlCol="0" anchor="ctr"/>
+          <a:lstStyle/>
+          <a:p>
+            <a:pPr algn="ctr"/>
+          </a:p>
+        </p:txBody>
+      </p:sp>
+      <p:sp>
+        <p:nvSpPr>
+          <p:cNvPr id="7" name="Rectangle 6"/>
+          <p:cNvSpPr/>
+          <p:nvPr/>
+        </p:nvSpPr>
+        <p:spPr>
+          <a:xfrm>
+            <a:off x="502920" y="1600200"/>
+            <a:ext cx="5394960" cy="38100"/>
+          </a:xfrm>
+          <a:prstGeom prst="rect">
+            <a:avLst/>
+          </a:prstGeom>
+          <a:solidFill>
+            <a:srgbClr val="00A8A8"/>
+          </a:solidFill>
+          <a:ln>
+            <a:noFill/>
+          </a:ln>
+          <a:effectLst/>
+        </p:spPr>
+        <p:style>
+          <a:lnRef idx="1">
+            <a:schemeClr val="accent1"/>
+          </a:lnRef>
+          <a:fillRef idx="3">
+            <a:schemeClr val="accent1"/>
+          </a:fillRef>
+          <a:effectRef idx="2">
+            <a:schemeClr val="accent1"/>
+          </a:effectRef>
+          <a:fontRef idx="minor">
+            <a:schemeClr val="lt1"/>
+          </a:fontRef>
+        </p:style>
+        <p:txBody>
+          <a:bodyPr rtlCol="0" anchor="ctr"/>
+          <a:lstStyle/>
+          <a:p>
+            <a:pPr algn="ctr"/>
+          </a:p>
+        </p:txBody>
+      </p:sp>
+      <p:sp>
+        <p:nvSpPr>
+          <p:cNvPr id="8" name="TextBox 7"/>
           <p:cNvSpPr txBox="1"/>
           <p:nvPr/>
         </p:nvSpPr>
         <p:spPr>
           <a:xfrm>
-            <a:off x="548640" y="6400800"/>
-            <a:ext cx="11064240" cy="365760"/>
+            <a:off x="640080" y="1691640"/>
+            <a:ext cx="5120640" cy="4023360"/>
           </a:xfrm>
           <a:prstGeom prst="rect">
             <a:avLst/>
@@ -5543,19 +8487,464 @@
           <a:noFill/>
         </p:spPr>
         <p:txBody>
-          <a:bodyPr wrap="square" anchor="t">
+          <a:bodyPr wrap="square">
             <a:spAutoFit/>
           </a:bodyPr>
           <a:lstStyle/>
           <a:p>
-            <a:r>
-              <a:rPr sz="900" b="0" i="0">
-                <a:solidFill>
-                  <a:srgbClr val="5B6670"/>
-                </a:solidFill>
-                <a:latin typeface="Calibri"/>
-              </a:rPr>
-              <a:t>Suivi d'Exploitation Multi-Squads</a:t>
+            <a:pPr>
+              <a:spcAft>
+                <a:spcPts val="400"/>
+              </a:spcAft>
+            </a:pPr>
+            <a:r>
+              <a:rPr sz="1500" b="1" i="0">
+                <a:solidFill>
+                  <a:srgbClr val="00A8A8"/>
+                </a:solidFill>
+                <a:latin typeface="Calibri"/>
+              </a:rPr>
+              <a:t>1 · Filtres d'éligibilité</a:t>
+            </a:r>
+          </a:p>
+          <a:p>
+            <a:pPr>
+              <a:spcAft>
+                <a:spcPts val="300"/>
+              </a:spcAft>
+            </a:pPr>
+            <a:r>
+              <a:rPr sz="1400" b="0" i="0">
+                <a:solidFill>
+                  <a:srgbClr val="212B36"/>
+                </a:solidFill>
+                <a:latin typeface="Calibri"/>
+              </a:rPr>
+              <a:t>Membres </a:t>
+            </a:r>
+            <a:r>
+              <a:rPr sz="1400" b="1" i="0">
+                <a:solidFill>
+                  <a:srgbClr val="212B36"/>
+                </a:solidFill>
+                <a:latin typeface="Calibri"/>
+              </a:rPr>
+              <a:t>actifs</a:t>
+            </a:r>
+            <a:r>
+              <a:rPr sz="1400" b="0" i="0">
+                <a:solidFill>
+                  <a:srgbClr val="212B36"/>
+                </a:solidFill>
+                <a:latin typeface="Calibri"/>
+              </a:rPr>
+              <a:t> du rôle</a:t>
+            </a:r>
+          </a:p>
+          <a:p>
+            <a:pPr>
+              <a:spcAft>
+                <a:spcPts val="300"/>
+              </a:spcAft>
+            </a:pPr>
+            <a:r>
+              <a:rPr sz="1400" b="1" i="0">
+                <a:solidFill>
+                  <a:srgbClr val="212B36"/>
+                </a:solidFill>
+                <a:latin typeface="Calibri"/>
+              </a:rPr>
+              <a:t>Congés semaine cible</a:t>
+            </a:r>
+            <a:r>
+              <a:rPr sz="1400" b="0" i="0">
+                <a:solidFill>
+                  <a:srgbClr val="212B36"/>
+                </a:solidFill>
+                <a:latin typeface="Calibri"/>
+              </a:rPr>
+              <a:t> : exclu si jours ouvrés en congé &gt; </a:t>
+            </a:r>
+            <a:r>
+              <a:rPr sz="1400" b="1" i="0">
+                <a:solidFill>
+                  <a:srgbClr val="212B36"/>
+                </a:solidFill>
+                <a:latin typeface="Calibri"/>
+              </a:rPr>
+              <a:t>ToleranceCongesJours</a:t>
+            </a:r>
+            <a:r>
+              <a:rPr sz="1400" b="0" i="0">
+                <a:solidFill>
+                  <a:srgbClr val="212B36"/>
+                </a:solidFill>
+                <a:latin typeface="Calibri"/>
+              </a:rPr>
+              <a:t> (défaut 0 = exclu dès 1 jour ; 1 = compatible temps partiel)</a:t>
+            </a:r>
+          </a:p>
+          <a:p>
+            <a:pPr>
+              <a:spcAft>
+                <a:spcPts val="300"/>
+              </a:spcAft>
+            </a:pPr>
+            <a:r>
+              <a:rPr sz="1400" b="1" i="0">
+                <a:solidFill>
+                  <a:srgbClr val="212B36"/>
+                </a:solidFill>
+                <a:latin typeface="Calibri"/>
+              </a:rPr>
+              <a:t>Vendredi précédent</a:t>
+            </a:r>
+            <a:r>
+              <a:rPr sz="1400" b="0" i="0">
+                <a:solidFill>
+                  <a:srgbClr val="212B36"/>
+                </a:solidFill>
+                <a:latin typeface="Calibri"/>
+              </a:rPr>
+              <a:t> (passation) : exclusion </a:t>
+            </a:r>
+            <a:r>
+              <a:rPr sz="1400" b="1" i="0">
+                <a:solidFill>
+                  <a:srgbClr val="212B36"/>
+                </a:solidFill>
+                <a:latin typeface="Calibri"/>
+              </a:rPr>
+              <a:t>stricte</a:t>
+            </a:r>
+            <a:r>
+              <a:rPr sz="1400" b="0" i="0">
+                <a:solidFill>
+                  <a:srgbClr val="212B36"/>
+                </a:solidFill>
+                <a:latin typeface="Calibri"/>
+              </a:rPr>
+              <a:t>, hors tolérance</a:t>
+            </a:r>
+          </a:p>
+          <a:p>
+            <a:pPr>
+              <a:spcAft>
+                <a:spcPts val="300"/>
+              </a:spcAft>
+            </a:pPr>
+            <a:r>
+              <a:rPr sz="1400" b="1" i="0">
+                <a:solidFill>
+                  <a:srgbClr val="212B36"/>
+                </a:solidFill>
+                <a:latin typeface="Calibri"/>
+              </a:rPr>
+              <a:t>Pas 2 semaines d'affilée</a:t>
+            </a:r>
+            <a:r>
+              <a:rPr sz="1400" b="0" i="0">
+                <a:solidFill>
+                  <a:srgbClr val="212B36"/>
+                </a:solidFill>
+                <a:latin typeface="Calibri"/>
+              </a:rPr>
+              <a:t> : le désigné précédent du rôle est écarté (sauf s'il est seul → il refait, WARN journalisé)</a:t>
+            </a:r>
+          </a:p>
+        </p:txBody>
+      </p:sp>
+      <p:sp>
+        <p:nvSpPr>
+          <p:cNvPr id="9" name="Rectangle 8"/>
+          <p:cNvSpPr/>
+          <p:nvPr/>
+        </p:nvSpPr>
+        <p:spPr>
+          <a:xfrm>
+            <a:off x="6263640" y="1600200"/>
+            <a:ext cx="5394960" cy="4206240"/>
+          </a:xfrm>
+          <a:prstGeom prst="rect">
+            <a:avLst/>
+          </a:prstGeom>
+          <a:solidFill>
+            <a:srgbClr val="F2F6F8"/>
+          </a:solidFill>
+          <a:ln>
+            <a:noFill/>
+          </a:ln>
+          <a:effectLst/>
+        </p:spPr>
+        <p:style>
+          <a:lnRef idx="1">
+            <a:schemeClr val="accent1"/>
+          </a:lnRef>
+          <a:fillRef idx="3">
+            <a:schemeClr val="accent1"/>
+          </a:fillRef>
+          <a:effectRef idx="2">
+            <a:schemeClr val="accent1"/>
+          </a:effectRef>
+          <a:fontRef idx="minor">
+            <a:schemeClr val="lt1"/>
+          </a:fontRef>
+        </p:style>
+        <p:txBody>
+          <a:bodyPr rtlCol="0" anchor="ctr"/>
+          <a:lstStyle/>
+          <a:p>
+            <a:pPr algn="ctr"/>
+          </a:p>
+        </p:txBody>
+      </p:sp>
+      <p:sp>
+        <p:nvSpPr>
+          <p:cNvPr id="10" name="Rectangle 9"/>
+          <p:cNvSpPr/>
+          <p:nvPr/>
+        </p:nvSpPr>
+        <p:spPr>
+          <a:xfrm>
+            <a:off x="6263640" y="1600200"/>
+            <a:ext cx="5394960" cy="38100"/>
+          </a:xfrm>
+          <a:prstGeom prst="rect">
+            <a:avLst/>
+          </a:prstGeom>
+          <a:solidFill>
+            <a:srgbClr val="2E75B6"/>
+          </a:solidFill>
+          <a:ln>
+            <a:noFill/>
+          </a:ln>
+          <a:effectLst/>
+        </p:spPr>
+        <p:style>
+          <a:lnRef idx="1">
+            <a:schemeClr val="accent1"/>
+          </a:lnRef>
+          <a:fillRef idx="3">
+            <a:schemeClr val="accent1"/>
+          </a:fillRef>
+          <a:effectRef idx="2">
+            <a:schemeClr val="accent1"/>
+          </a:effectRef>
+          <a:fontRef idx="minor">
+            <a:schemeClr val="lt1"/>
+          </a:fontRef>
+        </p:style>
+        <p:txBody>
+          <a:bodyPr rtlCol="0" anchor="ctr"/>
+          <a:lstStyle/>
+          <a:p>
+            <a:pPr algn="ctr"/>
+          </a:p>
+        </p:txBody>
+      </p:sp>
+      <p:sp>
+        <p:nvSpPr>
+          <p:cNvPr id="11" name="TextBox 10"/>
+          <p:cNvSpPr txBox="1"/>
+          <p:nvPr/>
+        </p:nvSpPr>
+        <p:spPr>
+          <a:xfrm>
+            <a:off x="6400800" y="1691640"/>
+            <a:ext cx="5120640" cy="4023360"/>
+          </a:xfrm>
+          <a:prstGeom prst="rect">
+            <a:avLst/>
+          </a:prstGeom>
+          <a:noFill/>
+        </p:spPr>
+        <p:txBody>
+          <a:bodyPr wrap="square">
+            <a:spAutoFit/>
+          </a:bodyPr>
+          <a:lstStyle/>
+          <a:p>
+            <a:pPr>
+              <a:spcAft>
+                <a:spcPts val="400"/>
+              </a:spcAft>
+            </a:pPr>
+            <a:r>
+              <a:rPr sz="1500" b="1" i="0">
+                <a:solidFill>
+                  <a:srgbClr val="2E75B6"/>
+                </a:solidFill>
+                <a:latin typeface="Calibri"/>
+              </a:rPr>
+              <a:t>2 · Tri (on retient le premier)</a:t>
+            </a:r>
+          </a:p>
+          <a:p>
+            <a:pPr>
+              <a:spcAft>
+                <a:spcPts val="300"/>
+              </a:spcAft>
+            </a:pPr>
+            <a:r>
+              <a:rPr sz="1400" b="0" i="0">
+                <a:solidFill>
+                  <a:srgbClr val="212B36"/>
+                </a:solidFill>
+                <a:latin typeface="Calibri"/>
+              </a:rPr>
+              <a:t>① le </a:t>
+            </a:r>
+            <a:r>
+              <a:rPr sz="1400" b="1" i="0">
+                <a:solidFill>
+                  <a:srgbClr val="212B36"/>
+                </a:solidFill>
+                <a:latin typeface="Calibri"/>
+              </a:rPr>
+              <a:t>moins souvent désigné</a:t>
+            </a:r>
+            <a:r>
+              <a:rPr sz="1400" b="0" i="0">
+                <a:solidFill>
+                  <a:srgbClr val="212B36"/>
+                </a:solidFill>
+                <a:latin typeface="Calibri"/>
+              </a:rPr>
+              <a:t> (NB_FOIS = colonne Compteur) — équité réelle, rattrapage automatique</a:t>
+            </a:r>
+          </a:p>
+          <a:p>
+            <a:pPr>
+              <a:spcAft>
+                <a:spcPts val="300"/>
+              </a:spcAft>
+            </a:pPr>
+            <a:r>
+              <a:rPr sz="1400" b="0" i="0">
+                <a:solidFill>
+                  <a:srgbClr val="212B36"/>
+                </a:solidFill>
+                <a:latin typeface="Calibri"/>
+              </a:rPr>
+              <a:t>② à égalité : </a:t>
+            </a:r>
+            <a:r>
+              <a:rPr sz="1400" b="1" i="0">
+                <a:solidFill>
+                  <a:srgbClr val="212B36"/>
+                </a:solidFill>
+                <a:latin typeface="Calibri"/>
+              </a:rPr>
+              <a:t>dernière désignation la plus ancienne</a:t>
+            </a:r>
+            <a:r>
+              <a:rPr sz="1400" b="0" i="0">
+                <a:solidFill>
+                  <a:srgbClr val="212B36"/>
+                </a:solidFill>
+                <a:latin typeface="Calibri"/>
+              </a:rPr>
+              <a:t> — jamais désigné = priorité absolue</a:t>
+            </a:r>
+          </a:p>
+          <a:p>
+            <a:pPr>
+              <a:spcAft>
+                <a:spcPts val="300"/>
+              </a:spcAft>
+            </a:pPr>
+            <a:r>
+              <a:rPr sz="1400" b="0" i="0">
+                <a:solidFill>
+                  <a:srgbClr val="212B36"/>
+                </a:solidFill>
+                <a:latin typeface="Calibri"/>
+              </a:rPr>
+              <a:t>③ à égalité : ordre alphabétique</a:t>
+            </a:r>
+          </a:p>
+          <a:p>
+            <a:pPr>
+              <a:spcAft>
+                <a:spcPts val="300"/>
+              </a:spcAft>
+            </a:pPr>
+          </a:p>
+          <a:p>
+            <a:pPr>
+              <a:spcAft>
+                <a:spcPts val="300"/>
+              </a:spcAft>
+            </a:pPr>
+            <a:r>
+              <a:rPr sz="1400" b="0" i="0">
+                <a:solidFill>
+                  <a:srgbClr val="212B36"/>
+                </a:solidFill>
+                <a:latin typeface="Calibri"/>
+              </a:rPr>
+              <a:t>Dernière désignation : </a:t>
+            </a:r>
+            <a:r>
+              <a:rPr sz="1400" b="1" i="0">
+                <a:solidFill>
+                  <a:srgbClr val="212B36"/>
+                </a:solidFill>
+                <a:latin typeface="Calibri"/>
+              </a:rPr>
+              <a:t>Historique</a:t>
+            </a:r>
+            <a:r>
+              <a:rPr sz="1400" b="0" i="0">
+                <a:solidFill>
+                  <a:srgbClr val="212B36"/>
+                </a:solidFill>
+                <a:latin typeface="Calibri"/>
+              </a:rPr>
+              <a:t> en priorité, sinon graine </a:t>
+            </a:r>
+            <a:r>
+              <a:rPr sz="1400" b="1" i="0">
+                <a:solidFill>
+                  <a:srgbClr val="212B36"/>
+                </a:solidFill>
+                <a:latin typeface="Calibri"/>
+              </a:rPr>
+              <a:t>DateDernierSuivi</a:t>
+            </a:r>
+            <a:r>
+              <a:rPr sz="1400" b="0" i="0">
+                <a:solidFill>
+                  <a:srgbClr val="212B36"/>
+                </a:solidFill>
+                <a:latin typeface="Calibri"/>
+              </a:rPr>
+              <a:t> (initialisation d'une équipe existante)</a:t>
+            </a:r>
+          </a:p>
+          <a:p>
+            <a:pPr>
+              <a:spcAft>
+                <a:spcPts val="300"/>
+              </a:spcAft>
+            </a:pPr>
+            <a:r>
+              <a:rPr sz="1400" b="1" i="0">
+                <a:solidFill>
+                  <a:srgbClr val="212B36"/>
+                </a:solidFill>
+                <a:latin typeface="Calibri"/>
+              </a:rPr>
+              <a:t>Aucun candidat ? → ALERTE atomique</a:t>
+            </a:r>
+            <a:r>
+              <a:rPr sz="1400" b="0" i="0">
+                <a:solidFill>
+                  <a:srgbClr val="212B36"/>
+                </a:solidFill>
+                <a:latin typeface="Calibri"/>
+              </a:rPr>
+              <a:t> : rien n'est désigné, mail aux EmailsAdmin</a:t>
             </a:r>
           </a:p>
         </p:txBody>
@@ -5587,51 +8976,7 @@
         <p:spPr>
           <a:xfrm>
             <a:off x="0" y="0"/>
-            <a:ext cx="12191695" cy="1051560"/>
-          </a:xfrm>
-          <a:prstGeom prst="rect">
-            <a:avLst/>
-          </a:prstGeom>
-          <a:solidFill>
-            <a:srgbClr val="005BAA"/>
-          </a:solidFill>
-          <a:ln>
-            <a:noFill/>
-          </a:ln>
-          <a:effectLst/>
-        </p:spPr>
-        <p:style>
-          <a:lnRef idx="1">
-            <a:schemeClr val="accent1"/>
-          </a:lnRef>
-          <a:fillRef idx="3">
-            <a:schemeClr val="accent1"/>
-          </a:fillRef>
-          <a:effectRef idx="2">
-            <a:schemeClr val="accent1"/>
-          </a:effectRef>
-          <a:fontRef idx="minor">
-            <a:schemeClr val="lt1"/>
-          </a:fontRef>
-        </p:style>
-        <p:txBody>
-          <a:bodyPr rtlCol="0" anchor="ctr"/>
-          <a:lstStyle/>
-          <a:p>
-            <a:pPr algn="ctr"/>
-          </a:p>
-        </p:txBody>
-      </p:sp>
-      <p:sp>
-        <p:nvSpPr>
-          <p:cNvPr id="3" name="Rectangle 2"/>
-          <p:cNvSpPr/>
-          <p:nvPr/>
-        </p:nvSpPr>
-        <p:spPr>
-          <a:xfrm>
-            <a:off x="0" y="1051560"/>
-            <a:ext cx="12191695" cy="38100"/>
+            <a:ext cx="201168" cy="6858000"/>
           </a:xfrm>
           <a:prstGeom prst="rect">
             <a:avLst/>
@@ -5668,14 +9013,14 @@
       </p:sp>
       <p:sp>
         <p:nvSpPr>
-          <p:cNvPr id="4" name="TextBox 3"/>
+          <p:cNvPr id="3" name="TextBox 2"/>
           <p:cNvSpPr txBox="1"/>
           <p:nvPr/>
         </p:nvSpPr>
         <p:spPr>
           <a:xfrm>
-            <a:off x="548640" y="109728"/>
-            <a:ext cx="11064240" cy="914400"/>
+            <a:off x="502920" y="256032"/>
+            <a:ext cx="11247120" cy="822960"/>
           </a:xfrm>
           <a:prstGeom prst="rect">
             <a:avLst/>
@@ -5683,44 +9028,33 @@
           <a:noFill/>
         </p:spPr>
         <p:txBody>
-          <a:bodyPr wrap="square" anchor="t">
+          <a:bodyPr wrap="square">
             <a:spAutoFit/>
           </a:bodyPr>
           <a:lstStyle/>
           <a:p>
             <a:r>
-              <a:rPr sz="1200" b="1" i="0">
-                <a:solidFill>
-                  <a:srgbClr val="CFE2F3"/>
-                </a:solidFill>
-                <a:latin typeface="Calibri"/>
-              </a:rPr>
-              <a:t>CHARTE HTML VIA LE MOTEUR COMMUN</a:t>
-            </a:r>
-          </a:p>
-          <a:p>
-            <a:r>
-              <a:rPr sz="2800" b="1" i="0">
-                <a:solidFill>
-                  <a:srgbClr val="FFFFFF"/>
-                </a:solidFill>
-                <a:latin typeface="Calibri"/>
-              </a:rPr>
-              <a:t>Contenu des mails</a:t>
-            </a:r>
-          </a:p>
-        </p:txBody>
-      </p:sp>
-      <p:sp>
-        <p:nvSpPr>
-          <p:cNvPr id="5" name="TextBox 4"/>
+              <a:rPr sz="3000" b="1" i="0">
+                <a:solidFill>
+                  <a:srgbClr val="212B36"/>
+                </a:solidFill>
+                <a:latin typeface="Calibri"/>
+              </a:rPr>
+              <a:t>Le compteur : cumul vivant, confirmé au Rappel</a:t>
+            </a:r>
+          </a:p>
+        </p:txBody>
+      </p:sp>
+      <p:sp>
+        <p:nvSpPr>
+          <p:cNvPr id="4" name="TextBox 3"/>
           <p:cNvSpPr txBox="1"/>
           <p:nvPr/>
         </p:nvSpPr>
         <p:spPr>
           <a:xfrm>
-            <a:off x="640080" y="1325880"/>
-            <a:ext cx="10881360" cy="5029200"/>
+            <a:off x="502920" y="868680"/>
+            <a:ext cx="11247120" cy="457200"/>
           </a:xfrm>
           <a:prstGeom prst="rect">
             <a:avLst/>
@@ -5728,105 +9062,64 @@
           <a:noFill/>
         </p:spPr>
         <p:txBody>
-          <a:bodyPr wrap="square" anchor="t">
+          <a:bodyPr wrap="square">
             <a:spAutoFit/>
           </a:bodyPr>
           <a:lstStyle/>
           <a:p>
-            <a:pPr>
-              <a:spcAft>
-                <a:spcPts val="600"/>
-              </a:spcAft>
-            </a:pPr>
-            <a:r>
-              <a:rPr sz="1800" b="1" i="0">
-                <a:solidFill>
-                  <a:srgbClr val="1F2A37"/>
-                </a:solidFill>
-                <a:latin typeface="Calibri"/>
-              </a:rPr>
-              <a:t>▪  Annonce : désignation + compteurs par rôle + prévision des 3 prochaines semaines.</a:t>
-            </a:r>
-          </a:p>
-          <a:p>
-            <a:pPr lvl="1">
-              <a:spcAft>
-                <a:spcPts val="600"/>
-              </a:spcAft>
-            </a:pPr>
-            <a:r>
-              <a:rPr sz="1500" b="0" i="0">
-                <a:solidFill>
-                  <a:srgbClr val="5B6670"/>
-                </a:solidFill>
-                <a:latin typeface="Calibri"/>
-              </a:rPr>
-              <a:t>–  Destinataires = désignés ; copie = EmailsCopieSquad.</a:t>
-            </a:r>
-          </a:p>
-          <a:p>
-            <a:pPr>
-              <a:spcAft>
-                <a:spcPts val="600"/>
-              </a:spcAft>
-            </a:pPr>
-            <a:r>
-              <a:rPr sz="1800" b="1" i="0">
-                <a:solidFill>
-                  <a:srgbClr val="1F2A37"/>
-                </a:solidFill>
-                <a:latin typeface="Calibri"/>
-              </a:rPr>
-              <a:t>▪  Rappel : aux désignés de la semaine en cours.</a:t>
-            </a:r>
-          </a:p>
-          <a:p>
-            <a:pPr>
-              <a:spcAft>
-                <a:spcPts val="600"/>
-              </a:spcAft>
-            </a:pPr>
-            <a:r>
-              <a:rPr sz="1800" b="1" i="0">
-                <a:solidFill>
-                  <a:srgbClr val="1F2A37"/>
-                </a:solidFill>
-                <a:latin typeface="Calibri"/>
-              </a:rPr>
-              <a:t>▪  Alerte : aux EmailsAdmin quand une désignation est impossible.</a:t>
-            </a:r>
-          </a:p>
-          <a:p>
-            <a:pPr>
-              <a:spcAft>
-                <a:spcPts val="600"/>
-              </a:spcAft>
-            </a:pPr>
-            <a:r>
-              <a:rPr sz="1800" b="1" i="0">
-                <a:solidFill>
-                  <a:srgbClr val="5B6670"/>
-                </a:solidFill>
-                <a:latin typeface="Calibri"/>
-              </a:rPr>
-              <a:t>▪  SMTP, expéditeur, sujet et charte viennent du JSON. Pas de repli si moteur absent.</a:t>
-            </a:r>
-          </a:p>
-          <a:p>
-            <a:pPr>
-              <a:spcAft>
-                <a:spcPts val="600"/>
-              </a:spcAft>
-            </a:pPr>
-            <a:r>
-              <a:rPr sz="1800" b="1" i="0">
-                <a:solidFill>
-                  <a:srgbClr val="F39C12"/>
-                </a:solidFill>
-                <a:latin typeface="Calibri"/>
-              </a:rPr>
-              <a:t>▪  ⚠ Pas de garde anti-doublon : relancer renvoie un mail (le calcul, lui, est idempotent).</a:t>
-            </a:r>
+            <a:r>
+              <a:rPr sz="1500" b="0" i="1">
+                <a:solidFill>
+                  <a:srgbClr val="5A6672"/>
+                </a:solidFill>
+                <a:latin typeface="Calibri"/>
+              </a:rPr>
+              <a:t>Pourquoi l'annonce du vendredi n'incrémente pas</a:t>
+            </a:r>
+          </a:p>
+        </p:txBody>
+      </p:sp>
+      <p:sp>
+        <p:nvSpPr>
+          <p:cNvPr id="5" name="Rectangle 4"/>
+          <p:cNvSpPr/>
+          <p:nvPr/>
+        </p:nvSpPr>
+        <p:spPr>
+          <a:xfrm>
+            <a:off x="502920" y="1234440"/>
+            <a:ext cx="11155680" cy="27940"/>
+          </a:xfrm>
+          <a:prstGeom prst="rect">
+            <a:avLst/>
+          </a:prstGeom>
+          <a:solidFill>
+            <a:srgbClr val="00A8A8"/>
+          </a:solidFill>
+          <a:ln>
+            <a:noFill/>
+          </a:ln>
+          <a:effectLst/>
+        </p:spPr>
+        <p:style>
+          <a:lnRef idx="1">
+            <a:schemeClr val="accent1"/>
+          </a:lnRef>
+          <a:fillRef idx="3">
+            <a:schemeClr val="accent1"/>
+          </a:fillRef>
+          <a:effectRef idx="2">
+            <a:schemeClr val="accent1"/>
+          </a:effectRef>
+          <a:fontRef idx="minor">
+            <a:schemeClr val="lt1"/>
+          </a:fontRef>
+        </p:style>
+        <p:txBody>
+          <a:bodyPr rtlCol="0" anchor="ctr"/>
+          <a:lstStyle/>
+          <a:p>
+            <a:pPr algn="ctr"/>
           </a:p>
         </p:txBody>
       </p:sp>
@@ -5838,8 +9131,8 @@
         </p:nvSpPr>
         <p:spPr>
           <a:xfrm>
-            <a:off x="548640" y="6400800"/>
-            <a:ext cx="11064240" cy="365760"/>
+            <a:off x="502920" y="1554480"/>
+            <a:ext cx="11155680" cy="4937760"/>
           </a:xfrm>
           <a:prstGeom prst="rect">
             <a:avLst/>
@@ -5847,19 +9140,260 @@
           <a:noFill/>
         </p:spPr>
         <p:txBody>
-          <a:bodyPr wrap="square" anchor="t">
+          <a:bodyPr wrap="square">
             <a:spAutoFit/>
           </a:bodyPr>
           <a:lstStyle/>
           <a:p>
-            <a:r>
-              <a:rPr sz="900" b="0" i="0">
-                <a:solidFill>
-                  <a:srgbClr val="5B6670"/>
-                </a:solidFill>
-                <a:latin typeface="Calibri"/>
-              </a:rPr>
-              <a:t>Suivi d'Exploitation Multi-Squads</a:t>
+            <a:pPr>
+              <a:spcAft>
+                <a:spcPts val="800"/>
+              </a:spcAft>
+              <a:buFont typeface="Arial"/>
+              <a:buChar char="▪"/>
+            </a:pPr>
+            <a:r>
+              <a:rPr sz="1700" b="1" i="0">
+                <a:solidFill>
+                  <a:srgbClr val="212B36"/>
+                </a:solidFill>
+                <a:latin typeface="Calibri"/>
+              </a:rPr>
+              <a:t>NB_FOIS = colonne Compteur</a:t>
+            </a:r>
+            <a:r>
+              <a:rPr sz="1700" b="0" i="0">
+                <a:solidFill>
+                  <a:srgbClr val="212B36"/>
+                </a:solidFill>
+                <a:latin typeface="Calibri"/>
+              </a:rPr>
+              <a:t> de la feuille Membres : lue telle quelle, </a:t>
+            </a:r>
+            <a:r>
+              <a:rPr sz="1700" b="1" i="0">
+                <a:solidFill>
+                  <a:srgbClr val="212B36"/>
+                </a:solidFill>
+                <a:latin typeface="Calibri"/>
+              </a:rPr>
+              <a:t>incrémentée (+1) et réécrite par le script</a:t>
+            </a:r>
+            <a:r>
+              <a:rPr sz="1700" b="0" i="0">
+                <a:solidFill>
+                  <a:srgbClr val="212B36"/>
+                </a:solidFill>
+                <a:latin typeface="Calibri"/>
+              </a:rPr>
+              <a:t> — seule colonne écrite dans Membres</a:t>
+            </a:r>
+          </a:p>
+          <a:p>
+            <a:pPr>
+              <a:spcAft>
+                <a:spcPts val="800"/>
+              </a:spcAft>
+              <a:buFont typeface="Arial"/>
+              <a:buChar char="▪"/>
+            </a:pPr>
+            <a:r>
+              <a:rPr sz="1700" b="1" i="0">
+                <a:solidFill>
+                  <a:srgbClr val="212B36"/>
+                </a:solidFill>
+                <a:latin typeface="Calibri"/>
+              </a:rPr>
+              <a:t>Uniquement au Rappel du lundi</a:t>
+            </a:r>
+            <a:r>
+              <a:rPr sz="1700" b="0" i="0">
+                <a:solidFill>
+                  <a:srgbClr val="212B36"/>
+                </a:solidFill>
+                <a:latin typeface="Calibri"/>
+              </a:rPr>
+              <a:t> :</a:t>
+            </a:r>
+          </a:p>
+          <a:p>
+            <a:pPr lvl="1">
+              <a:spcAft>
+                <a:spcPts val="800"/>
+              </a:spcAft>
+              <a:buFont typeface="Arial"/>
+              <a:buChar char="–"/>
+            </a:pPr>
+            <a:r>
+              <a:rPr sz="1500" b="0" i="0">
+                <a:solidFill>
+                  <a:srgbClr val="5A6672"/>
+                </a:solidFill>
+                <a:latin typeface="Calibri"/>
+              </a:rPr>
+              <a:t>l'annonce du vendredi est </a:t>
+            </a:r>
+            <a:r>
+              <a:rPr sz="1500" b="1" i="0">
+                <a:solidFill>
+                  <a:srgbClr val="5A6672"/>
+                </a:solidFill>
+                <a:latin typeface="Calibri"/>
+              </a:rPr>
+              <a:t>prévisionnelle</a:t>
+            </a:r>
+            <a:r>
+              <a:rPr sz="1500" b="0" i="0">
+                <a:solidFill>
+                  <a:srgbClr val="5A6672"/>
+                </a:solidFill>
+                <a:latin typeface="Calibri"/>
+              </a:rPr>
+              <a:t> — congés et changements peuvent survenir le week-end</a:t>
+            </a:r>
+          </a:p>
+          <a:p>
+            <a:pPr lvl="1">
+              <a:spcAft>
+                <a:spcPts val="800"/>
+              </a:spcAft>
+              <a:buFont typeface="Arial"/>
+              <a:buChar char="–"/>
+            </a:pPr>
+            <a:r>
+              <a:rPr sz="1500" b="0" i="0">
+                <a:solidFill>
+                  <a:srgbClr val="5A6672"/>
+                </a:solidFill>
+                <a:latin typeface="Calibri"/>
+              </a:rPr>
+              <a:t>seul le Rappel </a:t>
+            </a:r>
+            <a:r>
+              <a:rPr sz="1500" b="1" i="0">
+                <a:solidFill>
+                  <a:srgbClr val="5A6672"/>
+                </a:solidFill>
+                <a:latin typeface="Calibri"/>
+              </a:rPr>
+              <a:t>confirme</a:t>
+            </a:r>
+            <a:r>
+              <a:rPr sz="1500" b="0" i="0">
+                <a:solidFill>
+                  <a:srgbClr val="5A6672"/>
+                </a:solidFill>
+                <a:latin typeface="Calibri"/>
+              </a:rPr>
+              <a:t> qui assure réellement le suivi</a:t>
+            </a:r>
+          </a:p>
+          <a:p>
+            <a:pPr>
+              <a:spcAft>
+                <a:spcPts val="800"/>
+              </a:spcAft>
+              <a:buFont typeface="Arial"/>
+              <a:buChar char="▪"/>
+            </a:pPr>
+            <a:r>
+              <a:rPr sz="1700" b="1" i="0">
+                <a:solidFill>
+                  <a:srgbClr val="212B36"/>
+                </a:solidFill>
+                <a:latin typeface="Calibri"/>
+              </a:rPr>
+              <a:t>Idempotence sur relance</a:t>
+            </a:r>
+            <a:r>
+              <a:rPr sz="1700" b="0" i="0">
+                <a:solidFill>
+                  <a:srgbClr val="212B36"/>
+                </a:solidFill>
+                <a:latin typeface="Calibri"/>
+              </a:rPr>
+              <a:t> : avant recalcul, le script </a:t>
+            </a:r>
+            <a:r>
+              <a:rPr sz="1700" b="1" i="0">
+                <a:solidFill>
+                  <a:srgbClr val="212B36"/>
+                </a:solidFill>
+                <a:latin typeface="Calibri"/>
+              </a:rPr>
+              <a:t>annule (-1)</a:t>
+            </a:r>
+            <a:r>
+              <a:rPr sz="1700" b="0" i="0">
+                <a:solidFill>
+                  <a:srgbClr val="212B36"/>
+                </a:solidFill>
+                <a:latin typeface="Calibri"/>
+              </a:rPr>
+              <a:t> l'incrément d'un Rappel précédent (lignes avec DateRappel renseignée) puis ré-incrémente → pas de double comptage</a:t>
+            </a:r>
+          </a:p>
+          <a:p>
+            <a:pPr>
+              <a:spcAft>
+                <a:spcPts val="800"/>
+              </a:spcAft>
+              <a:buFont typeface="Arial"/>
+              <a:buChar char="▪"/>
+            </a:pPr>
+            <a:r>
+              <a:rPr sz="1700" b="1" i="0">
+                <a:solidFill>
+                  <a:srgbClr val="212B36"/>
+                </a:solidFill>
+                <a:latin typeface="Calibri"/>
+              </a:rPr>
+              <a:t>Atomicité</a:t>
+            </a:r>
+            <a:r>
+              <a:rPr sz="1700" b="0" i="0">
+                <a:solidFill>
+                  <a:srgbClr val="212B36"/>
+                </a:solidFill>
+                <a:latin typeface="Calibri"/>
+              </a:rPr>
+              <a:t> : compteur, historique et mail sont écrits dans un .tmp promu en fin de traitement — si le mail échoue, rien n'est persisté</a:t>
+            </a:r>
+          </a:p>
+          <a:p>
+            <a:pPr>
+              <a:spcAft>
+                <a:spcPts val="800"/>
+              </a:spcAft>
+              <a:buFont typeface="Arial"/>
+              <a:buChar char="▪"/>
+            </a:pPr>
+            <a:r>
+              <a:rPr sz="1700" b="0" i="0">
+                <a:solidFill>
+                  <a:srgbClr val="212B36"/>
+                </a:solidFill>
+                <a:latin typeface="Calibri"/>
+              </a:rPr>
+              <a:t>La </a:t>
+            </a:r>
+            <a:r>
+              <a:rPr sz="1700" b="1" i="0">
+                <a:solidFill>
+                  <a:srgbClr val="212B36"/>
+                </a:solidFill>
+                <a:latin typeface="Calibri"/>
+              </a:rPr>
+              <a:t>valeur saisie au départ</a:t>
+            </a:r>
+            <a:r>
+              <a:rPr sz="1700" b="0" i="0">
+                <a:solidFill>
+                  <a:srgbClr val="212B36"/>
+                </a:solidFill>
+                <a:latin typeface="Calibri"/>
+              </a:rPr>
+              <a:t> sert de point de comptage initial (amorçage d'une équipe existante)</a:t>
             </a:r>
           </a:p>
         </p:txBody>
@@ -5891,51 +9425,7 @@
         <p:spPr>
           <a:xfrm>
             <a:off x="0" y="0"/>
-            <a:ext cx="12191695" cy="1051560"/>
-          </a:xfrm>
-          <a:prstGeom prst="rect">
-            <a:avLst/>
-          </a:prstGeom>
-          <a:solidFill>
-            <a:srgbClr val="005BAA"/>
-          </a:solidFill>
-          <a:ln>
-            <a:noFill/>
-          </a:ln>
-          <a:effectLst/>
-        </p:spPr>
-        <p:style>
-          <a:lnRef idx="1">
-            <a:schemeClr val="accent1"/>
-          </a:lnRef>
-          <a:fillRef idx="3">
-            <a:schemeClr val="accent1"/>
-          </a:fillRef>
-          <a:effectRef idx="2">
-            <a:schemeClr val="accent1"/>
-          </a:effectRef>
-          <a:fontRef idx="minor">
-            <a:schemeClr val="lt1"/>
-          </a:fontRef>
-        </p:style>
-        <p:txBody>
-          <a:bodyPr rtlCol="0" anchor="ctr"/>
-          <a:lstStyle/>
-          <a:p>
-            <a:pPr algn="ctr"/>
-          </a:p>
-        </p:txBody>
-      </p:sp>
-      <p:sp>
-        <p:nvSpPr>
-          <p:cNvPr id="3" name="Rectangle 2"/>
-          <p:cNvSpPr/>
-          <p:nvPr/>
-        </p:nvSpPr>
-        <p:spPr>
-          <a:xfrm>
-            <a:off x="0" y="1051560"/>
-            <a:ext cx="12191695" cy="38100"/>
+            <a:ext cx="201168" cy="6858000"/>
           </a:xfrm>
           <a:prstGeom prst="rect">
             <a:avLst/>
@@ -5972,14 +9462,14 @@
       </p:sp>
       <p:sp>
         <p:nvSpPr>
-          <p:cNvPr id="4" name="TextBox 3"/>
+          <p:cNvPr id="3" name="TextBox 2"/>
           <p:cNvSpPr txBox="1"/>
           <p:nvPr/>
         </p:nvSpPr>
         <p:spPr>
           <a:xfrm>
-            <a:off x="548640" y="109728"/>
-            <a:ext cx="11064240" cy="914400"/>
+            <a:off x="502920" y="256032"/>
+            <a:ext cx="11247120" cy="822960"/>
           </a:xfrm>
           <a:prstGeom prst="rect">
             <a:avLst/>
@@ -5987,44 +9477,33 @@
           <a:noFill/>
         </p:spPr>
         <p:txBody>
-          <a:bodyPr wrap="square" anchor="t">
+          <a:bodyPr wrap="square">
             <a:spAutoFit/>
           </a:bodyPr>
           <a:lstStyle/>
           <a:p>
             <a:r>
-              <a:rPr sz="1200" b="1" i="0">
-                <a:solidFill>
-                  <a:srgbClr val="CFE2F3"/>
-                </a:solidFill>
-                <a:latin typeface="Calibri"/>
-              </a:rPr>
-              <a:t>CONCURRENCE, INTÉGRITÉ, RÉTENTION</a:t>
-            </a:r>
-          </a:p>
-          <a:p>
-            <a:r>
-              <a:rPr sz="2800" b="1" i="0">
-                <a:solidFill>
-                  <a:srgbClr val="FFFFFF"/>
-                </a:solidFill>
-                <a:latin typeface="Calibri"/>
-              </a:rPr>
-              <a:t>Robustesse &amp; exploitation</a:t>
-            </a:r>
-          </a:p>
-        </p:txBody>
-      </p:sp>
-      <p:sp>
-        <p:nvSpPr>
-          <p:cNvPr id="5" name="TextBox 4"/>
+              <a:rPr sz="3000" b="1" i="0">
+                <a:solidFill>
+                  <a:srgbClr val="212B36"/>
+                </a:solidFill>
+                <a:latin typeface="Calibri"/>
+              </a:rPr>
+              <a:t>Les trois mails</a:t>
+            </a:r>
+          </a:p>
+        </p:txBody>
+      </p:sp>
+      <p:sp>
+        <p:nvSpPr>
+          <p:cNvPr id="4" name="TextBox 3"/>
           <p:cNvSpPr txBox="1"/>
           <p:nvPr/>
         </p:nvSpPr>
         <p:spPr>
           <a:xfrm>
-            <a:off x="640080" y="1325880"/>
-            <a:ext cx="10881360" cy="5029200"/>
+            <a:off x="502920" y="868680"/>
+            <a:ext cx="11247120" cy="457200"/>
           </a:xfrm>
           <a:prstGeom prst="rect">
             <a:avLst/>
@@ -6032,86 +9511,165 @@
           <a:noFill/>
         </p:spPr>
         <p:txBody>
-          <a:bodyPr wrap="square" anchor="t">
+          <a:bodyPr wrap="square">
             <a:spAutoFit/>
           </a:bodyPr>
           <a:lstStyle/>
           <a:p>
-            <a:pPr>
-              <a:spcAft>
-                <a:spcPts val="600"/>
-              </a:spcAft>
-            </a:pPr>
-            <a:r>
-              <a:rPr sz="1800" b="1" i="0">
-                <a:solidFill>
-                  <a:srgbClr val="1F2A37"/>
-                </a:solidFill>
-                <a:latin typeface="Calibri"/>
-              </a:rPr>
-              <a:t>▪  Verrou applicatif honoré (abandon si actif ; orphelin &gt; 120 min ignoré) + verrou Excel ~$.</a:t>
-            </a:r>
-          </a:p>
-          <a:p>
-            <a:pPr>
-              <a:spcAft>
-                <a:spcPts val="600"/>
-              </a:spcAft>
-            </a:pPr>
-            <a:r>
-              <a:rPr sz="1800" b="1" i="0">
-                <a:solidFill>
-                  <a:srgbClr val="1F2A37"/>
-                </a:solidFill>
-                <a:latin typeface="Calibri"/>
-              </a:rPr>
-              <a:t>▪  Écriture transactionnelle : .tmp → copie d'archive → promotion. Pas de classeur perdu.</a:t>
-            </a:r>
-          </a:p>
-          <a:p>
-            <a:pPr>
-              <a:spcAft>
-                <a:spcPts val="600"/>
-              </a:spcAft>
-            </a:pPr>
-            <a:r>
-              <a:rPr sz="1800" b="1" i="0">
-                <a:solidFill>
-                  <a:srgbClr val="1F2A37"/>
-                </a:solidFill>
-                <a:latin typeface="Calibri"/>
-              </a:rPr>
-              <a:t>▪  Rétention 28 jours : copies historique, logs orchestrateur, journaux de squad datés.</a:t>
-            </a:r>
-          </a:p>
-          <a:p>
-            <a:pPr>
-              <a:spcAft>
-                <a:spcPts val="600"/>
-              </a:spcAft>
-            </a:pPr>
-            <a:r>
-              <a:rPr sz="1800" b="1" i="0">
-                <a:solidFill>
-                  <a:srgbClr val="1F2A37"/>
-                </a:solidFill>
-                <a:latin typeface="Calibri"/>
-              </a:rPr>
-              <a:t>▪  Orchestrateur : une squad en échec n'arrête pas les autres ; récap aux admins si anomalie.</a:t>
-            </a:r>
-          </a:p>
-        </p:txBody>
-      </p:sp>
-      <p:sp>
-        <p:nvSpPr>
-          <p:cNvPr id="6" name="TextBox 5"/>
+            <a:r>
+              <a:rPr sz="1500" b="0" i="1">
+                <a:solidFill>
+                  <a:srgbClr val="5A6672"/>
+                </a:solidFill>
+                <a:latin typeface="Calibri"/>
+              </a:rPr>
+              <a:t>Charte HTML commune, contenu propre à chaque squad</a:t>
+            </a:r>
+          </a:p>
+        </p:txBody>
+      </p:sp>
+      <p:sp>
+        <p:nvSpPr>
+          <p:cNvPr id="5" name="Rectangle 4"/>
+          <p:cNvSpPr/>
+          <p:nvPr/>
+        </p:nvSpPr>
+        <p:spPr>
+          <a:xfrm>
+            <a:off x="502920" y="1234440"/>
+            <a:ext cx="11155680" cy="27940"/>
+          </a:xfrm>
+          <a:prstGeom prst="rect">
+            <a:avLst/>
+          </a:prstGeom>
+          <a:solidFill>
+            <a:srgbClr val="00A8A8"/>
+          </a:solidFill>
+          <a:ln>
+            <a:noFill/>
+          </a:ln>
+          <a:effectLst/>
+        </p:spPr>
+        <p:style>
+          <a:lnRef idx="1">
+            <a:schemeClr val="accent1"/>
+          </a:lnRef>
+          <a:fillRef idx="3">
+            <a:schemeClr val="accent1"/>
+          </a:fillRef>
+          <a:effectRef idx="2">
+            <a:schemeClr val="accent1"/>
+          </a:effectRef>
+          <a:fontRef idx="minor">
+            <a:schemeClr val="lt1"/>
+          </a:fontRef>
+        </p:style>
+        <p:txBody>
+          <a:bodyPr rtlCol="0" anchor="ctr"/>
+          <a:lstStyle/>
+          <a:p>
+            <a:pPr algn="ctr"/>
+          </a:p>
+        </p:txBody>
+      </p:sp>
+      <p:sp>
+        <p:nvSpPr>
+          <p:cNvPr id="6" name="Rectangle 5"/>
+          <p:cNvSpPr/>
+          <p:nvPr/>
+        </p:nvSpPr>
+        <p:spPr>
+          <a:xfrm>
+            <a:off x="502920" y="1600200"/>
+            <a:ext cx="3566160" cy="4023360"/>
+          </a:xfrm>
+          <a:prstGeom prst="rect">
+            <a:avLst/>
+          </a:prstGeom>
+          <a:solidFill>
+            <a:srgbClr val="F2F6F8"/>
+          </a:solidFill>
+          <a:ln>
+            <a:noFill/>
+          </a:ln>
+          <a:effectLst/>
+        </p:spPr>
+        <p:style>
+          <a:lnRef idx="1">
+            <a:schemeClr val="accent1"/>
+          </a:lnRef>
+          <a:fillRef idx="3">
+            <a:schemeClr val="accent1"/>
+          </a:fillRef>
+          <a:effectRef idx="2">
+            <a:schemeClr val="accent1"/>
+          </a:effectRef>
+          <a:fontRef idx="minor">
+            <a:schemeClr val="lt1"/>
+          </a:fontRef>
+        </p:style>
+        <p:txBody>
+          <a:bodyPr rtlCol="0" anchor="ctr"/>
+          <a:lstStyle/>
+          <a:p>
+            <a:pPr algn="ctr"/>
+          </a:p>
+        </p:txBody>
+      </p:sp>
+      <p:sp>
+        <p:nvSpPr>
+          <p:cNvPr id="7" name="Rectangle 6"/>
+          <p:cNvSpPr/>
+          <p:nvPr/>
+        </p:nvSpPr>
+        <p:spPr>
+          <a:xfrm>
+            <a:off x="502920" y="1600200"/>
+            <a:ext cx="3566160" cy="38100"/>
+          </a:xfrm>
+          <a:prstGeom prst="rect">
+            <a:avLst/>
+          </a:prstGeom>
+          <a:solidFill>
+            <a:srgbClr val="00A8A8"/>
+          </a:solidFill>
+          <a:ln>
+            <a:noFill/>
+          </a:ln>
+          <a:effectLst/>
+        </p:spPr>
+        <p:style>
+          <a:lnRef idx="1">
+            <a:schemeClr val="accent1"/>
+          </a:lnRef>
+          <a:fillRef idx="3">
+            <a:schemeClr val="accent1"/>
+          </a:fillRef>
+          <a:effectRef idx="2">
+            <a:schemeClr val="accent1"/>
+          </a:effectRef>
+          <a:fontRef idx="minor">
+            <a:schemeClr val="lt1"/>
+          </a:fontRef>
+        </p:style>
+        <p:txBody>
+          <a:bodyPr rtlCol="0" anchor="ctr"/>
+          <a:lstStyle/>
+          <a:p>
+            <a:pPr algn="ctr"/>
+          </a:p>
+        </p:txBody>
+      </p:sp>
+      <p:sp>
+        <p:nvSpPr>
+          <p:cNvPr id="8" name="TextBox 7"/>
           <p:cNvSpPr txBox="1"/>
           <p:nvPr/>
         </p:nvSpPr>
         <p:spPr>
           <a:xfrm>
-            <a:off x="548640" y="6400800"/>
-            <a:ext cx="11064240" cy="365760"/>
+            <a:off x="640080" y="1691640"/>
+            <a:ext cx="3291840" cy="3840480"/>
           </a:xfrm>
           <a:prstGeom prst="rect">
             <a:avLst/>
@@ -6119,19 +9677,655 @@
           <a:noFill/>
         </p:spPr>
         <p:txBody>
-          <a:bodyPr wrap="square" anchor="t">
+          <a:bodyPr wrap="square">
             <a:spAutoFit/>
           </a:bodyPr>
           <a:lstStyle/>
           <a:p>
-            <a:r>
-              <a:rPr sz="900" b="0" i="0">
-                <a:solidFill>
-                  <a:srgbClr val="5B6670"/>
-                </a:solidFill>
-                <a:latin typeface="Calibri"/>
-              </a:rPr>
-              <a:t>Suivi d'Exploitation Multi-Squads</a:t>
+            <a:pPr>
+              <a:spcAft>
+                <a:spcPts val="400"/>
+              </a:spcAft>
+            </a:pPr>
+            <a:r>
+              <a:rPr sz="1500" b="1" i="0">
+                <a:solidFill>
+                  <a:srgbClr val="00A8A8"/>
+                </a:solidFill>
+                <a:latin typeface="Calibri"/>
+              </a:rPr>
+              <a:t>DESIGNATION (vendredi)</a:t>
+            </a:r>
+          </a:p>
+          <a:p>
+            <a:pPr>
+              <a:spcAft>
+                <a:spcPts val="300"/>
+              </a:spcAft>
+            </a:pPr>
+            <a:r>
+              <a:rPr sz="1300" b="0" i="0">
+                <a:solidFill>
+                  <a:srgbClr val="212B36"/>
+                </a:solidFill>
+                <a:latin typeface="Calibri"/>
+              </a:rPr>
+              <a:t>Aux </a:t>
+            </a:r>
+            <a:r>
+              <a:rPr sz="1300" b="1" i="0">
+                <a:solidFill>
+                  <a:srgbClr val="212B36"/>
+                </a:solidFill>
+                <a:latin typeface="Calibri"/>
+              </a:rPr>
+              <a:t>désignés</a:t>
+            </a:r>
+            <a:r>
+              <a:rPr sz="1300" b="0" i="0">
+                <a:solidFill>
+                  <a:srgbClr val="212B36"/>
+                </a:solidFill>
+                <a:latin typeface="Calibri"/>
+              </a:rPr>
+              <a:t>, Cc squad</a:t>
+            </a:r>
+          </a:p>
+          <a:p>
+            <a:pPr>
+              <a:spcAft>
+                <a:spcPts val="300"/>
+              </a:spcAft>
+            </a:pPr>
+            <a:r>
+              <a:rPr sz="1300" b="0" i="0">
+                <a:solidFill>
+                  <a:srgbClr val="212B36"/>
+                </a:solidFill>
+                <a:latin typeface="Calibri"/>
+              </a:rPr>
+              <a:t>Désignation de la semaine (1 personne par rôle)</a:t>
+            </a:r>
+          </a:p>
+          <a:p>
+            <a:pPr>
+              <a:spcAft>
+                <a:spcPts val="300"/>
+              </a:spcAft>
+            </a:pPr>
+            <a:r>
+              <a:rPr sz="1300" b="1" i="0">
+                <a:solidFill>
+                  <a:srgbClr val="212B36"/>
+                </a:solidFill>
+                <a:latin typeface="Calibri"/>
+              </a:rPr>
+              <a:t>Prévision des 3 prochaines semaines</a:t>
+            </a:r>
+            <a:r>
+              <a:rPr sz="1300" b="0" i="0">
+                <a:solidFill>
+                  <a:srgbClr val="212B36"/>
+                </a:solidFill>
+                <a:latin typeface="Calibri"/>
+              </a:rPr>
+              <a:t> (simulation de l'algo, 1 colonne/rôle)</a:t>
+            </a:r>
+          </a:p>
+          <a:p>
+            <a:pPr>
+              <a:spcAft>
+                <a:spcPts val="300"/>
+              </a:spcAft>
+            </a:pPr>
+            <a:r>
+              <a:rPr sz="1300" b="1" i="0">
+                <a:solidFill>
+                  <a:srgbClr val="212B36"/>
+                </a:solidFill>
+                <a:latin typeface="Calibri"/>
+              </a:rPr>
+              <a:t>Compteurs par rôle</a:t>
+            </a:r>
+            <a:r>
+              <a:rPr sz="1300" b="0" i="0">
+                <a:solidFill>
+                  <a:srgbClr val="212B36"/>
+                </a:solidFill>
+                <a:latin typeface="Calibri"/>
+              </a:rPr>
+              <a:t> (Nom / Actif / Compteur / Dernier suivi), triés dans l'ordre de désignation</a:t>
+            </a:r>
+          </a:p>
+          <a:p>
+            <a:pPr>
+              <a:spcAft>
+                <a:spcPts val="300"/>
+              </a:spcAft>
+            </a:pPr>
+            <a:r>
+              <a:rPr sz="1300" b="0" i="0">
+                <a:solidFill>
+                  <a:srgbClr val="212B36"/>
+                </a:solidFill>
+                <a:latin typeface="Calibri"/>
+              </a:rPr>
+              <a:t>Note d'équipe (« Note &lt;Rôle&gt; ») si renseignée</a:t>
+            </a:r>
+          </a:p>
+        </p:txBody>
+      </p:sp>
+      <p:sp>
+        <p:nvSpPr>
+          <p:cNvPr id="9" name="Rectangle 8"/>
+          <p:cNvSpPr/>
+          <p:nvPr/>
+        </p:nvSpPr>
+        <p:spPr>
+          <a:xfrm>
+            <a:off x="4343400" y="1600200"/>
+            <a:ext cx="3566160" cy="4023360"/>
+          </a:xfrm>
+          <a:prstGeom prst="rect">
+            <a:avLst/>
+          </a:prstGeom>
+          <a:solidFill>
+            <a:srgbClr val="F2F6F8"/>
+          </a:solidFill>
+          <a:ln>
+            <a:noFill/>
+          </a:ln>
+          <a:effectLst/>
+        </p:spPr>
+        <p:style>
+          <a:lnRef idx="1">
+            <a:schemeClr val="accent1"/>
+          </a:lnRef>
+          <a:fillRef idx="3">
+            <a:schemeClr val="accent1"/>
+          </a:fillRef>
+          <a:effectRef idx="2">
+            <a:schemeClr val="accent1"/>
+          </a:effectRef>
+          <a:fontRef idx="minor">
+            <a:schemeClr val="lt1"/>
+          </a:fontRef>
+        </p:style>
+        <p:txBody>
+          <a:bodyPr rtlCol="0" anchor="ctr"/>
+          <a:lstStyle/>
+          <a:p>
+            <a:pPr algn="ctr"/>
+          </a:p>
+        </p:txBody>
+      </p:sp>
+      <p:sp>
+        <p:nvSpPr>
+          <p:cNvPr id="10" name="Rectangle 9"/>
+          <p:cNvSpPr/>
+          <p:nvPr/>
+        </p:nvSpPr>
+        <p:spPr>
+          <a:xfrm>
+            <a:off x="4343400" y="1600200"/>
+            <a:ext cx="3566160" cy="38100"/>
+          </a:xfrm>
+          <a:prstGeom prst="rect">
+            <a:avLst/>
+          </a:prstGeom>
+          <a:solidFill>
+            <a:srgbClr val="2E75B6"/>
+          </a:solidFill>
+          <a:ln>
+            <a:noFill/>
+          </a:ln>
+          <a:effectLst/>
+        </p:spPr>
+        <p:style>
+          <a:lnRef idx="1">
+            <a:schemeClr val="accent1"/>
+          </a:lnRef>
+          <a:fillRef idx="3">
+            <a:schemeClr val="accent1"/>
+          </a:fillRef>
+          <a:effectRef idx="2">
+            <a:schemeClr val="accent1"/>
+          </a:effectRef>
+          <a:fontRef idx="minor">
+            <a:schemeClr val="lt1"/>
+          </a:fontRef>
+        </p:style>
+        <p:txBody>
+          <a:bodyPr rtlCol="0" anchor="ctr"/>
+          <a:lstStyle/>
+          <a:p>
+            <a:pPr algn="ctr"/>
+          </a:p>
+        </p:txBody>
+      </p:sp>
+      <p:sp>
+        <p:nvSpPr>
+          <p:cNvPr id="11" name="TextBox 10"/>
+          <p:cNvSpPr txBox="1"/>
+          <p:nvPr/>
+        </p:nvSpPr>
+        <p:spPr>
+          <a:xfrm>
+            <a:off x="4480560" y="1691640"/>
+            <a:ext cx="3291840" cy="3840480"/>
+          </a:xfrm>
+          <a:prstGeom prst="rect">
+            <a:avLst/>
+          </a:prstGeom>
+          <a:noFill/>
+        </p:spPr>
+        <p:txBody>
+          <a:bodyPr wrap="square">
+            <a:spAutoFit/>
+          </a:bodyPr>
+          <a:lstStyle/>
+          <a:p>
+            <a:pPr>
+              <a:spcAft>
+                <a:spcPts val="400"/>
+              </a:spcAft>
+            </a:pPr>
+            <a:r>
+              <a:rPr sz="1500" b="1" i="0">
+                <a:solidFill>
+                  <a:srgbClr val="2E75B6"/>
+                </a:solidFill>
+                <a:latin typeface="Calibri"/>
+              </a:rPr>
+              <a:t>RAPPEL (lundi)</a:t>
+            </a:r>
+          </a:p>
+          <a:p>
+            <a:pPr>
+              <a:spcAft>
+                <a:spcPts val="300"/>
+              </a:spcAft>
+            </a:pPr>
+            <a:r>
+              <a:rPr sz="1300" b="0" i="0">
+                <a:solidFill>
+                  <a:srgbClr val="212B36"/>
+                </a:solidFill>
+                <a:latin typeface="Calibri"/>
+              </a:rPr>
+              <a:t>Aux </a:t>
+            </a:r>
+            <a:r>
+              <a:rPr sz="1300" b="1" i="0">
+                <a:solidFill>
+                  <a:srgbClr val="212B36"/>
+                </a:solidFill>
+                <a:latin typeface="Calibri"/>
+              </a:rPr>
+              <a:t>désignés confirmés</a:t>
+            </a:r>
+            <a:r>
+              <a:rPr sz="1300" b="0" i="0">
+                <a:solidFill>
+                  <a:srgbClr val="212B36"/>
+                </a:solidFill>
+                <a:latin typeface="Calibri"/>
+              </a:rPr>
+              <a:t> de la semaine en cours</a:t>
+            </a:r>
+          </a:p>
+          <a:p>
+            <a:pPr>
+              <a:spcAft>
+                <a:spcPts val="300"/>
+              </a:spcAft>
+            </a:pPr>
+            <a:r>
+              <a:rPr sz="1300" b="0" i="0">
+                <a:solidFill>
+                  <a:srgbClr val="212B36"/>
+                </a:solidFill>
+                <a:latin typeface="Calibri"/>
+              </a:rPr>
+              <a:t>Reprend les congés ajoutés le week-end</a:t>
+            </a:r>
+          </a:p>
+          <a:p>
+            <a:pPr>
+              <a:spcAft>
+                <a:spcPts val="300"/>
+              </a:spcAft>
+            </a:pPr>
+            <a:r>
+              <a:rPr sz="1300" b="0" i="0">
+                <a:solidFill>
+                  <a:srgbClr val="212B36"/>
+                </a:solidFill>
+                <a:latin typeface="Calibri"/>
+              </a:rPr>
+              <a:t>Renseigne </a:t>
+            </a:r>
+            <a:r>
+              <a:rPr sz="1300" b="1" i="0">
+                <a:solidFill>
+                  <a:srgbClr val="212B36"/>
+                </a:solidFill>
+                <a:latin typeface="Calibri"/>
+              </a:rPr>
+              <a:t>DateRappel</a:t>
+            </a:r>
+            <a:r>
+              <a:rPr sz="1300" b="0" i="0">
+                <a:solidFill>
+                  <a:srgbClr val="212B36"/>
+                </a:solidFill>
+                <a:latin typeface="Calibri"/>
+              </a:rPr>
+              <a:t> dans l'Historique</a:t>
+            </a:r>
+          </a:p>
+          <a:p>
+            <a:pPr>
+              <a:spcAft>
+                <a:spcPts val="300"/>
+              </a:spcAft>
+            </a:pPr>
+            <a:r>
+              <a:rPr sz="1300" b="0" i="0">
+                <a:solidFill>
+                  <a:srgbClr val="212B36"/>
+                </a:solidFill>
+                <a:latin typeface="Calibri"/>
+              </a:rPr>
+              <a:t>Confirme le </a:t>
+            </a:r>
+            <a:r>
+              <a:rPr sz="1300" b="1" i="0">
+                <a:solidFill>
+                  <a:srgbClr val="212B36"/>
+                </a:solidFill>
+                <a:latin typeface="Calibri"/>
+              </a:rPr>
+              <a:t>Compteur</a:t>
+            </a:r>
+            <a:r>
+              <a:rPr sz="1300" b="0" i="0">
+                <a:solidFill>
+                  <a:srgbClr val="212B36"/>
+                </a:solidFill>
+                <a:latin typeface="Calibri"/>
+              </a:rPr>
+              <a:t> (+1)</a:t>
+            </a:r>
+          </a:p>
+        </p:txBody>
+      </p:sp>
+      <p:sp>
+        <p:nvSpPr>
+          <p:cNvPr id="12" name="Rectangle 11"/>
+          <p:cNvSpPr/>
+          <p:nvPr/>
+        </p:nvSpPr>
+        <p:spPr>
+          <a:xfrm>
+            <a:off x="8183879" y="1600200"/>
+            <a:ext cx="3566160" cy="4023360"/>
+          </a:xfrm>
+          <a:prstGeom prst="rect">
+            <a:avLst/>
+          </a:prstGeom>
+          <a:solidFill>
+            <a:srgbClr val="F2F6F8"/>
+          </a:solidFill>
+          <a:ln>
+            <a:noFill/>
+          </a:ln>
+          <a:effectLst/>
+        </p:spPr>
+        <p:style>
+          <a:lnRef idx="1">
+            <a:schemeClr val="accent1"/>
+          </a:lnRef>
+          <a:fillRef idx="3">
+            <a:schemeClr val="accent1"/>
+          </a:fillRef>
+          <a:effectRef idx="2">
+            <a:schemeClr val="accent1"/>
+          </a:effectRef>
+          <a:fontRef idx="minor">
+            <a:schemeClr val="lt1"/>
+          </a:fontRef>
+        </p:style>
+        <p:txBody>
+          <a:bodyPr rtlCol="0" anchor="ctr"/>
+          <a:lstStyle/>
+          <a:p>
+            <a:pPr algn="ctr"/>
+          </a:p>
+        </p:txBody>
+      </p:sp>
+      <p:sp>
+        <p:nvSpPr>
+          <p:cNvPr id="13" name="Rectangle 12"/>
+          <p:cNvSpPr/>
+          <p:nvPr/>
+        </p:nvSpPr>
+        <p:spPr>
+          <a:xfrm>
+            <a:off x="8183879" y="1600200"/>
+            <a:ext cx="3566160" cy="38100"/>
+          </a:xfrm>
+          <a:prstGeom prst="rect">
+            <a:avLst/>
+          </a:prstGeom>
+          <a:solidFill>
+            <a:srgbClr val="C0392B"/>
+          </a:solidFill>
+          <a:ln>
+            <a:noFill/>
+          </a:ln>
+          <a:effectLst/>
+        </p:spPr>
+        <p:style>
+          <a:lnRef idx="1">
+            <a:schemeClr val="accent1"/>
+          </a:lnRef>
+          <a:fillRef idx="3">
+            <a:schemeClr val="accent1"/>
+          </a:fillRef>
+          <a:effectRef idx="2">
+            <a:schemeClr val="accent1"/>
+          </a:effectRef>
+          <a:fontRef idx="minor">
+            <a:schemeClr val="lt1"/>
+          </a:fontRef>
+        </p:style>
+        <p:txBody>
+          <a:bodyPr rtlCol="0" anchor="ctr"/>
+          <a:lstStyle/>
+          <a:p>
+            <a:pPr algn="ctr"/>
+          </a:p>
+        </p:txBody>
+      </p:sp>
+      <p:sp>
+        <p:nvSpPr>
+          <p:cNvPr id="14" name="TextBox 13"/>
+          <p:cNvSpPr txBox="1"/>
+          <p:nvPr/>
+        </p:nvSpPr>
+        <p:spPr>
+          <a:xfrm>
+            <a:off x="8321039" y="1691640"/>
+            <a:ext cx="3291840" cy="3840480"/>
+          </a:xfrm>
+          <a:prstGeom prst="rect">
+            <a:avLst/>
+          </a:prstGeom>
+          <a:noFill/>
+        </p:spPr>
+        <p:txBody>
+          <a:bodyPr wrap="square">
+            <a:spAutoFit/>
+          </a:bodyPr>
+          <a:lstStyle/>
+          <a:p>
+            <a:pPr>
+              <a:spcAft>
+                <a:spcPts val="400"/>
+              </a:spcAft>
+            </a:pPr>
+            <a:r>
+              <a:rPr sz="1500" b="1" i="0">
+                <a:solidFill>
+                  <a:srgbClr val="C0392B"/>
+                </a:solidFill>
+                <a:latin typeface="Calibri"/>
+              </a:rPr>
+              <a:t>ALERTE</a:t>
+            </a:r>
+          </a:p>
+          <a:p>
+            <a:pPr>
+              <a:spcAft>
+                <a:spcPts val="300"/>
+              </a:spcAft>
+            </a:pPr>
+            <a:r>
+              <a:rPr sz="1300" b="0" i="0">
+                <a:solidFill>
+                  <a:srgbClr val="212B36"/>
+                </a:solidFill>
+                <a:latin typeface="Calibri"/>
+              </a:rPr>
+              <a:t>Aux </a:t>
+            </a:r>
+            <a:r>
+              <a:rPr sz="1300" b="1" i="0">
+                <a:solidFill>
+                  <a:srgbClr val="212B36"/>
+                </a:solidFill>
+                <a:latin typeface="Calibri"/>
+              </a:rPr>
+              <a:t>EmailsAdmin</a:t>
+            </a:r>
+            <a:r>
+              <a:rPr sz="1300" b="0" i="0">
+                <a:solidFill>
+                  <a:srgbClr val="212B36"/>
+                </a:solidFill>
+                <a:latin typeface="Calibri"/>
+              </a:rPr>
+              <a:t> de la squad</a:t>
+            </a:r>
+          </a:p>
+          <a:p>
+            <a:pPr>
+              <a:spcAft>
+                <a:spcPts val="300"/>
+              </a:spcAft>
+            </a:pPr>
+            <a:r>
+              <a:rPr sz="1300" b="0" i="0">
+                <a:solidFill>
+                  <a:srgbClr val="212B36"/>
+                </a:solidFill>
+                <a:latin typeface="Calibri"/>
+              </a:rPr>
+              <a:t>Un rôle </a:t>
+            </a:r>
+            <a:r>
+              <a:rPr sz="1300" b="1" i="0">
+                <a:solidFill>
+                  <a:srgbClr val="212B36"/>
+                </a:solidFill>
+                <a:latin typeface="Calibri"/>
+              </a:rPr>
+              <a:t>sans candidat</a:t>
+            </a:r>
+            <a:r>
+              <a:rPr sz="1300" b="0" i="0">
+                <a:solidFill>
+                  <a:srgbClr val="212B36"/>
+                </a:solidFill>
+                <a:latin typeface="Calibri"/>
+              </a:rPr>
+              <a:t> disponible</a:t>
+            </a:r>
+          </a:p>
+          <a:p>
+            <a:pPr>
+              <a:spcAft>
+                <a:spcPts val="300"/>
+              </a:spcAft>
+            </a:pPr>
+            <a:r>
+              <a:rPr sz="1300" b="1" i="0">
+                <a:solidFill>
+                  <a:srgbClr val="212B36"/>
+                </a:solidFill>
+                <a:latin typeface="Calibri"/>
+              </a:rPr>
+              <a:t>Atomique</a:t>
+            </a:r>
+            <a:r>
+              <a:rPr sz="1300" b="0" i="0">
+                <a:solidFill>
+                  <a:srgbClr val="212B36"/>
+                </a:solidFill>
+                <a:latin typeface="Calibri"/>
+              </a:rPr>
+              <a:t> : aucune désignation commitée</a:t>
+            </a:r>
+          </a:p>
+          <a:p>
+            <a:pPr>
+              <a:spcAft>
+                <a:spcPts val="300"/>
+              </a:spcAft>
+            </a:pPr>
+            <a:r>
+              <a:rPr sz="1300" b="0" i="0">
+                <a:solidFill>
+                  <a:srgbClr val="212B36"/>
+                </a:solidFill>
+                <a:latin typeface="Calibri"/>
+              </a:rPr>
+              <a:t>Intervention manuelle demandée (désigner + compléter l'Historique)</a:t>
+            </a:r>
+          </a:p>
+        </p:txBody>
+      </p:sp>
+      <p:sp>
+        <p:nvSpPr>
+          <p:cNvPr id="15" name="TextBox 14"/>
+          <p:cNvSpPr txBox="1"/>
+          <p:nvPr/>
+        </p:nvSpPr>
+        <p:spPr>
+          <a:xfrm>
+            <a:off x="502920" y="5806440"/>
+            <a:ext cx="11155680" cy="731520"/>
+          </a:xfrm>
+          <a:prstGeom prst="rect">
+            <a:avLst/>
+          </a:prstGeom>
+          <a:noFill/>
+        </p:spPr>
+        <p:txBody>
+          <a:bodyPr wrap="square">
+            <a:spAutoFit/>
+          </a:bodyPr>
+          <a:lstStyle/>
+          <a:p>
+            <a:r>
+              <a:rPr sz="1400" b="0" i="1">
+                <a:solidFill>
+                  <a:srgbClr val="5A6672"/>
+                </a:solidFill>
+                <a:latin typeface="Calibri"/>
+              </a:rPr>
+              <a:t>Envoi délégué au moteur commun SendMailNotificationHTML.ps1 (process séparé, config squad sérialisée) — pas de repli : moteur introuvable = échec explicite. Pas de mail récapitulatif global.</a:t>
             </a:r>
           </a:p>
         </p:txBody>

--- a/docs/Presentation-Suivi-Exploitation.pptx
+++ b/docs/Presentation-Suivi-Exploitation.pptx
@@ -3497,7 +3497,25 @@
                 </a:solidFill>
                 <a:latin typeface="Calibri"/>
               </a:rPr>
-              <a:t> &lt;squad&gt;\suivi_exploitation.lock honoré : abandon si un traitement est en cours (verrou &lt; 120 min), verrou orphelin ignoré avec WARN ; seul le créateur du verrou le supprime</a:t>
+              <a:t> &lt;squad&gt;\suivi_exploitation.lock : pose </a:t>
+            </a:r>
+            <a:r>
+              <a:rPr sz="1600" b="1" i="0">
+                <a:solidFill>
+                  <a:srgbClr val="212B36"/>
+                </a:solidFill>
+                <a:latin typeface="Calibri"/>
+              </a:rPr>
+              <a:t>exclusive</a:t>
+            </a:r>
+            <a:r>
+              <a:rPr sz="1600" b="0" i="0">
+                <a:solidFill>
+                  <a:srgbClr val="212B36"/>
+                </a:solidFill>
+                <a:latin typeface="Calibri"/>
+              </a:rPr>
+              <a:t> (deux lancements simultanés, un seul l'acquiert), abandon si un traitement est en cours (verrou &lt; 120 min), verrou orphelin supprimé avec WARN</a:t>
             </a:r>
           </a:p>
           <a:p>
@@ -4641,7 +4659,7 @@
                 </a:solidFill>
                 <a:latin typeface="Calibri"/>
               </a:rPr>
-              <a:t>Constats (3 moyens · 4 faibles · 6 infos)</a:t>
+              <a:t>Constats (3 moyens · 4 faibles · 6 infos) — TRAITÉS</a:t>
             </a:r>
           </a:p>
           <a:p>
@@ -4657,7 +4675,7 @@
                 </a:solidFill>
                 <a:latin typeface="Calibri"/>
               </a:rPr>
-              <a:t>M1</a:t>
+              <a:t>M1 corrigé</a:t>
             </a:r>
             <a:r>
               <a:rPr sz="1350" b="0" i="0">
@@ -4666,7 +4684,7 @@
                 </a:solidFill>
                 <a:latin typeface="Calibri"/>
               </a:rPr>
-              <a:t> Le filtre -Squad ne matche pas le « Nom » de la config (écart doc/code) et accepte les sous-chaînes</a:t>
+              <a:t> — filtre -Squad : dossier ou « Nom » de la config, correspondance exacte (dispo aussi sur -Action Test)</a:t>
             </a:r>
           </a:p>
           <a:p>
@@ -4682,7 +4700,7 @@
                 </a:solidFill>
                 <a:latin typeface="Calibri"/>
               </a:rPr>
-              <a:t>M2</a:t>
+              <a:t>M2 corrigé</a:t>
             </a:r>
             <a:r>
               <a:rPr sz="1350" b="0" i="0">
@@ -4691,7 +4709,7 @@
                 </a:solidFill>
                 <a:latin typeface="Calibri"/>
               </a:rPr>
-              <a:t> -Action Test ne détecte pas un classeur sans les 5 feuilles (échec différé en prod)</a:t>
+              <a:t> — -Action Test contrôle désormais les 5 feuilles du classeur</a:t>
             </a:r>
           </a:p>
           <a:p>
@@ -4707,7 +4725,7 @@
                 </a:solidFill>
                 <a:latin typeface="Calibri"/>
               </a:rPr>
-              <a:t>M3</a:t>
+              <a:t>M3 corrigé</a:t>
             </a:r>
             <a:r>
               <a:rPr sz="1350" b="0" i="0">
@@ -4716,7 +4734,7 @@
                 </a:solidFill>
                 <a:latin typeface="Calibri"/>
               </a:rPr>
-              <a:t> Config validée en présence mais pas en contenu : EmailsAdmin vide ⇒ alerte perdue en silence</a:t>
+              <a:t> — clés obligatoires validées présentes ET non vides (plus d'alerte perdue en silence)</a:t>
             </a:r>
           </a:p>
           <a:p>
@@ -4732,7 +4750,7 @@
                 </a:solidFill>
                 <a:latin typeface="Calibri"/>
               </a:rPr>
-              <a:t>Faibles</a:t>
+              <a:t>Autres</a:t>
             </a:r>
             <a:r>
               <a:rPr sz="1350" b="0" i="0">
@@ -4741,7 +4759,7 @@
                 </a:solidFill>
                 <a:latin typeface="Calibri"/>
               </a:rPr>
-              <a:t> : pose de verrou non atomique, ligne vide qui masque la suite d'une feuille, membres identifiés par nom…</a:t>
+              <a:t> : verrou posé de façon exclusive, WARN si ligne vide intercalée, nettoyage garanti des fichiers temporaires, placeholders échappés…</a:t>
             </a:r>
           </a:p>
           <a:p>
@@ -4757,7 +4775,7 @@
                 </a:solidFill>
                 <a:latin typeface="Calibri"/>
               </a:rPr>
-              <a:t>Tous corrigeables à faible coût — détail : docs/Revue-de-code-Suivi-Exploitation.md</a:t>
+              <a:t>9 corrigés, 4 documentés — détail et validation de bout en bout : docs/Revue-de-code-Suivi-Exploitation.md §6</a:t>
             </a:r>
           </a:p>
         </p:txBody>
@@ -5116,24 +5134,6 @@
                 </a:solidFill>
                 <a:latin typeface="Calibri"/>
               </a:rPr>
-              <a:t>corriger les 3 constats moyens de la revue (validation de contenu, Test des 5 feuilles, filtre -Squad)</a:t>
-            </a:r>
-          </a:p>
-          <a:p>
-            <a:pPr lvl="1">
-              <a:spcAft>
-                <a:spcPts val="800"/>
-              </a:spcAft>
-              <a:buFont typeface="Arial"/>
-              <a:buChar char="–"/>
-            </a:pPr>
-            <a:r>
-              <a:rPr sz="1400" b="0" i="0">
-                <a:solidFill>
-                  <a:srgbClr val="5A6672"/>
-                </a:solidFill>
-                <a:latin typeface="Calibri"/>
-              </a:rPr>
               <a:t>jours fériés dans l'exclusion congés (calendrier français)</a:t>
             </a:r>
           </a:p>
@@ -7292,7 +7292,16 @@
                 </a:solidFill>
                 <a:latin typeface="Calibri"/>
               </a:rPr>
-              <a:t> (validés par -Action Test) : SmtpServer, From, To, TemplatePath, EmailsAdmin</a:t>
+              <a:t> (validés par -Action Test et avant chaque traitement) : SmtpServer, From, To, TemplatePath, EmailsAdmin — présents </a:t>
+            </a:r>
+            <a:r>
+              <a:rPr sz="1600" b="1" i="0">
+                <a:solidFill>
+                  <a:srgbClr val="212B36"/>
+                </a:solidFill>
+                <a:latin typeface="Calibri"/>
+              </a:rPr>
+              <a:t>et non vides</a:t>
             </a:r>
           </a:p>
           <a:p>

--- a/docs/Presentation-Suivi-Exploitation.pptx
+++ b/docs/Presentation-Suivi-Exploitation.pptx
@@ -8130,7 +8130,7 @@
         </p:nvSpPr>
         <p:spPr>
           <a:xfrm>
-            <a:off x="502920" y="5120640"/>
+            <a:off x="502920" y="4983480"/>
             <a:ext cx="11155680" cy="4937760"/>
           </a:xfrm>
           <a:prstGeom prst="rect">
@@ -8152,7 +8152,7 @@
               <a:buChar char="▪"/>
             </a:pPr>
             <a:r>
-              <a:rPr sz="1500" b="1" i="0">
+              <a:rPr sz="1400" b="1" i="0">
                 <a:solidFill>
                   <a:srgbClr val="212B36"/>
                 </a:solidFill>
@@ -8161,7 +8161,7 @@
               <a:t>Listes déroulantes anti-faute</a:t>
             </a:r>
             <a:r>
-              <a:rPr sz="1500" b="0" i="0">
+              <a:rPr sz="1400" b="0" i="0">
                 <a:solidFill>
                   <a:srgbClr val="212B36"/>
                 </a:solidFill>
@@ -8179,22 +8179,40 @@
               <a:buChar char="▪"/>
             </a:pPr>
             <a:r>
-              <a:rPr sz="1500" b="1" i="0">
-                <a:solidFill>
-                  <a:srgbClr val="212B36"/>
-                </a:solidFill>
-                <a:latin typeface="Calibri"/>
-              </a:rPr>
-              <a:t>La config mail n'est PAS dans le classeur</a:t>
-            </a:r>
-            <a:r>
-              <a:rPr sz="1500" b="0" i="0">
-                <a:solidFill>
-                  <a:srgbClr val="212B36"/>
-                </a:solidFill>
-                <a:latin typeface="Calibri"/>
-              </a:rPr>
-              <a:t> (elle est dans conf-suivi-squad.json) — des commentaires de cellule le rappellent</a:t>
+              <a:rPr sz="1400" b="1" i="0">
+                <a:solidFill>
+                  <a:srgbClr val="212B36"/>
+                </a:solidFill>
+                <a:latin typeface="Calibri"/>
+              </a:rPr>
+              <a:t>Feuilles protégées</a:t>
+            </a:r>
+            <a:r>
+              <a:rPr sz="1400" b="0" i="0">
+                <a:solidFill>
+                  <a:srgbClr val="212B36"/>
+                </a:solidFill>
+                <a:latin typeface="Calibri"/>
+              </a:rPr>
+              <a:t> (posé par le script, sans mot de passe) : Historique et Log verrouillées ; dans Membres seul le </a:t>
+            </a:r>
+            <a:r>
+              <a:rPr sz="1400" b="1" i="0">
+                <a:solidFill>
+                  <a:srgbClr val="212B36"/>
+                </a:solidFill>
+                <a:latin typeface="Calibri"/>
+              </a:rPr>
+              <a:t>Compteur</a:t>
+            </a:r>
+            <a:r>
+              <a:rPr sz="1400" b="0" i="0">
+                <a:solidFill>
+                  <a:srgbClr val="212B36"/>
+                </a:solidFill>
+                <a:latin typeface="Calibri"/>
+              </a:rPr>
+              <a:t> est verrouillé (saisie et insertion de lignes libres) ; Parametres et Congés non protégées</a:t>
             </a:r>
           </a:p>
           <a:p>
@@ -8206,7 +8224,34 @@
               <a:buChar char="▪"/>
             </a:pPr>
             <a:r>
-              <a:rPr sz="1500" b="0" i="0">
+              <a:rPr sz="1400" b="1" i="0">
+                <a:solidFill>
+                  <a:srgbClr val="212B36"/>
+                </a:solidFill>
+                <a:latin typeface="Calibri"/>
+              </a:rPr>
+              <a:t>La config mail n'est PAS dans le classeur</a:t>
+            </a:r>
+            <a:r>
+              <a:rPr sz="1400" b="0" i="0">
+                <a:solidFill>
+                  <a:srgbClr val="212B36"/>
+                </a:solidFill>
+                <a:latin typeface="Calibri"/>
+              </a:rPr>
+              <a:t> (elle est dans conf-suivi-squad.json) — des commentaires de cellule le rappellent</a:t>
+            </a:r>
+          </a:p>
+          <a:p>
+            <a:pPr>
+              <a:spcAft>
+                <a:spcPts val="800"/>
+              </a:spcAft>
+              <a:buFont typeface="Arial"/>
+              <a:buChar char="▪"/>
+            </a:pPr>
+            <a:r>
+              <a:rPr sz="1400" b="0" i="0">
                 <a:solidFill>
                   <a:srgbClr val="212B36"/>
                 </a:solidFill>
